--- a/docs/decks/v8b_nfi_conference.pptx
+++ b/docs/decks/v8b_nfi_conference.pptx
@@ -3102,7 +3102,7 @@
           <a:p>
             <a:r>
               <a:rPr lang="en-US" dirty="0"/>
-              <a:t>Qualitatively, the same 5-by-5 kilometre tile through four lenses. Left to right: the 2018 NMD label, our model trained on 2018, the 2023 NMD label, and the distilled NFI model. The distilled output is visibly crisper and more coherent than the label it learned from — denoising you can see, not just measure.</a:t>
+              <a:t>Qualitatively, the same 5-by-5 kilometre tile through five lenses. Left to right: the 2018 NMD label, our model trained on 2018, the 2023 NMD label, the distilled Prithvi model, and Tessera. Both models' outputs are visibly crisper and more coherent than the labels they learned from — denoising you can see, not just measure — and Tessera matches the 600-million-parameter Prithvi from a frozen, precomputed embedding.</a:t>
             </a:r>
             <a:endParaRPr lang="en-US" dirty="0"/>
           </a:p>
@@ -12330,7 +12330,7 @@
                 <a:ea typeface="Space Grotesk" pitchFamily="34" charset="-122"/>
                 <a:cs typeface="Space Grotesk" pitchFamily="34" charset="-120"/>
               </a:rPr>
-              <a:t>Four generations, same landscape</a:t>
+              <a:t>Five views, same landscape</a:t>
             </a:r>
             <a:endParaRPr lang="en-US" sz="3200" dirty="0"/>
           </a:p>
@@ -12369,7 +12369,7 @@
                 <a:ea typeface="Space Grotesk" pitchFamily="34" charset="-122"/>
                 <a:cs typeface="Space Grotesk" pitchFamily="34" charset="-120"/>
               </a:rPr>
-              <a:t>One 5×5 km tile, identical extent and unified palette (tile_331280_6541280): the 2018/2023 label sources and the models trained against each target.</a:t>
+              <a:t>One 5×5 km tile, identical extent and unified palette (tile_331280_6541280): the 2018/2023 label sources, and three models — v8b, the distilled Prithvi, and Tessera — each trained against the field-calibrated target.</a:t>
             </a:r>
             <a:endParaRPr lang="en-US" sz="1250" dirty="0"/>
           </a:p>
@@ -12391,8 +12391,8 @@
         </p:blipFill>
         <p:spPr>
           <a:xfrm>
-            <a:off x="585216" y="1737360"/>
-            <a:ext cx="2651760" cy="2651760"/>
+            <a:off x="598932" y="1783080"/>
+            <a:ext cx="2103120" cy="2103120"/>
           </a:xfrm>
           <a:prstGeom prst="rect">
             <a:avLst/>
@@ -12407,8 +12407,8 @@
         </p:nvSpPr>
         <p:spPr>
           <a:xfrm>
-            <a:off x="539496" y="4434840"/>
-            <a:ext cx="2743200" cy="320040"/>
+            <a:off x="553212" y="3931920"/>
+            <a:ext cx="2194560" cy="320040"/>
           </a:xfrm>
           <a:prstGeom prst="rect">
             <a:avLst/>
@@ -12454,8 +12454,8 @@
         </p:blipFill>
         <p:spPr>
           <a:xfrm>
-            <a:off x="3374136" y="1737360"/>
-            <a:ext cx="2651760" cy="2651760"/>
+            <a:off x="2820924" y="1783080"/>
+            <a:ext cx="2103120" cy="2103120"/>
           </a:xfrm>
           <a:prstGeom prst="rect">
             <a:avLst/>
@@ -12470,8 +12470,8 @@
         </p:nvSpPr>
         <p:spPr>
           <a:xfrm>
-            <a:off x="3328416" y="4434840"/>
-            <a:ext cx="2743200" cy="320040"/>
+            <a:off x="2775204" y="3931920"/>
+            <a:ext cx="2194560" cy="320040"/>
           </a:xfrm>
           <a:prstGeom prst="rect">
             <a:avLst/>
@@ -12517,8 +12517,8 @@
         </p:blipFill>
         <p:spPr>
           <a:xfrm>
-            <a:off x="6163056" y="1737360"/>
-            <a:ext cx="2651760" cy="2651760"/>
+            <a:off x="5042916" y="1783080"/>
+            <a:ext cx="2103120" cy="2103120"/>
           </a:xfrm>
           <a:prstGeom prst="rect">
             <a:avLst/>
@@ -12533,8 +12533,8 @@
         </p:nvSpPr>
         <p:spPr>
           <a:xfrm>
-            <a:off x="6117336" y="4434840"/>
-            <a:ext cx="2743200" cy="320040"/>
+            <a:off x="4997196" y="3931920"/>
+            <a:ext cx="2194560" cy="320040"/>
           </a:xfrm>
           <a:prstGeom prst="rect">
             <a:avLst/>
@@ -12580,8 +12580,8 @@
         </p:blipFill>
         <p:spPr>
           <a:xfrm>
-            <a:off x="8951976" y="1737360"/>
-            <a:ext cx="2651760" cy="2651760"/>
+            <a:off x="7264908" y="1783080"/>
+            <a:ext cx="2103120" cy="2103120"/>
           </a:xfrm>
           <a:prstGeom prst="rect">
             <a:avLst/>
@@ -12596,8 +12596,8 @@
         </p:nvSpPr>
         <p:spPr>
           <a:xfrm>
-            <a:off x="8906256" y="4434840"/>
-            <a:ext cx="2743200" cy="320040"/>
+            <a:off x="7219188" y="3931920"/>
+            <a:ext cx="2194560" cy="320040"/>
           </a:xfrm>
           <a:prstGeom prst="rect">
             <a:avLst/>
@@ -12621,15 +12621,78 @@
                 <a:ea typeface="Space Grotesk" pitchFamily="34" charset="-122"/>
                 <a:cs typeface="Space Grotesk" pitchFamily="34" charset="-120"/>
               </a:rPr>
-              <a:t>v8b-NFI (distilled)</a:t>
+              <a:t>Distilled Prithvi</a:t>
             </a:r>
             <a:endParaRPr lang="en-US" sz="1250" dirty="0"/>
           </a:p>
         </p:txBody>
       </p:sp>
-      <p:sp>
-        <p:nvSpPr>
-          <p:cNvPr id="13" name="Shape 7"/>
+      <p:pic>
+        <p:nvPicPr>
+          <p:cNvPr id="13" name="Image 4" descr="preencoded.png">    </p:cNvPr>
+          <p:cNvPicPr>
+            <a:picLocks noChangeAspect="1"/>
+          </p:cNvPicPr>
+          <p:nvPr/>
+        </p:nvPicPr>
+        <p:blipFill>
+          <a:blip r:embed="rId5"/>
+          <a:stretch>
+            <a:fillRect/>
+          </a:stretch>
+        </p:blipFill>
+        <p:spPr>
+          <a:xfrm>
+            <a:off x="9486900" y="1783080"/>
+            <a:ext cx="2103120" cy="2103120"/>
+          </a:xfrm>
+          <a:prstGeom prst="rect">
+            <a:avLst/>
+          </a:prstGeom>
+        </p:spPr>
+      </p:pic>
+      <p:sp>
+        <p:nvSpPr>
+          <p:cNvPr id="14" name="Text 7"/>
+          <p:cNvSpPr/>
+          <p:nvPr/>
+        </p:nvSpPr>
+        <p:spPr>
+          <a:xfrm>
+            <a:off x="9441180" y="3931920"/>
+            <a:ext cx="2194560" cy="320040"/>
+          </a:xfrm>
+          <a:prstGeom prst="rect">
+            <a:avLst/>
+          </a:prstGeom>
+          <a:noFill/>
+          <a:ln/>
+        </p:spPr>
+        <p:txBody>
+          <a:bodyPr wrap="square" lIns="0" tIns="0" rIns="0" bIns="0" rtlCol="0" anchor="ctr"/>
+          <a:lstStyle/>
+          <a:p>
+            <a:pPr algn="ctr" indent="0" marL="0">
+              <a:buNone/>
+            </a:pPr>
+            <a:r>
+              <a:rPr lang="en-US" sz="1250" b="1" dirty="0">
+                <a:solidFill>
+                  <a:srgbClr val="F2C879"/>
+                </a:solidFill>
+                <a:latin typeface="Space Grotesk" pitchFamily="34" charset="0"/>
+                <a:ea typeface="Space Grotesk" pitchFamily="34" charset="-122"/>
+                <a:cs typeface="Space Grotesk" pitchFamily="34" charset="-120"/>
+              </a:rPr>
+              <a:t>Tessera</a:t>
+            </a:r>
+            <a:endParaRPr lang="en-US" sz="1250" dirty="0"/>
+          </a:p>
+        </p:txBody>
+      </p:sp>
+      <p:sp>
+        <p:nvSpPr>
+          <p:cNvPr id="15" name="Shape 8"/>
           <p:cNvSpPr/>
           <p:nvPr/>
         </p:nvSpPr>
@@ -12649,7 +12712,7 @@
       </p:sp>
       <p:sp>
         <p:nvSpPr>
-          <p:cNvPr id="14" name="Text 8"/>
+          <p:cNvPr id="16" name="Text 9"/>
           <p:cNvSpPr/>
           <p:nvPr/>
         </p:nvSpPr>
@@ -12688,7 +12751,7 @@
       </p:sp>
       <p:sp>
         <p:nvSpPr>
-          <p:cNvPr id="15" name="Shape 9"/>
+          <p:cNvPr id="17" name="Shape 10"/>
           <p:cNvSpPr/>
           <p:nvPr/>
         </p:nvSpPr>
@@ -12708,7 +12771,7 @@
       </p:sp>
       <p:sp>
         <p:nvSpPr>
-          <p:cNvPr id="16" name="Text 10"/>
+          <p:cNvPr id="18" name="Text 11"/>
           <p:cNvSpPr/>
           <p:nvPr/>
         </p:nvSpPr>
@@ -12747,7 +12810,7 @@
       </p:sp>
       <p:sp>
         <p:nvSpPr>
-          <p:cNvPr id="17" name="Shape 11"/>
+          <p:cNvPr id="19" name="Shape 12"/>
           <p:cNvSpPr/>
           <p:nvPr/>
         </p:nvSpPr>
@@ -12767,7 +12830,7 @@
       </p:sp>
       <p:sp>
         <p:nvSpPr>
-          <p:cNvPr id="18" name="Text 12"/>
+          <p:cNvPr id="20" name="Text 13"/>
           <p:cNvSpPr/>
           <p:nvPr/>
         </p:nvSpPr>
@@ -12806,7 +12869,7 @@
       </p:sp>
       <p:sp>
         <p:nvSpPr>
-          <p:cNvPr id="19" name="Shape 13"/>
+          <p:cNvPr id="21" name="Shape 14"/>
           <p:cNvSpPr/>
           <p:nvPr/>
         </p:nvSpPr>
@@ -12826,7 +12889,7 @@
       </p:sp>
       <p:sp>
         <p:nvSpPr>
-          <p:cNvPr id="20" name="Text 14"/>
+          <p:cNvPr id="22" name="Text 15"/>
           <p:cNvSpPr/>
           <p:nvPr/>
         </p:nvSpPr>
@@ -12865,7 +12928,7 @@
       </p:sp>
       <p:sp>
         <p:nvSpPr>
-          <p:cNvPr id="21" name="Shape 15"/>
+          <p:cNvPr id="23" name="Shape 16"/>
           <p:cNvSpPr/>
           <p:nvPr/>
         </p:nvSpPr>
@@ -12885,7 +12948,7 @@
       </p:sp>
       <p:sp>
         <p:nvSpPr>
-          <p:cNvPr id="22" name="Text 16"/>
+          <p:cNvPr id="24" name="Text 17"/>
           <p:cNvSpPr/>
           <p:nvPr/>
         </p:nvSpPr>
@@ -12924,7 +12987,7 @@
       </p:sp>
       <p:sp>
         <p:nvSpPr>
-          <p:cNvPr id="23" name="Shape 17"/>
+          <p:cNvPr id="25" name="Shape 18"/>
           <p:cNvSpPr/>
           <p:nvPr/>
         </p:nvSpPr>
@@ -12944,7 +13007,7 @@
       </p:sp>
       <p:sp>
         <p:nvSpPr>
-          <p:cNvPr id="24" name="Text 18"/>
+          <p:cNvPr id="26" name="Text 19"/>
           <p:cNvSpPr/>
           <p:nvPr/>
         </p:nvSpPr>
@@ -12983,7 +13046,7 @@
       </p:sp>
       <p:sp>
         <p:nvSpPr>
-          <p:cNvPr id="25" name="Shape 19"/>
+          <p:cNvPr id="27" name="Shape 20"/>
           <p:cNvSpPr/>
           <p:nvPr/>
         </p:nvSpPr>
@@ -13003,7 +13066,7 @@
       </p:sp>
       <p:sp>
         <p:nvSpPr>
-          <p:cNvPr id="26" name="Text 20"/>
+          <p:cNvPr id="28" name="Text 21"/>
           <p:cNvSpPr/>
           <p:nvPr/>
         </p:nvSpPr>
@@ -13042,7 +13105,7 @@
       </p:sp>
       <p:sp>
         <p:nvSpPr>
-          <p:cNvPr id="27" name="Shape 21"/>
+          <p:cNvPr id="29" name="Shape 22"/>
           <p:cNvSpPr/>
           <p:nvPr/>
         </p:nvSpPr>
@@ -13062,7 +13125,7 @@
       </p:sp>
       <p:sp>
         <p:nvSpPr>
-          <p:cNvPr id="28" name="Text 22"/>
+          <p:cNvPr id="30" name="Text 23"/>
           <p:cNvSpPr/>
           <p:nvPr/>
         </p:nvSpPr>
@@ -13101,7 +13164,7 @@
       </p:sp>
       <p:sp>
         <p:nvSpPr>
-          <p:cNvPr id="29" name="Shape 23"/>
+          <p:cNvPr id="31" name="Shape 24"/>
           <p:cNvSpPr/>
           <p:nvPr/>
         </p:nvSpPr>
@@ -13121,7 +13184,7 @@
       </p:sp>
       <p:sp>
         <p:nvSpPr>
-          <p:cNvPr id="30" name="Text 24"/>
+          <p:cNvPr id="32" name="Text 25"/>
           <p:cNvSpPr/>
           <p:nvPr/>
         </p:nvSpPr>
@@ -13160,7 +13223,7 @@
       </p:sp>
       <p:sp>
         <p:nvSpPr>
-          <p:cNvPr id="31" name="Shape 25"/>
+          <p:cNvPr id="33" name="Shape 26"/>
           <p:cNvSpPr/>
           <p:nvPr/>
         </p:nvSpPr>
@@ -13180,7 +13243,7 @@
       </p:sp>
       <p:sp>
         <p:nvSpPr>
-          <p:cNvPr id="32" name="Text 26"/>
+          <p:cNvPr id="34" name="Text 27"/>
           <p:cNvSpPr/>
           <p:nvPr/>
         </p:nvSpPr>
@@ -13219,7 +13282,7 @@
       </p:sp>
       <p:sp>
         <p:nvSpPr>
-          <p:cNvPr id="33" name="Shape 27"/>
+          <p:cNvPr id="35" name="Shape 28"/>
           <p:cNvSpPr/>
           <p:nvPr/>
         </p:nvSpPr>
@@ -13239,7 +13302,7 @@
       </p:sp>
       <p:sp>
         <p:nvSpPr>
-          <p:cNvPr id="34" name="Text 28"/>
+          <p:cNvPr id="36" name="Text 29"/>
           <p:cNvSpPr/>
           <p:nvPr/>
         </p:nvSpPr>
@@ -13278,7 +13341,7 @@
       </p:sp>
       <p:sp>
         <p:nvSpPr>
-          <p:cNvPr id="35" name="Shape 29"/>
+          <p:cNvPr id="37" name="Shape 30"/>
           <p:cNvSpPr/>
           <p:nvPr/>
         </p:nvSpPr>
@@ -13298,7 +13361,7 @@
       </p:sp>
       <p:sp>
         <p:nvSpPr>
-          <p:cNvPr id="36" name="Text 30"/>
+          <p:cNvPr id="38" name="Text 31"/>
           <p:cNvSpPr/>
           <p:nvPr/>
         </p:nvSpPr>

--- a/docs/decks/v8b_nfi_conference.pptx
+++ b/docs/decks/v8b_nfi_conference.pptx
@@ -24,9 +24,10 @@
     <p:sldId id="272" r:id="rId18"/>
     <p:sldId id="273" r:id="rId19"/>
     <p:sldId id="274" r:id="rId20"/>
+    <p:sldId id="275" r:id="rId21"/>
   </p:sldIdLst>
   <p:notesMasterIdLst>
-    <p:notesMasterId r:id="rId21"/>
+    <p:notesMasterId r:id="rId22"/>
   </p:notesMasterIdLst>
   <p:sldSz cx="12192000" cy="6858000"/>
   <p:notesSz cx="6858000" cy="12192000"/>
@@ -1655,6 +1656,299 @@
     <c:plotArea>
       <c:layout/>
       <c:barChart>
+        <c:barDir val="col"/>
+        <c:grouping val="clustered"/>
+        <c:varyColors val="0"/>
+        <c:ser>
+          <c:idx val="0"/>
+          <c:order val="0"/>
+          <c:tx>
+            <c:strRef>
+              <c:f>Sheet1!$B$1</c:f>
+              <c:strCache>
+                <c:ptCount val="1"/>
+                <c:pt idx="0">
+                  <c:v>NFI held-out forest-type OA</c:v>
+                </c:pt>
+              </c:strCache>
+            </c:strRef>
+          </c:tx>
+          <c:spPr>
+            <a:solidFill>
+              <a:srgbClr val="CDFCE3"/>
+            </a:solidFill>
+            <a:effectLst/>
+          </c:spPr>
+          <c:invertIfNegative val="0"/>
+          <c:dLbls>
+            <c:numFmt formatCode="0.000" sourceLinked="0"/>
+            <c:txPr>
+              <a:bodyPr/>
+              <a:lstStyle/>
+              <a:p>
+                <a:pPr>
+                  <a:defRPr b="0" i="0" strike="noStrike" sz="1200" u="none">
+                    <a:solidFill>
+                      <a:srgbClr val="FFFFFF"/>
+                    </a:solidFill>
+                    <a:latin typeface="Space Grotesk"/>
+                  </a:defRPr>
+                </a:pPr>
+              </a:p>
+            </c:txPr>
+            <c:showLegendKey val="0"/>
+            <c:showVal val="1"/>
+            <c:showCatName val="0"/>
+            <c:showSerName val="0"/>
+            <c:showPercent val="0"/>
+            <c:showBubbleSize val="0"/>
+            <c:showLeaderLines val="0"/>
+          </c:dLbls>
+          <c:dPt>
+            <c:idx val="0"/>
+            <c:invertIfNegative val="0"/>
+            <c:bubble3D val="0"/>
+            <c:spPr>
+              <a:solidFill>
+                <a:srgbClr val="CDFCE3"/>
+              </a:solidFill>
+              <a:effectLst/>
+            </c:spPr>
+          </c:dPt>
+          <c:dPt>
+            <c:idx val="1"/>
+            <c:invertIfNegative val="0"/>
+            <c:bubble3D val="0"/>
+            <c:spPr>
+              <a:solidFill>
+                <a:srgbClr val="FF826C"/>
+              </a:solidFill>
+              <a:effectLst/>
+            </c:spPr>
+          </c:dPt>
+          <c:dPt>
+            <c:idx val="2"/>
+            <c:invertIfNegative val="0"/>
+            <c:bubble3D val="0"/>
+            <c:spPr>
+              <a:solidFill>
+                <a:srgbClr val="5E8478"/>
+              </a:solidFill>
+              <a:effectLst/>
+            </c:spPr>
+          </c:dPt>
+          <c:dPt>
+            <c:idx val="3"/>
+            <c:invertIfNegative val="0"/>
+            <c:bubble3D val="0"/>
+            <c:spPr>
+              <a:solidFill>
+                <a:srgbClr val="5E8478"/>
+              </a:solidFill>
+              <a:effectLst/>
+            </c:spPr>
+          </c:dPt>
+          <c:cat>
+            <c:multiLvlStrRef>
+              <c:f>Sheet1!$A$2:$A$5</c:f>
+              <c:multiLvlStrCache>
+                <c:ptCount val="4"/>
+                <c:lvl>
+                  <c:pt idx="0">
+                    <c:v>Tessera  p1</c:v>
+                  </c:pt>
+                  <c:pt idx="1">
+                    <c:v>Clay  p8</c:v>
+                  </c:pt>
+                  <c:pt idx="2">
+                    <c:v>Prithvi-600M  p14</c:v>
+                  </c:pt>
+                  <c:pt idx="3">
+                    <c:v>Prithvi-300M  p16</c:v>
+                  </c:pt>
+                </c:lvl>
+              </c:multiLvlStrCache>
+            </c:multiLvlStrRef>
+          </c:cat>
+          <c:val>
+            <c:numRef>
+              <c:f>Sheet1!$B$2:$B$5</c:f>
+              <c:numCache>
+                <c:formatCode>General</c:formatCode>
+                <c:ptCount val="4"/>
+                <c:pt idx="0">
+                  <c:v>0.589</c:v>
+                </c:pt>
+                <c:pt idx="1">
+                  <c:v>0.435</c:v>
+                </c:pt>
+                <c:pt idx="2">
+                  <c:v>0.579</c:v>
+                </c:pt>
+                <c:pt idx="3">
+                  <c:v>0.545</c:v>
+                </c:pt>
+              </c:numCache>
+            </c:numRef>
+          </c:val>
+        </c:ser>
+        <c:dLbls>
+          <c:numFmt formatCode="0.000" sourceLinked="0"/>
+          <c:txPr>
+            <a:bodyPr/>
+            <a:lstStyle/>
+            <a:p>
+              <a:pPr>
+                <a:defRPr b="0" i="0" strike="noStrike" sz="1200" u="none">
+                  <a:solidFill>
+                    <a:srgbClr val="FFFFFF"/>
+                  </a:solidFill>
+                  <a:latin typeface="Space Grotesk"/>
+                </a:defRPr>
+              </a:pPr>
+            </a:p>
+          </c:txPr>
+          <c:showLegendKey val="0"/>
+          <c:showVal val="1"/>
+          <c:showCatName val="0"/>
+          <c:showSerName val="0"/>
+          <c:showPercent val="0"/>
+          <c:showBubbleSize val="0"/>
+          <c:showLeaderLines val="0"/>
+        </c:dLbls>
+        <c:gapWidth val="55"/>
+        <c:overlap val="0"/>
+        <c:axId val="2094734554"/>
+        <c:axId val="2094734552"/>
+        <c:axId val="2094734556"/>
+      </c:barChart>
+      <c:catAx>
+        <c:axId val="2094734554"/>
+        <c:scaling>
+          <c:orientation val="minMax"/>
+        </c:scaling>
+        <c:delete val="0"/>
+        <c:axPos val="b"/>
+        <c:numFmt formatCode="General" sourceLinked="1"/>
+        <c:majorTickMark val="out"/>
+        <c:minorTickMark val="none"/>
+        <c:tickLblPos val="low"/>
+        <c:spPr>
+          <a:ln w="12700" cap="flat">
+            <a:solidFill>
+              <a:srgbClr val="888888"/>
+            </a:solidFill>
+            <a:prstDash val="solid"/>
+            <a:round/>
+          </a:ln>
+        </c:spPr>
+        <c:txPr>
+          <a:bodyPr/>
+          <a:lstStyle/>
+          <a:p>
+            <a:pPr>
+              <a:defRPr sz="1150" b="0" i="0" u="none" strike="noStrike">
+                <a:solidFill>
+                  <a:srgbClr val="FFFFFF"/>
+                </a:solidFill>
+                <a:latin typeface="Space Grotesk"/>
+              </a:defRPr>
+            </a:pPr>
+            <a:endParaRPr lang="en-US"/>
+          </a:p>
+        </c:txPr>
+        <c:crossAx val="2094734552"/>
+        <c:crosses val="autoZero"/>
+        <c:auto val="1"/>
+        <c:lblAlgn val="ctr"/>
+        <c:noMultiLvlLbl val="1"/>
+      </c:catAx>
+      <c:valAx>
+        <c:axId val="2094734552"/>
+        <c:scaling>
+          <c:orientation val="minMax"/>
+          <c:max val="0.62"/>
+          <c:min val="0.4"/>
+        </c:scaling>
+        <c:delete val="0"/>
+        <c:axPos val="l"/>
+        <c:majorGridlines>
+          <c:spPr>
+            <a:ln w="12700" cap="flat">
+              <a:solidFill>
+                <a:srgbClr val="1C5248"/>
+              </a:solidFill>
+              <a:prstDash val="solid"/>
+              <a:round/>
+            </a:ln>
+          </c:spPr>
+        </c:majorGridlines>
+        <c:numFmt formatCode="0.00" sourceLinked="0"/>
+        <c:majorTickMark val="out"/>
+        <c:minorTickMark val="none"/>
+        <c:tickLblPos val="nextTo"/>
+        <c:spPr>
+          <a:ln w="12700" cap="flat">
+            <a:solidFill>
+              <a:srgbClr val="888888"/>
+            </a:solidFill>
+            <a:prstDash val="solid"/>
+            <a:round/>
+          </a:ln>
+        </c:spPr>
+        <c:txPr>
+          <a:bodyPr/>
+          <a:lstStyle/>
+          <a:p>
+            <a:pPr>
+              <a:defRPr sz="1000" b="0" i="0" u="none" strike="noStrike">
+                <a:solidFill>
+                  <a:srgbClr val="9DBDB0"/>
+                </a:solidFill>
+                <a:latin typeface="Space Grotesk"/>
+              </a:defRPr>
+            </a:pPr>
+            <a:endParaRPr lang="en-US"/>
+          </a:p>
+        </c:txPr>
+        <c:crossAx val="2094734554"/>
+        <c:crosses val="autoZero"/>
+        <c:crossBetween val="between"/>
+        <c:majorUnit val="0.05"/>
+      </c:valAx>
+      <c:spPr>
+        <a:noFill/>
+        <a:ln>
+          <a:noFill/>
+        </a:ln>
+        <a:effectLst/>
+      </c:spPr>
+    </c:plotArea>
+    <c:plotVisOnly val="1"/>
+    <c:dispBlanksAs val="span"/>
+  </c:chart>
+  <c:spPr>
+    <a:noFill/>
+    <a:ln>
+      <a:noFill/>
+    </a:ln>
+    <a:effectLst/>
+  </c:spPr>
+  <c:externalData r:id="rId1">
+    <c:autoUpdate val="0"/>
+  </c:externalData>
+</c:chartSpace>
+</file>
+
+<file path=ppt/charts/chart7.xml><?xml version="1.0" encoding="utf-8"?>
+<c:chartSpace xmlns:c="http://schemas.openxmlformats.org/drawingml/2006/chart" xmlns:a="http://schemas.openxmlformats.org/drawingml/2006/main" xmlns:r="http://schemas.openxmlformats.org/officeDocument/2006/relationships">
+  <c:date1904 val="0"/>
+  <c:roundedCorners val="1"/>
+  <c:chart>
+    <c:autoTitleDeleted val="1"/>
+    <c:plotArea>
+      <c:layout/>
+      <c:barChart>
         <c:barDir val="bar"/>
         <c:grouping val="clustered"/>
         <c:varyColors val="0"/>
@@ -1905,7 +2199,7 @@
 </c:chartSpace>
 </file>
 
-<file path=ppt/charts/chart7.xml><?xml version="1.0" encoding="utf-8"?>
+<file path=ppt/charts/chart8.xml><?xml version="1.0" encoding="utf-8"?>
 <c:chartSpace xmlns:c="http://schemas.openxmlformats.org/drawingml/2006/chart" xmlns:a="http://schemas.openxmlformats.org/drawingml/2006/main" xmlns:r="http://schemas.openxmlformats.org/officeDocument/2006/relationships">
   <c:date1904 val="0"/>
   <c:roundedCorners val="1"/>
@@ -3077,7 +3371,7 @@
           <a:p>
             <a:r>
               <a:rPr lang="en-US" dirty="0"/>
-              <a:t>An entirely separate truth source: over ten thousand year-matched LUCAS points. On the 28-class task Tessera leads at 0.499; on threshold-free forest fraction it reaches 0.809 dominant-species agreement, again ahead of Prithvi. Both backbones struggle with spruce at around 0.54 — that is a shared task limit, not a model quirk. LUCAS independently confirms the NFI ordering.</a:t>
+              <a:t>A five-way foundation-model race on the identical field-calibrated target, all scored the same way on the held-out NFI plots. The intuition going in was 'resolution beats size' — a finer patch should see more detail. The data refutes it: Clay, at patch-8, is finer than either Prithvi (patch-14 and patch-16) yet lands dead last at 0.435, well below Prithvi-600M's 0.579 and Prithvi-300M's 0.545. So patch size alone does not gate accuracy — encoder quality does. Tessera wins not merely because it is effectively patch-1, but because it pairs that with a strong pretrained representation. Two more points, CROMA at patch-8 and TerraMind at patch-16, are retraining on the new S1 data and will complete the curve. This is the model-race result C9 and the reformulated C6.</a:t>
             </a:r>
             <a:endParaRPr lang="en-US" dirty="0"/>
           </a:p>
@@ -3165,7 +3459,7 @@
           <a:p>
             <a:r>
               <a:rPr lang="en-US" dirty="0"/>
-              <a:t>A pure label sanity check, no model involved. Nearly 80 percent of LUCAS crop points land on a year-matched LPIS parcel, and excluding pasture the two surveys agree at 0.81 — sugar-beet and potato above 0.90. Pasture looks low at 0.25, but 87 percent is still grass in LPIS: the two surveys simply draw the ley-versus-pasture line differently. Our crop labels are independently well-founded.</a:t>
+              <a:t>An entirely separate truth source: over ten thousand year-matched LUCAS points. On the 28-class task Tessera leads at 0.499; on threshold-free forest fraction it reaches 0.809 dominant-species agreement, again ahead of Prithvi. Both backbones struggle with spruce at around 0.54 — that is a shared task limit, not a model quirk. LUCAS independently confirms the NFI ordering.</a:t>
             </a:r>
             <a:endParaRPr lang="en-US" dirty="0"/>
           </a:p>
@@ -3253,7 +3547,7 @@
           <a:p>
             <a:r>
               <a:rPr lang="en-US" dirty="0"/>
-              <a:t>Four things to take away. First, the supervision target — not the feature representation — was the ceiling. Second, representation is cheap: frozen Tessera embeddings match a 600-million-parameter encoder. Third, ensembling doesn't pay because the members are correlated. Fourth, the hard classes — spruce, open land, shrub — are hard for every backbone and every truth source, so they are a data limit we should target next.</a:t>
+              <a:t>A pure label sanity check, no model involved. Nearly 80 percent of LUCAS crop points land on a year-matched LPIS parcel, and excluding pasture the two surveys agree at 0.81 — sugar-beet and potato above 0.90. Pasture looks low at 0.25, but 87 percent is still grass in LPIS: the two surveys simply draw the ley-versus-pasture line differently. Our crop labels are independently well-founded.</a:t>
             </a:r>
             <a:endParaRPr lang="en-US" dirty="0"/>
           </a:p>
@@ -3341,7 +3635,7 @@
           <a:p>
             <a:r>
               <a:rPr lang="en-US" dirty="0"/>
-              <a:t>Being honest about the boundaries. The held-out set is thin at 209 plots, so several close comparisons are genuinely within noise. Spruce stays weak everywhere. Crops demand strict year-matching. The ley-versus-pasture ambiguity is a survey-definition problem, not a model error. And LUCAS-LPIS overlap is only about a third of crop points. More field data — especially spruce — is the clearest path forward.</a:t>
+              <a:t>Four things to take away. First, the supervision target — not the feature representation — was the ceiling. Second, representation is cheap: frozen Tessera embeddings match a 600-million-parameter encoder. Third, ensembling doesn't pay because the members are correlated. Fourth, the hard classes — spruce, open land, shrub — are hard for every backbone and every truth source, so they are a data limit we should target next.</a:t>
             </a:r>
             <a:endParaRPr lang="en-US" dirty="0"/>
           </a:p>
@@ -3429,7 +3723,7 @@
           <a:p>
             <a:r>
               <a:rPr lang="en-US" dirty="0"/>
-              <a:t>To conclude: field calibration wins on independent truth, beating the very map it learned from. For deployment we recommend the distilled 28-class base paired with the forest-type fraction layer, and Tessera's cheap embeddings to run it. Skip the ensemble — the gain is within noise. All figures trace to the finding documents on the last line. Thank you.</a:t>
+              <a:t>Being honest about the boundaries. The held-out set is thin at 209 plots, so several close comparisons are genuinely within noise. Spruce stays weak everywhere. Crops demand strict year-matching. The ley-versus-pasture ambiguity is a survey-definition problem, not a model error. And LUCAS-LPIS overlap is only about a third of crop points. More field data — especially spruce — is the clearest path forward.</a:t>
             </a:r>
             <a:endParaRPr lang="en-US" dirty="0"/>
           </a:p>
@@ -3541,6 +3835,94 @@
             <a:fld id="{F7021451-1387-4CA6-816F-3879F97B5CBC}" type="slidenum">
               <a:rPr lang="en-US"/>
               <a:t>2</a:t>
+            </a:fld>
+            <a:endParaRPr lang="en-US"/>
+          </a:p>
+        </p:txBody>
+      </p:sp>
+    </p:spTree>
+    <p:extLst>
+      <p:ext uri="{BB962C8B-B14F-4D97-AF65-F5344CB8AC3E}">
+        <p14:creationId xmlns:p14="http://schemas.microsoft.com/office/powerpoint/2010/main" val="1024086991"/>
+      </p:ext>
+    </p:extLst>
+  </p:cSld>
+  <p:clrMapOvr>
+    <a:masterClrMapping/>
+  </p:clrMapOvr>
+</p:notes>
+</file>
+
+<file path=ppt/notesSlides/notesSlide20.xml><?xml version="1.0" encoding="utf-8"?>
+<p:notes xmlns:a="http://schemas.openxmlformats.org/drawingml/2006/main" xmlns:r="http://schemas.openxmlformats.org/officeDocument/2006/relationships" xmlns:p="http://schemas.openxmlformats.org/presentationml/2006/main">
+  <p:cSld>
+    <p:spTree>
+      <p:nvGrpSpPr>
+        <p:cNvPr id="1" name=""/>
+        <p:cNvGrpSpPr/>
+        <p:nvPr/>
+      </p:nvGrpSpPr>
+      <p:grpSpPr>
+        <a:xfrm>
+          <a:off x="0" y="0"/>
+          <a:ext cx="0" cy="0"/>
+          <a:chOff x="0" y="0"/>
+          <a:chExt cx="0" cy="0"/>
+        </a:xfrm>
+      </p:grpSpPr>
+      <p:sp>
+        <p:nvSpPr>
+          <p:cNvPr id="2" name="Slide Image Placeholder 1"/>
+          <p:cNvSpPr>
+            <a:spLocks noGrp="1" noRot="1" noChangeAspect="1"/>
+          </p:cNvSpPr>
+          <p:nvPr>
+            <p:ph type="sldImg"/>
+          </p:nvPr>
+        </p:nvSpPr>
+        <p:spPr/>
+      </p:sp>
+      <p:sp>
+        <p:nvSpPr>
+          <p:cNvPr id="3" name="Notes Placeholder 2"/>
+          <p:cNvSpPr>
+            <a:spLocks noGrp="1"/>
+          </p:cNvSpPr>
+          <p:nvPr>
+            <p:ph type="body" idx="1"/>
+          </p:nvPr>
+        </p:nvSpPr>
+        <p:spPr/>
+        <p:txBody>
+          <a:bodyPr/>
+          <a:lstStyle/>
+          <a:p>
+            <a:r>
+              <a:rPr lang="en-US" dirty="0"/>
+              <a:t>To conclude: field calibration wins on independent truth, beating the very map it learned from. For deployment we recommend the distilled 28-class base paired with the forest-type fraction layer, and Tessera's cheap embeddings to run it. Skip the ensemble — the gain is within noise. All figures trace to the finding documents on the last line. Thank you.</a:t>
+            </a:r>
+            <a:endParaRPr lang="en-US" dirty="0"/>
+          </a:p>
+        </p:txBody>
+      </p:sp>
+      <p:sp>
+        <p:nvSpPr>
+          <p:cNvPr id="4" name="Slide Number Placeholder 3"/>
+          <p:cNvSpPr>
+            <a:spLocks noGrp="1"/>
+          </p:cNvSpPr>
+          <p:nvPr>
+            <p:ph type="sldNum" sz="quarter" idx="10"/>
+          </p:nvPr>
+        </p:nvSpPr>
+        <p:spPr/>
+        <p:txBody>
+          <a:bodyPr/>
+          <a:lstStyle/>
+          <a:p>
+            <a:fld id="{F7021451-1387-4CA6-816F-3879F97B5CBC}" type="slidenum">
+              <a:rPr lang="en-US"/>
+              <a:t>20</a:t>
             </a:fld>
             <a:endParaRPr lang="en-US"/>
           </a:p>
@@ -11850,7 +12232,7 @@
                 <a:ea typeface="Space Grotesk" pitchFamily="34" charset="-122"/>
                 <a:cs typeface="Space Grotesk" pitchFamily="34" charset="-120"/>
               </a:rPr>
-              <a:t>Independent validation: LUCAS</a:t>
+              <a:t>The foundation-model race: what gates accuracy?</a:t>
             </a:r>
             <a:endParaRPr lang="en-US" sz="3200" dirty="0"/>
           </a:p>
@@ -11864,8 +12246,8 @@
         </p:nvSpPr>
         <p:spPr>
           <a:xfrm>
-            <a:off x="822960" y="1170432"/>
-            <a:ext cx="10515600" cy="457200"/>
+            <a:off x="640080" y="1170432"/>
+            <a:ext cx="10789920" cy="365760"/>
           </a:xfrm>
           <a:prstGeom prst="rect">
             <a:avLst/>
@@ -11877,11 +12259,66 @@
           <a:bodyPr wrap="square" lIns="0" tIns="0" rIns="0" bIns="0" rtlCol="0" anchor="ctr"/>
           <a:lstStyle/>
           <a:p>
+            <a:pPr indent="0" marL="0">
+              <a:buNone/>
+            </a:pPr>
+            <a:r>
+              <a:rPr lang="en-US" sz="1400" b="1" dirty="0">
+                <a:solidFill>
+                  <a:srgbClr val="CDFCE3"/>
+                </a:solidFill>
+                <a:latin typeface="Space Grotesk" pitchFamily="34" charset="0"/>
+                <a:ea typeface="Space Grotesk" pitchFamily="34" charset="-122"/>
+                <a:cs typeface="Space Grotesk" pitchFamily="34" charset="-120"/>
+              </a:rPr>
+              <a:t>Five geospatial encoders, one field-calibrated target, scored on the same NFI truth — finer resolution alone does not predict the winner.</a:t>
+            </a:r>
+            <a:endParaRPr lang="en-US" sz="1400" dirty="0"/>
+          </a:p>
+        </p:txBody>
+      </p:sp>
+      <p:graphicFrame>
+        <p:nvGraphicFramePr>
+          <p:cNvPr id="5" name="Chart 0" descr=""/>
+          <p:cNvGraphicFramePr/>
+          <p:nvPr/>
+        </p:nvGraphicFramePr>
+        <p:xfrm>
+          <a:off x="457200" y="1783080"/>
+          <a:ext cx="6812280" cy="3931920"/>
+        </p:xfrm>
+        <a:graphic xmlns:a="http://schemas.openxmlformats.org/drawingml/2006/main">
+          <a:graphicData uri="http://schemas.openxmlformats.org/drawingml/2006/chart">
+            <c:chart xmlns:c="http://schemas.openxmlformats.org/drawingml/2006/chart" r:id="rId1"/>
+          </a:graphicData>
+        </a:graphic>
+      </p:graphicFrame>
+      <p:sp>
+        <p:nvSpPr>
+          <p:cNvPr id="6" name="Text 3"/>
+          <p:cNvSpPr/>
+          <p:nvPr/>
+        </p:nvSpPr>
+        <p:spPr>
+          <a:xfrm>
+            <a:off x="457200" y="5742432"/>
+            <a:ext cx="6812280" cy="274320"/>
+          </a:xfrm>
+          <a:prstGeom prst="rect">
+            <a:avLst/>
+          </a:prstGeom>
+          <a:noFill/>
+          <a:ln/>
+        </p:spPr>
+        <p:txBody>
+          <a:bodyPr wrap="square" lIns="0" tIns="0" rIns="0" bIns="0" rtlCol="0" anchor="ctr"/>
+          <a:lstStyle/>
+          <a:p>
             <a:pPr algn="ctr" indent="0" marL="0">
               <a:buNone/>
             </a:pPr>
             <a:r>
-              <a:rPr lang="en-US" sz="1400" dirty="0">
+              <a:rPr lang="en-US" sz="1000" i="1" dirty="0">
                 <a:solidFill>
                   <a:srgbClr val="9DBDB0"/>
                 </a:solidFill>
@@ -11889,54 +12326,2277 @@
                 <a:ea typeface="Space Grotesk" pitchFamily="34" charset="-122"/>
                 <a:cs typeface="Space Grotesk" pitchFamily="34" charset="-120"/>
               </a:rPr>
-              <a:t>10,108 year-matched field points, never trained on</a:t>
-            </a:r>
-            <a:endParaRPr lang="en-US" sz="1400" dirty="0"/>
-          </a:p>
-        </p:txBody>
-      </p:sp>
-      <p:sp>
-        <p:nvSpPr>
-          <p:cNvPr id="5" name="Text 3"/>
-          <p:cNvSpPr/>
-          <p:nvPr/>
-        </p:nvSpPr>
-        <p:spPr>
-          <a:xfrm>
-            <a:off x="731520" y="1691640"/>
-            <a:ext cx="5120640" cy="320040"/>
-          </a:xfrm>
-          <a:prstGeom prst="rect">
-            <a:avLst/>
-          </a:prstGeom>
-          <a:noFill/>
-          <a:ln/>
-        </p:spPr>
-        <p:txBody>
-          <a:bodyPr wrap="square" lIns="0" tIns="0" rIns="0" bIns="0" rtlCol="0" anchor="ctr"/>
-          <a:lstStyle/>
-          <a:p>
-            <a:pPr indent="0" marL="0">
-              <a:buNone/>
-            </a:pPr>
-            <a:r>
-              <a:rPr lang="en-US" sz="1400" b="1" dirty="0">
-                <a:solidFill>
-                  <a:srgbClr val="CDFCE3"/>
-                </a:solidFill>
-                <a:latin typeface="Space Grotesk" pitchFamily="34" charset="0"/>
-                <a:ea typeface="Space Grotesk" pitchFamily="34" charset="-122"/>
-                <a:cs typeface="Space Grotesk" pitchFamily="34" charset="-120"/>
-              </a:rPr>
-              <a:t>L2b — 28-class overall</a:t>
-            </a:r>
-            <a:endParaRPr lang="en-US" sz="1400" dirty="0"/>
+              <a:t>bars ordered by ViT patch size →  finer            coarser</a:t>
+            </a:r>
+            <a:endParaRPr lang="en-US" sz="1000" dirty="0"/>
           </a:p>
         </p:txBody>
       </p:sp>
       <p:graphicFrame>
         <p:nvGraphicFramePr>
           <p:cNvPr id="16" name="Table 0"/>
+          <p:cNvGraphicFramePr>
+            <a:graphicFrameLocks noGrp="1"/>
+          </p:cNvGraphicFramePr>
+          <p:nvPr>
+            <p:extLst>
+              <p:ext uri="{D42A27DB-BD31-4B8C-83A1-F6EECF244321}">
+                <p14:modId xmlns:p14="http://schemas.microsoft.com/office/powerpoint/2010/main" val="1579011935"/>
+              </p:ext>
+            </p:extLst>
+          </p:nvPr>
+        </p:nvGraphicFramePr>
+        <p:xfrm>
+          <a:off x="7498080" y="1783080"/>
+          <a:ext cx="4023360" cy="914400"/>
+        </p:xfrm>
+        <a:graphic>
+          <a:graphicData uri="http://schemas.openxmlformats.org/drawingml/2006/table">
+            <a:tbl>
+              <a:tblPr/>
+              <a:tblGrid>
+                <a:gridCol w="1417320"/>
+                <a:gridCol w="640080"/>
+                <a:gridCol w="1234440"/>
+                <a:gridCol w="731520"/>
+              </a:tblGrid>
+              <a:tr h="384048">
+                <a:tc>
+                  <a:txBody>
+                    <a:bodyPr/>
+                    <a:lstStyle/>
+                    <a:p>
+                      <a:pPr algn="l" indent="0" marL="0">
+                        <a:buNone/>
+                      </a:pPr>
+                      <a:r>
+                        <a:rPr lang="en-US" sz="1100" b="1" dirty="0">
+                          <a:solidFill>
+                            <a:srgbClr val="FFFFFF"/>
+                          </a:solidFill>
+                          <a:latin typeface="Space Grotesk" pitchFamily="34" charset="0"/>
+                          <a:ea typeface="Space Grotesk" pitchFamily="34" charset="-122"/>
+                          <a:cs typeface="Space Grotesk" pitchFamily="34" charset="-120"/>
+                        </a:rPr>
+                        <a:t>Backbone</a:t>
+                      </a:r>
+                      <a:endParaRPr lang="en-US" sz="1100" dirty="0">
+                        <a:latin typeface="Space Grotesk" charset="0"/>
+                        <a:ea typeface="Space Grotesk" charset="0"/>
+                        <a:cs typeface="Space Grotesk" charset="0"/>
+                      </a:endParaRPr>
+                    </a:p>
+                  </a:txBody>
+                  <a:tcPr marL="91440" marR="91440" marT="45720" marB="45720" anchor="ctr">
+                    <a:lnL w="12700" cap="flat" cmpd="sng" algn="ctr">
+                      <a:solidFill>
+                        <a:srgbClr val="1C5248"/>
+                      </a:solidFill>
+                      <a:prstDash val="solid"/>
+                      <a:round/>
+                      <a:headEnd type="none" w="med" len="med"/>
+                      <a:tailEnd type="none" w="med" len="med"/>
+                    </a:lnL>
+                    <a:lnR w="12700" cap="flat" cmpd="sng" algn="ctr">
+                      <a:solidFill>
+                        <a:srgbClr val="1C5248"/>
+                      </a:solidFill>
+                      <a:prstDash val="solid"/>
+                      <a:round/>
+                      <a:headEnd type="none" w="med" len="med"/>
+                      <a:tailEnd type="none" w="med" len="med"/>
+                    </a:lnR>
+                    <a:lnT w="12700" cap="flat" cmpd="sng" algn="ctr">
+                      <a:solidFill>
+                        <a:srgbClr val="1C5248"/>
+                      </a:solidFill>
+                      <a:prstDash val="solid"/>
+                      <a:round/>
+                      <a:headEnd type="none" w="med" len="med"/>
+                      <a:tailEnd type="none" w="med" len="med"/>
+                    </a:lnT>
+                    <a:lnB w="12700" cap="flat" cmpd="sng" algn="ctr">
+                      <a:solidFill>
+                        <a:srgbClr val="1C5248"/>
+                      </a:solidFill>
+                      <a:prstDash val="solid"/>
+                      <a:round/>
+                      <a:headEnd type="none" w="med" len="med"/>
+                      <a:tailEnd type="none" w="med" len="med"/>
+                    </a:lnB>
+                    <a:solidFill>
+                      <a:srgbClr val="0A322C"/>
+                    </a:solidFill>
+                  </a:tcPr>
+                </a:tc>
+                <a:tc>
+                  <a:txBody>
+                    <a:bodyPr/>
+                    <a:lstStyle/>
+                    <a:p>
+                      <a:pPr algn="ctr" indent="0" marL="0">
+                        <a:buNone/>
+                      </a:pPr>
+                      <a:r>
+                        <a:rPr lang="en-US" sz="1100" b="1" dirty="0">
+                          <a:solidFill>
+                            <a:srgbClr val="FFFFFF"/>
+                          </a:solidFill>
+                          <a:latin typeface="Space Grotesk" pitchFamily="34" charset="0"/>
+                          <a:ea typeface="Space Grotesk" pitchFamily="34" charset="-122"/>
+                          <a:cs typeface="Space Grotesk" pitchFamily="34" charset="-120"/>
+                        </a:rPr>
+                        <a:t>Patch</a:t>
+                      </a:r>
+                      <a:endParaRPr lang="en-US" sz="1100" dirty="0">
+                        <a:latin typeface="Space Grotesk" charset="0"/>
+                        <a:ea typeface="Space Grotesk" charset="0"/>
+                        <a:cs typeface="Space Grotesk" charset="0"/>
+                      </a:endParaRPr>
+                    </a:p>
+                  </a:txBody>
+                  <a:tcPr marL="91440" marR="91440" marT="45720" marB="45720" anchor="ctr">
+                    <a:lnL w="12700" cap="flat" cmpd="sng" algn="ctr">
+                      <a:solidFill>
+                        <a:srgbClr val="1C5248"/>
+                      </a:solidFill>
+                      <a:prstDash val="solid"/>
+                      <a:round/>
+                      <a:headEnd type="none" w="med" len="med"/>
+                      <a:tailEnd type="none" w="med" len="med"/>
+                    </a:lnL>
+                    <a:lnR w="12700" cap="flat" cmpd="sng" algn="ctr">
+                      <a:solidFill>
+                        <a:srgbClr val="1C5248"/>
+                      </a:solidFill>
+                      <a:prstDash val="solid"/>
+                      <a:round/>
+                      <a:headEnd type="none" w="med" len="med"/>
+                      <a:tailEnd type="none" w="med" len="med"/>
+                    </a:lnR>
+                    <a:lnT w="12700" cap="flat" cmpd="sng" algn="ctr">
+                      <a:solidFill>
+                        <a:srgbClr val="1C5248"/>
+                      </a:solidFill>
+                      <a:prstDash val="solid"/>
+                      <a:round/>
+                      <a:headEnd type="none" w="med" len="med"/>
+                      <a:tailEnd type="none" w="med" len="med"/>
+                    </a:lnT>
+                    <a:lnB w="12700" cap="flat" cmpd="sng" algn="ctr">
+                      <a:solidFill>
+                        <a:srgbClr val="1C5248"/>
+                      </a:solidFill>
+                      <a:prstDash val="solid"/>
+                      <a:round/>
+                      <a:headEnd type="none" w="med" len="med"/>
+                      <a:tailEnd type="none" w="med" len="med"/>
+                    </a:lnB>
+                    <a:solidFill>
+                      <a:srgbClr val="0A322C"/>
+                    </a:solidFill>
+                  </a:tcPr>
+                </a:tc>
+                <a:tc>
+                  <a:txBody>
+                    <a:bodyPr/>
+                    <a:lstStyle/>
+                    <a:p>
+                      <a:pPr algn="ctr" indent="0" marL="0">
+                        <a:buNone/>
+                      </a:pPr>
+                      <a:r>
+                        <a:rPr lang="en-US" sz="1100" b="1" dirty="0">
+                          <a:solidFill>
+                            <a:srgbClr val="FFFFFF"/>
+                          </a:solidFill>
+                          <a:latin typeface="Space Grotesk" pitchFamily="34" charset="0"/>
+                          <a:ea typeface="Space Grotesk" pitchFamily="34" charset="-122"/>
+                          <a:cs typeface="Space Grotesk" pitchFamily="34" charset="-120"/>
+                        </a:rPr>
+                        <a:t>Encoder</a:t>
+                      </a:r>
+                      <a:endParaRPr lang="en-US" sz="1100" dirty="0">
+                        <a:latin typeface="Space Grotesk" charset="0"/>
+                        <a:ea typeface="Space Grotesk" charset="0"/>
+                        <a:cs typeface="Space Grotesk" charset="0"/>
+                      </a:endParaRPr>
+                    </a:p>
+                  </a:txBody>
+                  <a:tcPr marL="91440" marR="91440" marT="45720" marB="45720" anchor="ctr">
+                    <a:lnL w="12700" cap="flat" cmpd="sng" algn="ctr">
+                      <a:solidFill>
+                        <a:srgbClr val="1C5248"/>
+                      </a:solidFill>
+                      <a:prstDash val="solid"/>
+                      <a:round/>
+                      <a:headEnd type="none" w="med" len="med"/>
+                      <a:tailEnd type="none" w="med" len="med"/>
+                    </a:lnL>
+                    <a:lnR w="12700" cap="flat" cmpd="sng" algn="ctr">
+                      <a:solidFill>
+                        <a:srgbClr val="1C5248"/>
+                      </a:solidFill>
+                      <a:prstDash val="solid"/>
+                      <a:round/>
+                      <a:headEnd type="none" w="med" len="med"/>
+                      <a:tailEnd type="none" w="med" len="med"/>
+                    </a:lnR>
+                    <a:lnT w="12700" cap="flat" cmpd="sng" algn="ctr">
+                      <a:solidFill>
+                        <a:srgbClr val="1C5248"/>
+                      </a:solidFill>
+                      <a:prstDash val="solid"/>
+                      <a:round/>
+                      <a:headEnd type="none" w="med" len="med"/>
+                      <a:tailEnd type="none" w="med" len="med"/>
+                    </a:lnT>
+                    <a:lnB w="12700" cap="flat" cmpd="sng" algn="ctr">
+                      <a:solidFill>
+                        <a:srgbClr val="1C5248"/>
+                      </a:solidFill>
+                      <a:prstDash val="solid"/>
+                      <a:round/>
+                      <a:headEnd type="none" w="med" len="med"/>
+                      <a:tailEnd type="none" w="med" len="med"/>
+                    </a:lnB>
+                    <a:solidFill>
+                      <a:srgbClr val="0A322C"/>
+                    </a:solidFill>
+                  </a:tcPr>
+                </a:tc>
+                <a:tc>
+                  <a:txBody>
+                    <a:bodyPr/>
+                    <a:lstStyle/>
+                    <a:p>
+                      <a:pPr algn="ctr" indent="0" marL="0">
+                        <a:buNone/>
+                      </a:pPr>
+                      <a:r>
+                        <a:rPr lang="en-US" sz="1100" b="1" dirty="0">
+                          <a:solidFill>
+                            <a:srgbClr val="CDFCE3"/>
+                          </a:solidFill>
+                          <a:latin typeface="Space Grotesk" pitchFamily="34" charset="0"/>
+                          <a:ea typeface="Space Grotesk" pitchFamily="34" charset="-122"/>
+                          <a:cs typeface="Space Grotesk" pitchFamily="34" charset="-120"/>
+                        </a:rPr>
+                        <a:t>NFI OA</a:t>
+                      </a:r>
+                      <a:endParaRPr lang="en-US" sz="1100" dirty="0">
+                        <a:latin typeface="Space Grotesk" charset="0"/>
+                        <a:ea typeface="Space Grotesk" charset="0"/>
+                        <a:cs typeface="Space Grotesk" charset="0"/>
+                      </a:endParaRPr>
+                    </a:p>
+                  </a:txBody>
+                  <a:tcPr marL="91440" marR="91440" marT="45720" marB="45720" anchor="ctr">
+                    <a:lnL w="12700" cap="flat" cmpd="sng" algn="ctr">
+                      <a:solidFill>
+                        <a:srgbClr val="1C5248"/>
+                      </a:solidFill>
+                      <a:prstDash val="solid"/>
+                      <a:round/>
+                      <a:headEnd type="none" w="med" len="med"/>
+                      <a:tailEnd type="none" w="med" len="med"/>
+                    </a:lnL>
+                    <a:lnR w="12700" cap="flat" cmpd="sng" algn="ctr">
+                      <a:solidFill>
+                        <a:srgbClr val="1C5248"/>
+                      </a:solidFill>
+                      <a:prstDash val="solid"/>
+                      <a:round/>
+                      <a:headEnd type="none" w="med" len="med"/>
+                      <a:tailEnd type="none" w="med" len="med"/>
+                    </a:lnR>
+                    <a:lnT w="12700" cap="flat" cmpd="sng" algn="ctr">
+                      <a:solidFill>
+                        <a:srgbClr val="1C5248"/>
+                      </a:solidFill>
+                      <a:prstDash val="solid"/>
+                      <a:round/>
+                      <a:headEnd type="none" w="med" len="med"/>
+                      <a:tailEnd type="none" w="med" len="med"/>
+                    </a:lnT>
+                    <a:lnB w="12700" cap="flat" cmpd="sng" algn="ctr">
+                      <a:solidFill>
+                        <a:srgbClr val="1C5248"/>
+                      </a:solidFill>
+                      <a:prstDash val="solid"/>
+                      <a:round/>
+                      <a:headEnd type="none" w="med" len="med"/>
+                      <a:tailEnd type="none" w="med" len="med"/>
+                    </a:lnB>
+                    <a:solidFill>
+                      <a:srgbClr val="0A322C"/>
+                    </a:solidFill>
+                  </a:tcPr>
+                </a:tc>
+              </a:tr>
+              <a:tr h="384048">
+                <a:tc>
+                  <a:txBody>
+                    <a:bodyPr/>
+                    <a:lstStyle/>
+                    <a:p>
+                      <a:pPr algn="l" indent="0" marL="0">
+                        <a:buNone/>
+                      </a:pPr>
+                      <a:r>
+                        <a:rPr lang="en-US" sz="1100" b="1" dirty="0">
+                          <a:solidFill>
+                            <a:srgbClr val="FFFFFF"/>
+                          </a:solidFill>
+                          <a:latin typeface="Space Grotesk" pitchFamily="34" charset="0"/>
+                          <a:ea typeface="Space Grotesk" pitchFamily="34" charset="-122"/>
+                          <a:cs typeface="Space Grotesk" pitchFamily="34" charset="-120"/>
+                        </a:rPr>
+                        <a:t>Tessera</a:t>
+                      </a:r>
+                      <a:endParaRPr lang="en-US" sz="1100" dirty="0">
+                        <a:latin typeface="Space Grotesk" charset="0"/>
+                        <a:ea typeface="Space Grotesk" charset="0"/>
+                        <a:cs typeface="Space Grotesk" charset="0"/>
+                      </a:endParaRPr>
+                    </a:p>
+                  </a:txBody>
+                  <a:tcPr marL="91440" marR="91440" marT="45720" marB="45720" anchor="ctr">
+                    <a:lnL w="12700" cap="flat" cmpd="sng" algn="ctr">
+                      <a:solidFill>
+                        <a:srgbClr val="1C5248"/>
+                      </a:solidFill>
+                      <a:prstDash val="solid"/>
+                      <a:round/>
+                      <a:headEnd type="none" w="med" len="med"/>
+                      <a:tailEnd type="none" w="med" len="med"/>
+                    </a:lnL>
+                    <a:lnR w="12700" cap="flat" cmpd="sng" algn="ctr">
+                      <a:solidFill>
+                        <a:srgbClr val="1C5248"/>
+                      </a:solidFill>
+                      <a:prstDash val="solid"/>
+                      <a:round/>
+                      <a:headEnd type="none" w="med" len="med"/>
+                      <a:tailEnd type="none" w="med" len="med"/>
+                    </a:lnR>
+                    <a:lnT w="12700" cap="flat" cmpd="sng" algn="ctr">
+                      <a:solidFill>
+                        <a:srgbClr val="1C5248"/>
+                      </a:solidFill>
+                      <a:prstDash val="solid"/>
+                      <a:round/>
+                      <a:headEnd type="none" w="med" len="med"/>
+                      <a:tailEnd type="none" w="med" len="med"/>
+                    </a:lnT>
+                    <a:lnB w="12700" cap="flat" cmpd="sng" algn="ctr">
+                      <a:solidFill>
+                        <a:srgbClr val="1C5248"/>
+                      </a:solidFill>
+                      <a:prstDash val="solid"/>
+                      <a:round/>
+                      <a:headEnd type="none" w="med" len="med"/>
+                      <a:tailEnd type="none" w="med" len="med"/>
+                    </a:lnB>
+                    <a:solidFill>
+                      <a:srgbClr val="0C3A33"/>
+                    </a:solidFill>
+                  </a:tcPr>
+                </a:tc>
+                <a:tc>
+                  <a:txBody>
+                    <a:bodyPr/>
+                    <a:lstStyle/>
+                    <a:p>
+                      <a:pPr algn="ctr" indent="0" marL="0">
+                        <a:buNone/>
+                      </a:pPr>
+                      <a:r>
+                        <a:rPr lang="en-US" sz="1100" dirty="0">
+                          <a:solidFill>
+                            <a:srgbClr val="9DBDB0"/>
+                          </a:solidFill>
+                          <a:latin typeface="Space Grotesk" pitchFamily="34" charset="0"/>
+                          <a:ea typeface="Space Grotesk" pitchFamily="34" charset="-122"/>
+                          <a:cs typeface="Space Grotesk" pitchFamily="34" charset="-120"/>
+                        </a:rPr>
+                        <a:t>1</a:t>
+                      </a:r>
+                      <a:endParaRPr lang="en-US" sz="1100" dirty="0">
+                        <a:latin typeface="Space Grotesk" charset="0"/>
+                        <a:ea typeface="Space Grotesk" charset="0"/>
+                        <a:cs typeface="Space Grotesk" charset="0"/>
+                      </a:endParaRPr>
+                    </a:p>
+                  </a:txBody>
+                  <a:tcPr marL="91440" marR="91440" marT="45720" marB="45720" anchor="ctr">
+                    <a:lnL w="12700" cap="flat" cmpd="sng" algn="ctr">
+                      <a:solidFill>
+                        <a:srgbClr val="1C5248"/>
+                      </a:solidFill>
+                      <a:prstDash val="solid"/>
+                      <a:round/>
+                      <a:headEnd type="none" w="med" len="med"/>
+                      <a:tailEnd type="none" w="med" len="med"/>
+                    </a:lnL>
+                    <a:lnR w="12700" cap="flat" cmpd="sng" algn="ctr">
+                      <a:solidFill>
+                        <a:srgbClr val="1C5248"/>
+                      </a:solidFill>
+                      <a:prstDash val="solid"/>
+                      <a:round/>
+                      <a:headEnd type="none" w="med" len="med"/>
+                      <a:tailEnd type="none" w="med" len="med"/>
+                    </a:lnR>
+                    <a:lnT w="12700" cap="flat" cmpd="sng" algn="ctr">
+                      <a:solidFill>
+                        <a:srgbClr val="1C5248"/>
+                      </a:solidFill>
+                      <a:prstDash val="solid"/>
+                      <a:round/>
+                      <a:headEnd type="none" w="med" len="med"/>
+                      <a:tailEnd type="none" w="med" len="med"/>
+                    </a:lnT>
+                    <a:lnB w="12700" cap="flat" cmpd="sng" algn="ctr">
+                      <a:solidFill>
+                        <a:srgbClr val="1C5248"/>
+                      </a:solidFill>
+                      <a:prstDash val="solid"/>
+                      <a:round/>
+                      <a:headEnd type="none" w="med" len="med"/>
+                      <a:tailEnd type="none" w="med" len="med"/>
+                    </a:lnB>
+                    <a:solidFill>
+                      <a:srgbClr val="0C3A33"/>
+                    </a:solidFill>
+                  </a:tcPr>
+                </a:tc>
+                <a:tc>
+                  <a:txBody>
+                    <a:bodyPr/>
+                    <a:lstStyle/>
+                    <a:p>
+                      <a:pPr algn="ctr" indent="0" marL="0">
+                        <a:buNone/>
+                      </a:pPr>
+                      <a:r>
+                        <a:rPr lang="en-US" sz="1100" dirty="0">
+                          <a:solidFill>
+                            <a:srgbClr val="9DBDB0"/>
+                          </a:solidFill>
+                          <a:latin typeface="Space Grotesk" pitchFamily="34" charset="0"/>
+                          <a:ea typeface="Space Grotesk" pitchFamily="34" charset="-122"/>
+                          <a:cs typeface="Space Grotesk" pitchFamily="34" charset="-120"/>
+                        </a:rPr>
+                        <a:t>frozen 128-d</a:t>
+                      </a:r>
+                      <a:endParaRPr lang="en-US" sz="1100" dirty="0">
+                        <a:latin typeface="Space Grotesk" charset="0"/>
+                        <a:ea typeface="Space Grotesk" charset="0"/>
+                        <a:cs typeface="Space Grotesk" charset="0"/>
+                      </a:endParaRPr>
+                    </a:p>
+                  </a:txBody>
+                  <a:tcPr marL="91440" marR="91440" marT="45720" marB="45720" anchor="ctr">
+                    <a:lnL w="12700" cap="flat" cmpd="sng" algn="ctr">
+                      <a:solidFill>
+                        <a:srgbClr val="1C5248"/>
+                      </a:solidFill>
+                      <a:prstDash val="solid"/>
+                      <a:round/>
+                      <a:headEnd type="none" w="med" len="med"/>
+                      <a:tailEnd type="none" w="med" len="med"/>
+                    </a:lnL>
+                    <a:lnR w="12700" cap="flat" cmpd="sng" algn="ctr">
+                      <a:solidFill>
+                        <a:srgbClr val="1C5248"/>
+                      </a:solidFill>
+                      <a:prstDash val="solid"/>
+                      <a:round/>
+                      <a:headEnd type="none" w="med" len="med"/>
+                      <a:tailEnd type="none" w="med" len="med"/>
+                    </a:lnR>
+                    <a:lnT w="12700" cap="flat" cmpd="sng" algn="ctr">
+                      <a:solidFill>
+                        <a:srgbClr val="1C5248"/>
+                      </a:solidFill>
+                      <a:prstDash val="solid"/>
+                      <a:round/>
+                      <a:headEnd type="none" w="med" len="med"/>
+                      <a:tailEnd type="none" w="med" len="med"/>
+                    </a:lnT>
+                    <a:lnB w="12700" cap="flat" cmpd="sng" algn="ctr">
+                      <a:solidFill>
+                        <a:srgbClr val="1C5248"/>
+                      </a:solidFill>
+                      <a:prstDash val="solid"/>
+                      <a:round/>
+                      <a:headEnd type="none" w="med" len="med"/>
+                      <a:tailEnd type="none" w="med" len="med"/>
+                    </a:lnB>
+                    <a:solidFill>
+                      <a:srgbClr val="0C3A33"/>
+                    </a:solidFill>
+                  </a:tcPr>
+                </a:tc>
+                <a:tc>
+                  <a:txBody>
+                    <a:bodyPr/>
+                    <a:lstStyle/>
+                    <a:p>
+                      <a:pPr algn="ctr" indent="0" marL="0">
+                        <a:buNone/>
+                      </a:pPr>
+                      <a:r>
+                        <a:rPr lang="en-US" sz="1100" b="1" dirty="0">
+                          <a:solidFill>
+                            <a:srgbClr val="CDFCE3"/>
+                          </a:solidFill>
+                          <a:latin typeface="Space Grotesk" pitchFamily="34" charset="0"/>
+                          <a:ea typeface="Space Grotesk" pitchFamily="34" charset="-122"/>
+                          <a:cs typeface="Space Grotesk" pitchFamily="34" charset="-120"/>
+                        </a:rPr>
+                        <a:t>0.589</a:t>
+                      </a:r>
+                      <a:endParaRPr lang="en-US" sz="1100" dirty="0">
+                        <a:latin typeface="Space Grotesk" charset="0"/>
+                        <a:ea typeface="Space Grotesk" charset="0"/>
+                        <a:cs typeface="Space Grotesk" charset="0"/>
+                      </a:endParaRPr>
+                    </a:p>
+                  </a:txBody>
+                  <a:tcPr marL="91440" marR="91440" marT="45720" marB="45720" anchor="ctr">
+                    <a:lnL w="12700" cap="flat" cmpd="sng" algn="ctr">
+                      <a:solidFill>
+                        <a:srgbClr val="1C5248"/>
+                      </a:solidFill>
+                      <a:prstDash val="solid"/>
+                      <a:round/>
+                      <a:headEnd type="none" w="med" len="med"/>
+                      <a:tailEnd type="none" w="med" len="med"/>
+                    </a:lnL>
+                    <a:lnR w="12700" cap="flat" cmpd="sng" algn="ctr">
+                      <a:solidFill>
+                        <a:srgbClr val="1C5248"/>
+                      </a:solidFill>
+                      <a:prstDash val="solid"/>
+                      <a:round/>
+                      <a:headEnd type="none" w="med" len="med"/>
+                      <a:tailEnd type="none" w="med" len="med"/>
+                    </a:lnR>
+                    <a:lnT w="12700" cap="flat" cmpd="sng" algn="ctr">
+                      <a:solidFill>
+                        <a:srgbClr val="1C5248"/>
+                      </a:solidFill>
+                      <a:prstDash val="solid"/>
+                      <a:round/>
+                      <a:headEnd type="none" w="med" len="med"/>
+                      <a:tailEnd type="none" w="med" len="med"/>
+                    </a:lnT>
+                    <a:lnB w="12700" cap="flat" cmpd="sng" algn="ctr">
+                      <a:solidFill>
+                        <a:srgbClr val="1C5248"/>
+                      </a:solidFill>
+                      <a:prstDash val="solid"/>
+                      <a:round/>
+                      <a:headEnd type="none" w="med" len="med"/>
+                      <a:tailEnd type="none" w="med" len="med"/>
+                    </a:lnB>
+                    <a:solidFill>
+                      <a:srgbClr val="1E6B54"/>
+                    </a:solidFill>
+                  </a:tcPr>
+                </a:tc>
+              </a:tr>
+              <a:tr h="384048">
+                <a:tc>
+                  <a:txBody>
+                    <a:bodyPr/>
+                    <a:lstStyle/>
+                    <a:p>
+                      <a:pPr algn="l" indent="0" marL="0">
+                        <a:buNone/>
+                      </a:pPr>
+                      <a:r>
+                        <a:rPr lang="en-US" sz="1100" b="1" dirty="0">
+                          <a:solidFill>
+                            <a:srgbClr val="FFFFFF"/>
+                          </a:solidFill>
+                          <a:latin typeface="Space Grotesk" pitchFamily="34" charset="0"/>
+                          <a:ea typeface="Space Grotesk" pitchFamily="34" charset="-122"/>
+                          <a:cs typeface="Space Grotesk" pitchFamily="34" charset="-120"/>
+                        </a:rPr>
+                        <a:t>Clay</a:t>
+                      </a:r>
+                      <a:endParaRPr lang="en-US" sz="1100" dirty="0">
+                        <a:latin typeface="Space Grotesk" charset="0"/>
+                        <a:ea typeface="Space Grotesk" charset="0"/>
+                        <a:cs typeface="Space Grotesk" charset="0"/>
+                      </a:endParaRPr>
+                    </a:p>
+                  </a:txBody>
+                  <a:tcPr marL="91440" marR="91440" marT="45720" marB="45720" anchor="ctr">
+                    <a:lnL w="12700" cap="flat" cmpd="sng" algn="ctr">
+                      <a:solidFill>
+                        <a:srgbClr val="1C5248"/>
+                      </a:solidFill>
+                      <a:prstDash val="solid"/>
+                      <a:round/>
+                      <a:headEnd type="none" w="med" len="med"/>
+                      <a:tailEnd type="none" w="med" len="med"/>
+                    </a:lnL>
+                    <a:lnR w="12700" cap="flat" cmpd="sng" algn="ctr">
+                      <a:solidFill>
+                        <a:srgbClr val="1C5248"/>
+                      </a:solidFill>
+                      <a:prstDash val="solid"/>
+                      <a:round/>
+                      <a:headEnd type="none" w="med" len="med"/>
+                      <a:tailEnd type="none" w="med" len="med"/>
+                    </a:lnR>
+                    <a:lnT w="12700" cap="flat" cmpd="sng" algn="ctr">
+                      <a:solidFill>
+                        <a:srgbClr val="1C5248"/>
+                      </a:solidFill>
+                      <a:prstDash val="solid"/>
+                      <a:round/>
+                      <a:headEnd type="none" w="med" len="med"/>
+                      <a:tailEnd type="none" w="med" len="med"/>
+                    </a:lnT>
+                    <a:lnB w="12700" cap="flat" cmpd="sng" algn="ctr">
+                      <a:solidFill>
+                        <a:srgbClr val="1C5248"/>
+                      </a:solidFill>
+                      <a:prstDash val="solid"/>
+                      <a:round/>
+                      <a:headEnd type="none" w="med" len="med"/>
+                      <a:tailEnd type="none" w="med" len="med"/>
+                    </a:lnB>
+                    <a:solidFill>
+                      <a:srgbClr val="123F38"/>
+                    </a:solidFill>
+                  </a:tcPr>
+                </a:tc>
+                <a:tc>
+                  <a:txBody>
+                    <a:bodyPr/>
+                    <a:lstStyle/>
+                    <a:p>
+                      <a:pPr algn="ctr" indent="0" marL="0">
+                        <a:buNone/>
+                      </a:pPr>
+                      <a:r>
+                        <a:rPr lang="en-US" sz="1100" dirty="0">
+                          <a:solidFill>
+                            <a:srgbClr val="9DBDB0"/>
+                          </a:solidFill>
+                          <a:latin typeface="Space Grotesk" pitchFamily="34" charset="0"/>
+                          <a:ea typeface="Space Grotesk" pitchFamily="34" charset="-122"/>
+                          <a:cs typeface="Space Grotesk" pitchFamily="34" charset="-120"/>
+                        </a:rPr>
+                        <a:t>8</a:t>
+                      </a:r>
+                      <a:endParaRPr lang="en-US" sz="1100" dirty="0">
+                        <a:latin typeface="Space Grotesk" charset="0"/>
+                        <a:ea typeface="Space Grotesk" charset="0"/>
+                        <a:cs typeface="Space Grotesk" charset="0"/>
+                      </a:endParaRPr>
+                    </a:p>
+                  </a:txBody>
+                  <a:tcPr marL="91440" marR="91440" marT="45720" marB="45720" anchor="ctr">
+                    <a:lnL w="12700" cap="flat" cmpd="sng" algn="ctr">
+                      <a:solidFill>
+                        <a:srgbClr val="1C5248"/>
+                      </a:solidFill>
+                      <a:prstDash val="solid"/>
+                      <a:round/>
+                      <a:headEnd type="none" w="med" len="med"/>
+                      <a:tailEnd type="none" w="med" len="med"/>
+                    </a:lnL>
+                    <a:lnR w="12700" cap="flat" cmpd="sng" algn="ctr">
+                      <a:solidFill>
+                        <a:srgbClr val="1C5248"/>
+                      </a:solidFill>
+                      <a:prstDash val="solid"/>
+                      <a:round/>
+                      <a:headEnd type="none" w="med" len="med"/>
+                      <a:tailEnd type="none" w="med" len="med"/>
+                    </a:lnR>
+                    <a:lnT w="12700" cap="flat" cmpd="sng" algn="ctr">
+                      <a:solidFill>
+                        <a:srgbClr val="1C5248"/>
+                      </a:solidFill>
+                      <a:prstDash val="solid"/>
+                      <a:round/>
+                      <a:headEnd type="none" w="med" len="med"/>
+                      <a:tailEnd type="none" w="med" len="med"/>
+                    </a:lnT>
+                    <a:lnB w="12700" cap="flat" cmpd="sng" algn="ctr">
+                      <a:solidFill>
+                        <a:srgbClr val="1C5248"/>
+                      </a:solidFill>
+                      <a:prstDash val="solid"/>
+                      <a:round/>
+                      <a:headEnd type="none" w="med" len="med"/>
+                      <a:tailEnd type="none" w="med" len="med"/>
+                    </a:lnB>
+                    <a:solidFill>
+                      <a:srgbClr val="123F38"/>
+                    </a:solidFill>
+                  </a:tcPr>
+                </a:tc>
+                <a:tc>
+                  <a:txBody>
+                    <a:bodyPr/>
+                    <a:lstStyle/>
+                    <a:p>
+                      <a:pPr algn="ctr" indent="0" marL="0">
+                        <a:buNone/>
+                      </a:pPr>
+                      <a:r>
+                        <a:rPr lang="en-US" sz="1100" dirty="0">
+                          <a:solidFill>
+                            <a:srgbClr val="9DBDB0"/>
+                          </a:solidFill>
+                          <a:latin typeface="Space Grotesk" pitchFamily="34" charset="0"/>
+                          <a:ea typeface="Space Grotesk" pitchFamily="34" charset="-122"/>
+                          <a:cs typeface="Space Grotesk" pitchFamily="34" charset="-120"/>
+                        </a:rPr>
+                        <a:t>ViT SSL</a:t>
+                      </a:r>
+                      <a:endParaRPr lang="en-US" sz="1100" dirty="0">
+                        <a:latin typeface="Space Grotesk" charset="0"/>
+                        <a:ea typeface="Space Grotesk" charset="0"/>
+                        <a:cs typeface="Space Grotesk" charset="0"/>
+                      </a:endParaRPr>
+                    </a:p>
+                  </a:txBody>
+                  <a:tcPr marL="91440" marR="91440" marT="45720" marB="45720" anchor="ctr">
+                    <a:lnL w="12700" cap="flat" cmpd="sng" algn="ctr">
+                      <a:solidFill>
+                        <a:srgbClr val="1C5248"/>
+                      </a:solidFill>
+                      <a:prstDash val="solid"/>
+                      <a:round/>
+                      <a:headEnd type="none" w="med" len="med"/>
+                      <a:tailEnd type="none" w="med" len="med"/>
+                    </a:lnL>
+                    <a:lnR w="12700" cap="flat" cmpd="sng" algn="ctr">
+                      <a:solidFill>
+                        <a:srgbClr val="1C5248"/>
+                      </a:solidFill>
+                      <a:prstDash val="solid"/>
+                      <a:round/>
+                      <a:headEnd type="none" w="med" len="med"/>
+                      <a:tailEnd type="none" w="med" len="med"/>
+                    </a:lnR>
+                    <a:lnT w="12700" cap="flat" cmpd="sng" algn="ctr">
+                      <a:solidFill>
+                        <a:srgbClr val="1C5248"/>
+                      </a:solidFill>
+                      <a:prstDash val="solid"/>
+                      <a:round/>
+                      <a:headEnd type="none" w="med" len="med"/>
+                      <a:tailEnd type="none" w="med" len="med"/>
+                    </a:lnT>
+                    <a:lnB w="12700" cap="flat" cmpd="sng" algn="ctr">
+                      <a:solidFill>
+                        <a:srgbClr val="1C5248"/>
+                      </a:solidFill>
+                      <a:prstDash val="solid"/>
+                      <a:round/>
+                      <a:headEnd type="none" w="med" len="med"/>
+                      <a:tailEnd type="none" w="med" len="med"/>
+                    </a:lnB>
+                    <a:solidFill>
+                      <a:srgbClr val="123F38"/>
+                    </a:solidFill>
+                  </a:tcPr>
+                </a:tc>
+                <a:tc>
+                  <a:txBody>
+                    <a:bodyPr/>
+                    <a:lstStyle/>
+                    <a:p>
+                      <a:pPr algn="ctr" indent="0" marL="0">
+                        <a:buNone/>
+                      </a:pPr>
+                      <a:r>
+                        <a:rPr lang="en-US" sz="1100" b="1" dirty="0">
+                          <a:solidFill>
+                            <a:srgbClr val="CDFCE3"/>
+                          </a:solidFill>
+                          <a:latin typeface="Space Grotesk" pitchFamily="34" charset="0"/>
+                          <a:ea typeface="Space Grotesk" pitchFamily="34" charset="-122"/>
+                          <a:cs typeface="Space Grotesk" pitchFamily="34" charset="-120"/>
+                        </a:rPr>
+                        <a:t>0.435</a:t>
+                      </a:r>
+                      <a:endParaRPr lang="en-US" sz="1100" dirty="0">
+                        <a:latin typeface="Space Grotesk" charset="0"/>
+                        <a:ea typeface="Space Grotesk" charset="0"/>
+                        <a:cs typeface="Space Grotesk" charset="0"/>
+                      </a:endParaRPr>
+                    </a:p>
+                  </a:txBody>
+                  <a:tcPr marL="91440" marR="91440" marT="45720" marB="45720" anchor="ctr">
+                    <a:lnL w="12700" cap="flat" cmpd="sng" algn="ctr">
+                      <a:solidFill>
+                        <a:srgbClr val="1C5248"/>
+                      </a:solidFill>
+                      <a:prstDash val="solid"/>
+                      <a:round/>
+                      <a:headEnd type="none" w="med" len="med"/>
+                      <a:tailEnd type="none" w="med" len="med"/>
+                    </a:lnL>
+                    <a:lnR w="12700" cap="flat" cmpd="sng" algn="ctr">
+                      <a:solidFill>
+                        <a:srgbClr val="1C5248"/>
+                      </a:solidFill>
+                      <a:prstDash val="solid"/>
+                      <a:round/>
+                      <a:headEnd type="none" w="med" len="med"/>
+                      <a:tailEnd type="none" w="med" len="med"/>
+                    </a:lnR>
+                    <a:lnT w="12700" cap="flat" cmpd="sng" algn="ctr">
+                      <a:solidFill>
+                        <a:srgbClr val="1C5248"/>
+                      </a:solidFill>
+                      <a:prstDash val="solid"/>
+                      <a:round/>
+                      <a:headEnd type="none" w="med" len="med"/>
+                      <a:tailEnd type="none" w="med" len="med"/>
+                    </a:lnT>
+                    <a:lnB w="12700" cap="flat" cmpd="sng" algn="ctr">
+                      <a:solidFill>
+                        <a:srgbClr val="1C5248"/>
+                      </a:solidFill>
+                      <a:prstDash val="solid"/>
+                      <a:round/>
+                      <a:headEnd type="none" w="med" len="med"/>
+                      <a:tailEnd type="none" w="med" len="med"/>
+                    </a:lnB>
+                    <a:solidFill>
+                      <a:srgbClr val="1E6B54"/>
+                    </a:solidFill>
+                  </a:tcPr>
+                </a:tc>
+              </a:tr>
+              <a:tr h="384048">
+                <a:tc>
+                  <a:txBody>
+                    <a:bodyPr/>
+                    <a:lstStyle/>
+                    <a:p>
+                      <a:pPr algn="l" indent="0" marL="0">
+                        <a:buNone/>
+                      </a:pPr>
+                      <a:r>
+                        <a:rPr lang="en-US" sz="1100" b="1" dirty="0">
+                          <a:solidFill>
+                            <a:srgbClr val="FFFFFF"/>
+                          </a:solidFill>
+                          <a:latin typeface="Space Grotesk" pitchFamily="34" charset="0"/>
+                          <a:ea typeface="Space Grotesk" pitchFamily="34" charset="-122"/>
+                          <a:cs typeface="Space Grotesk" pitchFamily="34" charset="-120"/>
+                        </a:rPr>
+                        <a:t>Prithvi-600M</a:t>
+                      </a:r>
+                      <a:endParaRPr lang="en-US" sz="1100" dirty="0">
+                        <a:latin typeface="Space Grotesk" charset="0"/>
+                        <a:ea typeface="Space Grotesk" charset="0"/>
+                        <a:cs typeface="Space Grotesk" charset="0"/>
+                      </a:endParaRPr>
+                    </a:p>
+                  </a:txBody>
+                  <a:tcPr marL="91440" marR="91440" marT="45720" marB="45720" anchor="ctr">
+                    <a:lnL w="12700" cap="flat" cmpd="sng" algn="ctr">
+                      <a:solidFill>
+                        <a:srgbClr val="1C5248"/>
+                      </a:solidFill>
+                      <a:prstDash val="solid"/>
+                      <a:round/>
+                      <a:headEnd type="none" w="med" len="med"/>
+                      <a:tailEnd type="none" w="med" len="med"/>
+                    </a:lnL>
+                    <a:lnR w="12700" cap="flat" cmpd="sng" algn="ctr">
+                      <a:solidFill>
+                        <a:srgbClr val="1C5248"/>
+                      </a:solidFill>
+                      <a:prstDash val="solid"/>
+                      <a:round/>
+                      <a:headEnd type="none" w="med" len="med"/>
+                      <a:tailEnd type="none" w="med" len="med"/>
+                    </a:lnR>
+                    <a:lnT w="12700" cap="flat" cmpd="sng" algn="ctr">
+                      <a:solidFill>
+                        <a:srgbClr val="1C5248"/>
+                      </a:solidFill>
+                      <a:prstDash val="solid"/>
+                      <a:round/>
+                      <a:headEnd type="none" w="med" len="med"/>
+                      <a:tailEnd type="none" w="med" len="med"/>
+                    </a:lnT>
+                    <a:lnB w="12700" cap="flat" cmpd="sng" algn="ctr">
+                      <a:solidFill>
+                        <a:srgbClr val="1C5248"/>
+                      </a:solidFill>
+                      <a:prstDash val="solid"/>
+                      <a:round/>
+                      <a:headEnd type="none" w="med" len="med"/>
+                      <a:tailEnd type="none" w="med" len="med"/>
+                    </a:lnB>
+                    <a:solidFill>
+                      <a:srgbClr val="0C3A33"/>
+                    </a:solidFill>
+                  </a:tcPr>
+                </a:tc>
+                <a:tc>
+                  <a:txBody>
+                    <a:bodyPr/>
+                    <a:lstStyle/>
+                    <a:p>
+                      <a:pPr algn="ctr" indent="0" marL="0">
+                        <a:buNone/>
+                      </a:pPr>
+                      <a:r>
+                        <a:rPr lang="en-US" sz="1100" dirty="0">
+                          <a:solidFill>
+                            <a:srgbClr val="9DBDB0"/>
+                          </a:solidFill>
+                          <a:latin typeface="Space Grotesk" pitchFamily="34" charset="0"/>
+                          <a:ea typeface="Space Grotesk" pitchFamily="34" charset="-122"/>
+                          <a:cs typeface="Space Grotesk" pitchFamily="34" charset="-120"/>
+                        </a:rPr>
+                        <a:t>14</a:t>
+                      </a:r>
+                      <a:endParaRPr lang="en-US" sz="1100" dirty="0">
+                        <a:latin typeface="Space Grotesk" charset="0"/>
+                        <a:ea typeface="Space Grotesk" charset="0"/>
+                        <a:cs typeface="Space Grotesk" charset="0"/>
+                      </a:endParaRPr>
+                    </a:p>
+                  </a:txBody>
+                  <a:tcPr marL="91440" marR="91440" marT="45720" marB="45720" anchor="ctr">
+                    <a:lnL w="12700" cap="flat" cmpd="sng" algn="ctr">
+                      <a:solidFill>
+                        <a:srgbClr val="1C5248"/>
+                      </a:solidFill>
+                      <a:prstDash val="solid"/>
+                      <a:round/>
+                      <a:headEnd type="none" w="med" len="med"/>
+                      <a:tailEnd type="none" w="med" len="med"/>
+                    </a:lnL>
+                    <a:lnR w="12700" cap="flat" cmpd="sng" algn="ctr">
+                      <a:solidFill>
+                        <a:srgbClr val="1C5248"/>
+                      </a:solidFill>
+                      <a:prstDash val="solid"/>
+                      <a:round/>
+                      <a:headEnd type="none" w="med" len="med"/>
+                      <a:tailEnd type="none" w="med" len="med"/>
+                    </a:lnR>
+                    <a:lnT w="12700" cap="flat" cmpd="sng" algn="ctr">
+                      <a:solidFill>
+                        <a:srgbClr val="1C5248"/>
+                      </a:solidFill>
+                      <a:prstDash val="solid"/>
+                      <a:round/>
+                      <a:headEnd type="none" w="med" len="med"/>
+                      <a:tailEnd type="none" w="med" len="med"/>
+                    </a:lnT>
+                    <a:lnB w="12700" cap="flat" cmpd="sng" algn="ctr">
+                      <a:solidFill>
+                        <a:srgbClr val="1C5248"/>
+                      </a:solidFill>
+                      <a:prstDash val="solid"/>
+                      <a:round/>
+                      <a:headEnd type="none" w="med" len="med"/>
+                      <a:tailEnd type="none" w="med" len="med"/>
+                    </a:lnB>
+                    <a:solidFill>
+                      <a:srgbClr val="0C3A33"/>
+                    </a:solidFill>
+                  </a:tcPr>
+                </a:tc>
+                <a:tc>
+                  <a:txBody>
+                    <a:bodyPr/>
+                    <a:lstStyle/>
+                    <a:p>
+                      <a:pPr algn="ctr" indent="0" marL="0">
+                        <a:buNone/>
+                      </a:pPr>
+                      <a:r>
+                        <a:rPr lang="en-US" sz="1100" dirty="0">
+                          <a:solidFill>
+                            <a:srgbClr val="9DBDB0"/>
+                          </a:solidFill>
+                          <a:latin typeface="Space Grotesk" pitchFamily="34" charset="0"/>
+                          <a:ea typeface="Space Grotesk" pitchFamily="34" charset="-122"/>
+                          <a:cs typeface="Space Grotesk" pitchFamily="34" charset="-120"/>
+                        </a:rPr>
+                        <a:t>600M ViT</a:t>
+                      </a:r>
+                      <a:endParaRPr lang="en-US" sz="1100" dirty="0">
+                        <a:latin typeface="Space Grotesk" charset="0"/>
+                        <a:ea typeface="Space Grotesk" charset="0"/>
+                        <a:cs typeface="Space Grotesk" charset="0"/>
+                      </a:endParaRPr>
+                    </a:p>
+                  </a:txBody>
+                  <a:tcPr marL="91440" marR="91440" marT="45720" marB="45720" anchor="ctr">
+                    <a:lnL w="12700" cap="flat" cmpd="sng" algn="ctr">
+                      <a:solidFill>
+                        <a:srgbClr val="1C5248"/>
+                      </a:solidFill>
+                      <a:prstDash val="solid"/>
+                      <a:round/>
+                      <a:headEnd type="none" w="med" len="med"/>
+                      <a:tailEnd type="none" w="med" len="med"/>
+                    </a:lnL>
+                    <a:lnR w="12700" cap="flat" cmpd="sng" algn="ctr">
+                      <a:solidFill>
+                        <a:srgbClr val="1C5248"/>
+                      </a:solidFill>
+                      <a:prstDash val="solid"/>
+                      <a:round/>
+                      <a:headEnd type="none" w="med" len="med"/>
+                      <a:tailEnd type="none" w="med" len="med"/>
+                    </a:lnR>
+                    <a:lnT w="12700" cap="flat" cmpd="sng" algn="ctr">
+                      <a:solidFill>
+                        <a:srgbClr val="1C5248"/>
+                      </a:solidFill>
+                      <a:prstDash val="solid"/>
+                      <a:round/>
+                      <a:headEnd type="none" w="med" len="med"/>
+                      <a:tailEnd type="none" w="med" len="med"/>
+                    </a:lnT>
+                    <a:lnB w="12700" cap="flat" cmpd="sng" algn="ctr">
+                      <a:solidFill>
+                        <a:srgbClr val="1C5248"/>
+                      </a:solidFill>
+                      <a:prstDash val="solid"/>
+                      <a:round/>
+                      <a:headEnd type="none" w="med" len="med"/>
+                      <a:tailEnd type="none" w="med" len="med"/>
+                    </a:lnB>
+                    <a:solidFill>
+                      <a:srgbClr val="0C3A33"/>
+                    </a:solidFill>
+                  </a:tcPr>
+                </a:tc>
+                <a:tc>
+                  <a:txBody>
+                    <a:bodyPr/>
+                    <a:lstStyle/>
+                    <a:p>
+                      <a:pPr algn="ctr" indent="0" marL="0">
+                        <a:buNone/>
+                      </a:pPr>
+                      <a:r>
+                        <a:rPr lang="en-US" sz="1100" b="1" dirty="0">
+                          <a:solidFill>
+                            <a:srgbClr val="CDFCE3"/>
+                          </a:solidFill>
+                          <a:latin typeface="Space Grotesk" pitchFamily="34" charset="0"/>
+                          <a:ea typeface="Space Grotesk" pitchFamily="34" charset="-122"/>
+                          <a:cs typeface="Space Grotesk" pitchFamily="34" charset="-120"/>
+                        </a:rPr>
+                        <a:t>0.579</a:t>
+                      </a:r>
+                      <a:endParaRPr lang="en-US" sz="1100" dirty="0">
+                        <a:latin typeface="Space Grotesk" charset="0"/>
+                        <a:ea typeface="Space Grotesk" charset="0"/>
+                        <a:cs typeface="Space Grotesk" charset="0"/>
+                      </a:endParaRPr>
+                    </a:p>
+                  </a:txBody>
+                  <a:tcPr marL="91440" marR="91440" marT="45720" marB="45720" anchor="ctr">
+                    <a:lnL w="12700" cap="flat" cmpd="sng" algn="ctr">
+                      <a:solidFill>
+                        <a:srgbClr val="1C5248"/>
+                      </a:solidFill>
+                      <a:prstDash val="solid"/>
+                      <a:round/>
+                      <a:headEnd type="none" w="med" len="med"/>
+                      <a:tailEnd type="none" w="med" len="med"/>
+                    </a:lnL>
+                    <a:lnR w="12700" cap="flat" cmpd="sng" algn="ctr">
+                      <a:solidFill>
+                        <a:srgbClr val="1C5248"/>
+                      </a:solidFill>
+                      <a:prstDash val="solid"/>
+                      <a:round/>
+                      <a:headEnd type="none" w="med" len="med"/>
+                      <a:tailEnd type="none" w="med" len="med"/>
+                    </a:lnR>
+                    <a:lnT w="12700" cap="flat" cmpd="sng" algn="ctr">
+                      <a:solidFill>
+                        <a:srgbClr val="1C5248"/>
+                      </a:solidFill>
+                      <a:prstDash val="solid"/>
+                      <a:round/>
+                      <a:headEnd type="none" w="med" len="med"/>
+                      <a:tailEnd type="none" w="med" len="med"/>
+                    </a:lnT>
+                    <a:lnB w="12700" cap="flat" cmpd="sng" algn="ctr">
+                      <a:solidFill>
+                        <a:srgbClr val="1C5248"/>
+                      </a:solidFill>
+                      <a:prstDash val="solid"/>
+                      <a:round/>
+                      <a:headEnd type="none" w="med" len="med"/>
+                      <a:tailEnd type="none" w="med" len="med"/>
+                    </a:lnB>
+                    <a:solidFill>
+                      <a:srgbClr val="1E6B54"/>
+                    </a:solidFill>
+                  </a:tcPr>
+                </a:tc>
+              </a:tr>
+              <a:tr h="384048">
+                <a:tc>
+                  <a:txBody>
+                    <a:bodyPr/>
+                    <a:lstStyle/>
+                    <a:p>
+                      <a:pPr algn="l" indent="0" marL="0">
+                        <a:buNone/>
+                      </a:pPr>
+                      <a:r>
+                        <a:rPr lang="en-US" sz="1100" b="1" dirty="0">
+                          <a:solidFill>
+                            <a:srgbClr val="FFFFFF"/>
+                          </a:solidFill>
+                          <a:latin typeface="Space Grotesk" pitchFamily="34" charset="0"/>
+                          <a:ea typeface="Space Grotesk" pitchFamily="34" charset="-122"/>
+                          <a:cs typeface="Space Grotesk" pitchFamily="34" charset="-120"/>
+                        </a:rPr>
+                        <a:t>Prithvi-300M</a:t>
+                      </a:r>
+                      <a:endParaRPr lang="en-US" sz="1100" dirty="0">
+                        <a:latin typeface="Space Grotesk" charset="0"/>
+                        <a:ea typeface="Space Grotesk" charset="0"/>
+                        <a:cs typeface="Space Grotesk" charset="0"/>
+                      </a:endParaRPr>
+                    </a:p>
+                  </a:txBody>
+                  <a:tcPr marL="91440" marR="91440" marT="45720" marB="45720" anchor="ctr">
+                    <a:lnL w="12700" cap="flat" cmpd="sng" algn="ctr">
+                      <a:solidFill>
+                        <a:srgbClr val="1C5248"/>
+                      </a:solidFill>
+                      <a:prstDash val="solid"/>
+                      <a:round/>
+                      <a:headEnd type="none" w="med" len="med"/>
+                      <a:tailEnd type="none" w="med" len="med"/>
+                    </a:lnL>
+                    <a:lnR w="12700" cap="flat" cmpd="sng" algn="ctr">
+                      <a:solidFill>
+                        <a:srgbClr val="1C5248"/>
+                      </a:solidFill>
+                      <a:prstDash val="solid"/>
+                      <a:round/>
+                      <a:headEnd type="none" w="med" len="med"/>
+                      <a:tailEnd type="none" w="med" len="med"/>
+                    </a:lnR>
+                    <a:lnT w="12700" cap="flat" cmpd="sng" algn="ctr">
+                      <a:solidFill>
+                        <a:srgbClr val="1C5248"/>
+                      </a:solidFill>
+                      <a:prstDash val="solid"/>
+                      <a:round/>
+                      <a:headEnd type="none" w="med" len="med"/>
+                      <a:tailEnd type="none" w="med" len="med"/>
+                    </a:lnT>
+                    <a:lnB w="12700" cap="flat" cmpd="sng" algn="ctr">
+                      <a:solidFill>
+                        <a:srgbClr val="1C5248"/>
+                      </a:solidFill>
+                      <a:prstDash val="solid"/>
+                      <a:round/>
+                      <a:headEnd type="none" w="med" len="med"/>
+                      <a:tailEnd type="none" w="med" len="med"/>
+                    </a:lnB>
+                    <a:solidFill>
+                      <a:srgbClr val="123F38"/>
+                    </a:solidFill>
+                  </a:tcPr>
+                </a:tc>
+                <a:tc>
+                  <a:txBody>
+                    <a:bodyPr/>
+                    <a:lstStyle/>
+                    <a:p>
+                      <a:pPr algn="ctr" indent="0" marL="0">
+                        <a:buNone/>
+                      </a:pPr>
+                      <a:r>
+                        <a:rPr lang="en-US" sz="1100" dirty="0">
+                          <a:solidFill>
+                            <a:srgbClr val="9DBDB0"/>
+                          </a:solidFill>
+                          <a:latin typeface="Space Grotesk" pitchFamily="34" charset="0"/>
+                          <a:ea typeface="Space Grotesk" pitchFamily="34" charset="-122"/>
+                          <a:cs typeface="Space Grotesk" pitchFamily="34" charset="-120"/>
+                        </a:rPr>
+                        <a:t>16</a:t>
+                      </a:r>
+                      <a:endParaRPr lang="en-US" sz="1100" dirty="0">
+                        <a:latin typeface="Space Grotesk" charset="0"/>
+                        <a:ea typeface="Space Grotesk" charset="0"/>
+                        <a:cs typeface="Space Grotesk" charset="0"/>
+                      </a:endParaRPr>
+                    </a:p>
+                  </a:txBody>
+                  <a:tcPr marL="91440" marR="91440" marT="45720" marB="45720" anchor="ctr">
+                    <a:lnL w="12700" cap="flat" cmpd="sng" algn="ctr">
+                      <a:solidFill>
+                        <a:srgbClr val="1C5248"/>
+                      </a:solidFill>
+                      <a:prstDash val="solid"/>
+                      <a:round/>
+                      <a:headEnd type="none" w="med" len="med"/>
+                      <a:tailEnd type="none" w="med" len="med"/>
+                    </a:lnL>
+                    <a:lnR w="12700" cap="flat" cmpd="sng" algn="ctr">
+                      <a:solidFill>
+                        <a:srgbClr val="1C5248"/>
+                      </a:solidFill>
+                      <a:prstDash val="solid"/>
+                      <a:round/>
+                      <a:headEnd type="none" w="med" len="med"/>
+                      <a:tailEnd type="none" w="med" len="med"/>
+                    </a:lnR>
+                    <a:lnT w="12700" cap="flat" cmpd="sng" algn="ctr">
+                      <a:solidFill>
+                        <a:srgbClr val="1C5248"/>
+                      </a:solidFill>
+                      <a:prstDash val="solid"/>
+                      <a:round/>
+                      <a:headEnd type="none" w="med" len="med"/>
+                      <a:tailEnd type="none" w="med" len="med"/>
+                    </a:lnT>
+                    <a:lnB w="12700" cap="flat" cmpd="sng" algn="ctr">
+                      <a:solidFill>
+                        <a:srgbClr val="1C5248"/>
+                      </a:solidFill>
+                      <a:prstDash val="solid"/>
+                      <a:round/>
+                      <a:headEnd type="none" w="med" len="med"/>
+                      <a:tailEnd type="none" w="med" len="med"/>
+                    </a:lnB>
+                    <a:solidFill>
+                      <a:srgbClr val="123F38"/>
+                    </a:solidFill>
+                  </a:tcPr>
+                </a:tc>
+                <a:tc>
+                  <a:txBody>
+                    <a:bodyPr/>
+                    <a:lstStyle/>
+                    <a:p>
+                      <a:pPr algn="ctr" indent="0" marL="0">
+                        <a:buNone/>
+                      </a:pPr>
+                      <a:r>
+                        <a:rPr lang="en-US" sz="1100" dirty="0">
+                          <a:solidFill>
+                            <a:srgbClr val="9DBDB0"/>
+                          </a:solidFill>
+                          <a:latin typeface="Space Grotesk" pitchFamily="34" charset="0"/>
+                          <a:ea typeface="Space Grotesk" pitchFamily="34" charset="-122"/>
+                          <a:cs typeface="Space Grotesk" pitchFamily="34" charset="-120"/>
+                        </a:rPr>
+                        <a:t>300M ViT</a:t>
+                      </a:r>
+                      <a:endParaRPr lang="en-US" sz="1100" dirty="0">
+                        <a:latin typeface="Space Grotesk" charset="0"/>
+                        <a:ea typeface="Space Grotesk" charset="0"/>
+                        <a:cs typeface="Space Grotesk" charset="0"/>
+                      </a:endParaRPr>
+                    </a:p>
+                  </a:txBody>
+                  <a:tcPr marL="91440" marR="91440" marT="45720" marB="45720" anchor="ctr">
+                    <a:lnL w="12700" cap="flat" cmpd="sng" algn="ctr">
+                      <a:solidFill>
+                        <a:srgbClr val="1C5248"/>
+                      </a:solidFill>
+                      <a:prstDash val="solid"/>
+                      <a:round/>
+                      <a:headEnd type="none" w="med" len="med"/>
+                      <a:tailEnd type="none" w="med" len="med"/>
+                    </a:lnL>
+                    <a:lnR w="12700" cap="flat" cmpd="sng" algn="ctr">
+                      <a:solidFill>
+                        <a:srgbClr val="1C5248"/>
+                      </a:solidFill>
+                      <a:prstDash val="solid"/>
+                      <a:round/>
+                      <a:headEnd type="none" w="med" len="med"/>
+                      <a:tailEnd type="none" w="med" len="med"/>
+                    </a:lnR>
+                    <a:lnT w="12700" cap="flat" cmpd="sng" algn="ctr">
+                      <a:solidFill>
+                        <a:srgbClr val="1C5248"/>
+                      </a:solidFill>
+                      <a:prstDash val="solid"/>
+                      <a:round/>
+                      <a:headEnd type="none" w="med" len="med"/>
+                      <a:tailEnd type="none" w="med" len="med"/>
+                    </a:lnT>
+                    <a:lnB w="12700" cap="flat" cmpd="sng" algn="ctr">
+                      <a:solidFill>
+                        <a:srgbClr val="1C5248"/>
+                      </a:solidFill>
+                      <a:prstDash val="solid"/>
+                      <a:round/>
+                      <a:headEnd type="none" w="med" len="med"/>
+                      <a:tailEnd type="none" w="med" len="med"/>
+                    </a:lnB>
+                    <a:solidFill>
+                      <a:srgbClr val="123F38"/>
+                    </a:solidFill>
+                  </a:tcPr>
+                </a:tc>
+                <a:tc>
+                  <a:txBody>
+                    <a:bodyPr/>
+                    <a:lstStyle/>
+                    <a:p>
+                      <a:pPr algn="ctr" indent="0" marL="0">
+                        <a:buNone/>
+                      </a:pPr>
+                      <a:r>
+                        <a:rPr lang="en-US" sz="1100" b="1" dirty="0">
+                          <a:solidFill>
+                            <a:srgbClr val="CDFCE3"/>
+                          </a:solidFill>
+                          <a:latin typeface="Space Grotesk" pitchFamily="34" charset="0"/>
+                          <a:ea typeface="Space Grotesk" pitchFamily="34" charset="-122"/>
+                          <a:cs typeface="Space Grotesk" pitchFamily="34" charset="-120"/>
+                        </a:rPr>
+                        <a:t>0.545</a:t>
+                      </a:r>
+                      <a:endParaRPr lang="en-US" sz="1100" dirty="0">
+                        <a:latin typeface="Space Grotesk" charset="0"/>
+                        <a:ea typeface="Space Grotesk" charset="0"/>
+                        <a:cs typeface="Space Grotesk" charset="0"/>
+                      </a:endParaRPr>
+                    </a:p>
+                  </a:txBody>
+                  <a:tcPr marL="91440" marR="91440" marT="45720" marB="45720" anchor="ctr">
+                    <a:lnL w="12700" cap="flat" cmpd="sng" algn="ctr">
+                      <a:solidFill>
+                        <a:srgbClr val="1C5248"/>
+                      </a:solidFill>
+                      <a:prstDash val="solid"/>
+                      <a:round/>
+                      <a:headEnd type="none" w="med" len="med"/>
+                      <a:tailEnd type="none" w="med" len="med"/>
+                    </a:lnL>
+                    <a:lnR w="12700" cap="flat" cmpd="sng" algn="ctr">
+                      <a:solidFill>
+                        <a:srgbClr val="1C5248"/>
+                      </a:solidFill>
+                      <a:prstDash val="solid"/>
+                      <a:round/>
+                      <a:headEnd type="none" w="med" len="med"/>
+                      <a:tailEnd type="none" w="med" len="med"/>
+                    </a:lnR>
+                    <a:lnT w="12700" cap="flat" cmpd="sng" algn="ctr">
+                      <a:solidFill>
+                        <a:srgbClr val="1C5248"/>
+                      </a:solidFill>
+                      <a:prstDash val="solid"/>
+                      <a:round/>
+                      <a:headEnd type="none" w="med" len="med"/>
+                      <a:tailEnd type="none" w="med" len="med"/>
+                    </a:lnT>
+                    <a:lnB w="12700" cap="flat" cmpd="sng" algn="ctr">
+                      <a:solidFill>
+                        <a:srgbClr val="1C5248"/>
+                      </a:solidFill>
+                      <a:prstDash val="solid"/>
+                      <a:round/>
+                      <a:headEnd type="none" w="med" len="med"/>
+                      <a:tailEnd type="none" w="med" len="med"/>
+                    </a:lnB>
+                    <a:solidFill>
+                      <a:srgbClr val="1E6B54"/>
+                    </a:solidFill>
+                  </a:tcPr>
+                </a:tc>
+              </a:tr>
+              <a:tr h="384048">
+                <a:tc>
+                  <a:txBody>
+                    <a:bodyPr/>
+                    <a:lstStyle/>
+                    <a:p>
+                      <a:pPr algn="l" indent="0" marL="0">
+                        <a:buNone/>
+                      </a:pPr>
+                      <a:r>
+                        <a:rPr lang="en-US" sz="1100" b="1" dirty="0">
+                          <a:solidFill>
+                            <a:srgbClr val="FFFFFF"/>
+                          </a:solidFill>
+                          <a:latin typeface="Space Grotesk" pitchFamily="34" charset="0"/>
+                          <a:ea typeface="Space Grotesk" pitchFamily="34" charset="-122"/>
+                          <a:cs typeface="Space Grotesk" pitchFamily="34" charset="-120"/>
+                        </a:rPr>
+                        <a:t>CROMA</a:t>
+                      </a:r>
+                      <a:endParaRPr lang="en-US" sz="1100" dirty="0">
+                        <a:latin typeface="Space Grotesk" charset="0"/>
+                        <a:ea typeface="Space Grotesk" charset="0"/>
+                        <a:cs typeface="Space Grotesk" charset="0"/>
+                      </a:endParaRPr>
+                    </a:p>
+                  </a:txBody>
+                  <a:tcPr marL="91440" marR="91440" marT="45720" marB="45720" anchor="ctr">
+                    <a:lnL w="12700" cap="flat" cmpd="sng" algn="ctr">
+                      <a:solidFill>
+                        <a:srgbClr val="1C5248"/>
+                      </a:solidFill>
+                      <a:prstDash val="solid"/>
+                      <a:round/>
+                      <a:headEnd type="none" w="med" len="med"/>
+                      <a:tailEnd type="none" w="med" len="med"/>
+                    </a:lnL>
+                    <a:lnR w="12700" cap="flat" cmpd="sng" algn="ctr">
+                      <a:solidFill>
+                        <a:srgbClr val="1C5248"/>
+                      </a:solidFill>
+                      <a:prstDash val="solid"/>
+                      <a:round/>
+                      <a:headEnd type="none" w="med" len="med"/>
+                      <a:tailEnd type="none" w="med" len="med"/>
+                    </a:lnR>
+                    <a:lnT w="12700" cap="flat" cmpd="sng" algn="ctr">
+                      <a:solidFill>
+                        <a:srgbClr val="1C5248"/>
+                      </a:solidFill>
+                      <a:prstDash val="solid"/>
+                      <a:round/>
+                      <a:headEnd type="none" w="med" len="med"/>
+                      <a:tailEnd type="none" w="med" len="med"/>
+                    </a:lnT>
+                    <a:lnB w="12700" cap="flat" cmpd="sng" algn="ctr">
+                      <a:solidFill>
+                        <a:srgbClr val="1C5248"/>
+                      </a:solidFill>
+                      <a:prstDash val="solid"/>
+                      <a:round/>
+                      <a:headEnd type="none" w="med" len="med"/>
+                      <a:tailEnd type="none" w="med" len="med"/>
+                    </a:lnB>
+                    <a:solidFill>
+                      <a:srgbClr val="0C3A33"/>
+                    </a:solidFill>
+                  </a:tcPr>
+                </a:tc>
+                <a:tc>
+                  <a:txBody>
+                    <a:bodyPr/>
+                    <a:lstStyle/>
+                    <a:p>
+                      <a:pPr algn="ctr" indent="0" marL="0">
+                        <a:buNone/>
+                      </a:pPr>
+                      <a:r>
+                        <a:rPr lang="en-US" sz="1100" dirty="0">
+                          <a:solidFill>
+                            <a:srgbClr val="9DBDB0"/>
+                          </a:solidFill>
+                          <a:latin typeface="Space Grotesk" pitchFamily="34" charset="0"/>
+                          <a:ea typeface="Space Grotesk" pitchFamily="34" charset="-122"/>
+                          <a:cs typeface="Space Grotesk" pitchFamily="34" charset="-120"/>
+                        </a:rPr>
+                        <a:t>8</a:t>
+                      </a:r>
+                      <a:endParaRPr lang="en-US" sz="1100" dirty="0">
+                        <a:latin typeface="Space Grotesk" charset="0"/>
+                        <a:ea typeface="Space Grotesk" charset="0"/>
+                        <a:cs typeface="Space Grotesk" charset="0"/>
+                      </a:endParaRPr>
+                    </a:p>
+                  </a:txBody>
+                  <a:tcPr marL="91440" marR="91440" marT="45720" marB="45720" anchor="ctr">
+                    <a:lnL w="12700" cap="flat" cmpd="sng" algn="ctr">
+                      <a:solidFill>
+                        <a:srgbClr val="1C5248"/>
+                      </a:solidFill>
+                      <a:prstDash val="solid"/>
+                      <a:round/>
+                      <a:headEnd type="none" w="med" len="med"/>
+                      <a:tailEnd type="none" w="med" len="med"/>
+                    </a:lnL>
+                    <a:lnR w="12700" cap="flat" cmpd="sng" algn="ctr">
+                      <a:solidFill>
+                        <a:srgbClr val="1C5248"/>
+                      </a:solidFill>
+                      <a:prstDash val="solid"/>
+                      <a:round/>
+                      <a:headEnd type="none" w="med" len="med"/>
+                      <a:tailEnd type="none" w="med" len="med"/>
+                    </a:lnR>
+                    <a:lnT w="12700" cap="flat" cmpd="sng" algn="ctr">
+                      <a:solidFill>
+                        <a:srgbClr val="1C5248"/>
+                      </a:solidFill>
+                      <a:prstDash val="solid"/>
+                      <a:round/>
+                      <a:headEnd type="none" w="med" len="med"/>
+                      <a:tailEnd type="none" w="med" len="med"/>
+                    </a:lnT>
+                    <a:lnB w="12700" cap="flat" cmpd="sng" algn="ctr">
+                      <a:solidFill>
+                        <a:srgbClr val="1C5248"/>
+                      </a:solidFill>
+                      <a:prstDash val="solid"/>
+                      <a:round/>
+                      <a:headEnd type="none" w="med" len="med"/>
+                      <a:tailEnd type="none" w="med" len="med"/>
+                    </a:lnB>
+                    <a:solidFill>
+                      <a:srgbClr val="0C3A33"/>
+                    </a:solidFill>
+                  </a:tcPr>
+                </a:tc>
+                <a:tc>
+                  <a:txBody>
+                    <a:bodyPr/>
+                    <a:lstStyle/>
+                    <a:p>
+                      <a:pPr algn="ctr" indent="0" marL="0">
+                        <a:buNone/>
+                      </a:pPr>
+                      <a:r>
+                        <a:rPr lang="en-US" sz="1100" dirty="0">
+                          <a:solidFill>
+                            <a:srgbClr val="9DBDB0"/>
+                          </a:solidFill>
+                          <a:latin typeface="Space Grotesk" pitchFamily="34" charset="0"/>
+                          <a:ea typeface="Space Grotesk" pitchFamily="34" charset="-122"/>
+                          <a:cs typeface="Space Grotesk" pitchFamily="34" charset="-120"/>
+                        </a:rPr>
+                        <a:t>ViT+SAR</a:t>
+                      </a:r>
+                      <a:endParaRPr lang="en-US" sz="1100" dirty="0">
+                        <a:latin typeface="Space Grotesk" charset="0"/>
+                        <a:ea typeface="Space Grotesk" charset="0"/>
+                        <a:cs typeface="Space Grotesk" charset="0"/>
+                      </a:endParaRPr>
+                    </a:p>
+                  </a:txBody>
+                  <a:tcPr marL="91440" marR="91440" marT="45720" marB="45720" anchor="ctr">
+                    <a:lnL w="12700" cap="flat" cmpd="sng" algn="ctr">
+                      <a:solidFill>
+                        <a:srgbClr val="1C5248"/>
+                      </a:solidFill>
+                      <a:prstDash val="solid"/>
+                      <a:round/>
+                      <a:headEnd type="none" w="med" len="med"/>
+                      <a:tailEnd type="none" w="med" len="med"/>
+                    </a:lnL>
+                    <a:lnR w="12700" cap="flat" cmpd="sng" algn="ctr">
+                      <a:solidFill>
+                        <a:srgbClr val="1C5248"/>
+                      </a:solidFill>
+                      <a:prstDash val="solid"/>
+                      <a:round/>
+                      <a:headEnd type="none" w="med" len="med"/>
+                      <a:tailEnd type="none" w="med" len="med"/>
+                    </a:lnR>
+                    <a:lnT w="12700" cap="flat" cmpd="sng" algn="ctr">
+                      <a:solidFill>
+                        <a:srgbClr val="1C5248"/>
+                      </a:solidFill>
+                      <a:prstDash val="solid"/>
+                      <a:round/>
+                      <a:headEnd type="none" w="med" len="med"/>
+                      <a:tailEnd type="none" w="med" len="med"/>
+                    </a:lnT>
+                    <a:lnB w="12700" cap="flat" cmpd="sng" algn="ctr">
+                      <a:solidFill>
+                        <a:srgbClr val="1C5248"/>
+                      </a:solidFill>
+                      <a:prstDash val="solid"/>
+                      <a:round/>
+                      <a:headEnd type="none" w="med" len="med"/>
+                      <a:tailEnd type="none" w="med" len="med"/>
+                    </a:lnB>
+                    <a:solidFill>
+                      <a:srgbClr val="0C3A33"/>
+                    </a:solidFill>
+                  </a:tcPr>
+                </a:tc>
+                <a:tc>
+                  <a:txBody>
+                    <a:bodyPr/>
+                    <a:lstStyle/>
+                    <a:p>
+                      <a:pPr algn="ctr" indent="0" marL="0">
+                        <a:buNone/>
+                      </a:pPr>
+                      <a:r>
+                        <a:rPr lang="en-US" sz="1100" i="1" dirty="0">
+                          <a:solidFill>
+                            <a:srgbClr val="9DBDB0"/>
+                          </a:solidFill>
+                          <a:latin typeface="Space Grotesk" pitchFamily="34" charset="0"/>
+                          <a:ea typeface="Space Grotesk" pitchFamily="34" charset="-122"/>
+                          <a:cs typeface="Space Grotesk" pitchFamily="34" charset="-120"/>
+                        </a:rPr>
+                        <a:t>pending</a:t>
+                      </a:r>
+                      <a:endParaRPr lang="en-US" sz="1100" dirty="0">
+                        <a:latin typeface="Space Grotesk" charset="0"/>
+                        <a:ea typeface="Space Grotesk" charset="0"/>
+                        <a:cs typeface="Space Grotesk" charset="0"/>
+                      </a:endParaRPr>
+                    </a:p>
+                  </a:txBody>
+                  <a:tcPr marL="91440" marR="91440" marT="45720" marB="45720" anchor="ctr">
+                    <a:lnL w="12700" cap="flat" cmpd="sng" algn="ctr">
+                      <a:solidFill>
+                        <a:srgbClr val="1C5248"/>
+                      </a:solidFill>
+                      <a:prstDash val="solid"/>
+                      <a:round/>
+                      <a:headEnd type="none" w="med" len="med"/>
+                      <a:tailEnd type="none" w="med" len="med"/>
+                    </a:lnL>
+                    <a:lnR w="12700" cap="flat" cmpd="sng" algn="ctr">
+                      <a:solidFill>
+                        <a:srgbClr val="1C5248"/>
+                      </a:solidFill>
+                      <a:prstDash val="solid"/>
+                      <a:round/>
+                      <a:headEnd type="none" w="med" len="med"/>
+                      <a:tailEnd type="none" w="med" len="med"/>
+                    </a:lnR>
+                    <a:lnT w="12700" cap="flat" cmpd="sng" algn="ctr">
+                      <a:solidFill>
+                        <a:srgbClr val="1C5248"/>
+                      </a:solidFill>
+                      <a:prstDash val="solid"/>
+                      <a:round/>
+                      <a:headEnd type="none" w="med" len="med"/>
+                      <a:tailEnd type="none" w="med" len="med"/>
+                    </a:lnT>
+                    <a:lnB w="12700" cap="flat" cmpd="sng" algn="ctr">
+                      <a:solidFill>
+                        <a:srgbClr val="1C5248"/>
+                      </a:solidFill>
+                      <a:prstDash val="solid"/>
+                      <a:round/>
+                      <a:headEnd type="none" w="med" len="med"/>
+                      <a:tailEnd type="none" w="med" len="med"/>
+                    </a:lnB>
+                    <a:solidFill>
+                      <a:srgbClr val="0C3A33"/>
+                    </a:solidFill>
+                  </a:tcPr>
+                </a:tc>
+              </a:tr>
+              <a:tr h="384048">
+                <a:tc>
+                  <a:txBody>
+                    <a:bodyPr/>
+                    <a:lstStyle/>
+                    <a:p>
+                      <a:pPr algn="l" indent="0" marL="0">
+                        <a:buNone/>
+                      </a:pPr>
+                      <a:r>
+                        <a:rPr lang="en-US" sz="1100" b="1" dirty="0">
+                          <a:solidFill>
+                            <a:srgbClr val="FFFFFF"/>
+                          </a:solidFill>
+                          <a:latin typeface="Space Grotesk" pitchFamily="34" charset="0"/>
+                          <a:ea typeface="Space Grotesk" pitchFamily="34" charset="-122"/>
+                          <a:cs typeface="Space Grotesk" pitchFamily="34" charset="-120"/>
+                        </a:rPr>
+                        <a:t>TerraMind</a:t>
+                      </a:r>
+                      <a:endParaRPr lang="en-US" sz="1100" dirty="0">
+                        <a:latin typeface="Space Grotesk" charset="0"/>
+                        <a:ea typeface="Space Grotesk" charset="0"/>
+                        <a:cs typeface="Space Grotesk" charset="0"/>
+                      </a:endParaRPr>
+                    </a:p>
+                  </a:txBody>
+                  <a:tcPr marL="91440" marR="91440" marT="45720" marB="45720" anchor="ctr">
+                    <a:lnL w="12700" cap="flat" cmpd="sng" algn="ctr">
+                      <a:solidFill>
+                        <a:srgbClr val="1C5248"/>
+                      </a:solidFill>
+                      <a:prstDash val="solid"/>
+                      <a:round/>
+                      <a:headEnd type="none" w="med" len="med"/>
+                      <a:tailEnd type="none" w="med" len="med"/>
+                    </a:lnL>
+                    <a:lnR w="12700" cap="flat" cmpd="sng" algn="ctr">
+                      <a:solidFill>
+                        <a:srgbClr val="1C5248"/>
+                      </a:solidFill>
+                      <a:prstDash val="solid"/>
+                      <a:round/>
+                      <a:headEnd type="none" w="med" len="med"/>
+                      <a:tailEnd type="none" w="med" len="med"/>
+                    </a:lnR>
+                    <a:lnT w="12700" cap="flat" cmpd="sng" algn="ctr">
+                      <a:solidFill>
+                        <a:srgbClr val="1C5248"/>
+                      </a:solidFill>
+                      <a:prstDash val="solid"/>
+                      <a:round/>
+                      <a:headEnd type="none" w="med" len="med"/>
+                      <a:tailEnd type="none" w="med" len="med"/>
+                    </a:lnT>
+                    <a:lnB w="12700" cap="flat" cmpd="sng" algn="ctr">
+                      <a:solidFill>
+                        <a:srgbClr val="1C5248"/>
+                      </a:solidFill>
+                      <a:prstDash val="solid"/>
+                      <a:round/>
+                      <a:headEnd type="none" w="med" len="med"/>
+                      <a:tailEnd type="none" w="med" len="med"/>
+                    </a:lnB>
+                    <a:solidFill>
+                      <a:srgbClr val="123F38"/>
+                    </a:solidFill>
+                  </a:tcPr>
+                </a:tc>
+                <a:tc>
+                  <a:txBody>
+                    <a:bodyPr/>
+                    <a:lstStyle/>
+                    <a:p>
+                      <a:pPr algn="ctr" indent="0" marL="0">
+                        <a:buNone/>
+                      </a:pPr>
+                      <a:r>
+                        <a:rPr lang="en-US" sz="1100" dirty="0">
+                          <a:solidFill>
+                            <a:srgbClr val="9DBDB0"/>
+                          </a:solidFill>
+                          <a:latin typeface="Space Grotesk" pitchFamily="34" charset="0"/>
+                          <a:ea typeface="Space Grotesk" pitchFamily="34" charset="-122"/>
+                          <a:cs typeface="Space Grotesk" pitchFamily="34" charset="-120"/>
+                        </a:rPr>
+                        <a:t>16</a:t>
+                      </a:r>
+                      <a:endParaRPr lang="en-US" sz="1100" dirty="0">
+                        <a:latin typeface="Space Grotesk" charset="0"/>
+                        <a:ea typeface="Space Grotesk" charset="0"/>
+                        <a:cs typeface="Space Grotesk" charset="0"/>
+                      </a:endParaRPr>
+                    </a:p>
+                  </a:txBody>
+                  <a:tcPr marL="91440" marR="91440" marT="45720" marB="45720" anchor="ctr">
+                    <a:lnL w="12700" cap="flat" cmpd="sng" algn="ctr">
+                      <a:solidFill>
+                        <a:srgbClr val="1C5248"/>
+                      </a:solidFill>
+                      <a:prstDash val="solid"/>
+                      <a:round/>
+                      <a:headEnd type="none" w="med" len="med"/>
+                      <a:tailEnd type="none" w="med" len="med"/>
+                    </a:lnL>
+                    <a:lnR w="12700" cap="flat" cmpd="sng" algn="ctr">
+                      <a:solidFill>
+                        <a:srgbClr val="1C5248"/>
+                      </a:solidFill>
+                      <a:prstDash val="solid"/>
+                      <a:round/>
+                      <a:headEnd type="none" w="med" len="med"/>
+                      <a:tailEnd type="none" w="med" len="med"/>
+                    </a:lnR>
+                    <a:lnT w="12700" cap="flat" cmpd="sng" algn="ctr">
+                      <a:solidFill>
+                        <a:srgbClr val="1C5248"/>
+                      </a:solidFill>
+                      <a:prstDash val="solid"/>
+                      <a:round/>
+                      <a:headEnd type="none" w="med" len="med"/>
+                      <a:tailEnd type="none" w="med" len="med"/>
+                    </a:lnT>
+                    <a:lnB w="12700" cap="flat" cmpd="sng" algn="ctr">
+                      <a:solidFill>
+                        <a:srgbClr val="1C5248"/>
+                      </a:solidFill>
+                      <a:prstDash val="solid"/>
+                      <a:round/>
+                      <a:headEnd type="none" w="med" len="med"/>
+                      <a:tailEnd type="none" w="med" len="med"/>
+                    </a:lnB>
+                    <a:solidFill>
+                      <a:srgbClr val="123F38"/>
+                    </a:solidFill>
+                  </a:tcPr>
+                </a:tc>
+                <a:tc>
+                  <a:txBody>
+                    <a:bodyPr/>
+                    <a:lstStyle/>
+                    <a:p>
+                      <a:pPr algn="ctr" indent="0" marL="0">
+                        <a:buNone/>
+                      </a:pPr>
+                      <a:r>
+                        <a:rPr lang="en-US" sz="1100" dirty="0">
+                          <a:solidFill>
+                            <a:srgbClr val="9DBDB0"/>
+                          </a:solidFill>
+                          <a:latin typeface="Space Grotesk" pitchFamily="34" charset="0"/>
+                          <a:ea typeface="Space Grotesk" pitchFamily="34" charset="-122"/>
+                          <a:cs typeface="Space Grotesk" pitchFamily="34" charset="-120"/>
+                        </a:rPr>
+                        <a:t>multimodal</a:t>
+                      </a:r>
+                      <a:endParaRPr lang="en-US" sz="1100" dirty="0">
+                        <a:latin typeface="Space Grotesk" charset="0"/>
+                        <a:ea typeface="Space Grotesk" charset="0"/>
+                        <a:cs typeface="Space Grotesk" charset="0"/>
+                      </a:endParaRPr>
+                    </a:p>
+                  </a:txBody>
+                  <a:tcPr marL="91440" marR="91440" marT="45720" marB="45720" anchor="ctr">
+                    <a:lnL w="12700" cap="flat" cmpd="sng" algn="ctr">
+                      <a:solidFill>
+                        <a:srgbClr val="1C5248"/>
+                      </a:solidFill>
+                      <a:prstDash val="solid"/>
+                      <a:round/>
+                      <a:headEnd type="none" w="med" len="med"/>
+                      <a:tailEnd type="none" w="med" len="med"/>
+                    </a:lnL>
+                    <a:lnR w="12700" cap="flat" cmpd="sng" algn="ctr">
+                      <a:solidFill>
+                        <a:srgbClr val="1C5248"/>
+                      </a:solidFill>
+                      <a:prstDash val="solid"/>
+                      <a:round/>
+                      <a:headEnd type="none" w="med" len="med"/>
+                      <a:tailEnd type="none" w="med" len="med"/>
+                    </a:lnR>
+                    <a:lnT w="12700" cap="flat" cmpd="sng" algn="ctr">
+                      <a:solidFill>
+                        <a:srgbClr val="1C5248"/>
+                      </a:solidFill>
+                      <a:prstDash val="solid"/>
+                      <a:round/>
+                      <a:headEnd type="none" w="med" len="med"/>
+                      <a:tailEnd type="none" w="med" len="med"/>
+                    </a:lnT>
+                    <a:lnB w="12700" cap="flat" cmpd="sng" algn="ctr">
+                      <a:solidFill>
+                        <a:srgbClr val="1C5248"/>
+                      </a:solidFill>
+                      <a:prstDash val="solid"/>
+                      <a:round/>
+                      <a:headEnd type="none" w="med" len="med"/>
+                      <a:tailEnd type="none" w="med" len="med"/>
+                    </a:lnB>
+                    <a:solidFill>
+                      <a:srgbClr val="123F38"/>
+                    </a:solidFill>
+                  </a:tcPr>
+                </a:tc>
+                <a:tc>
+                  <a:txBody>
+                    <a:bodyPr/>
+                    <a:lstStyle/>
+                    <a:p>
+                      <a:pPr algn="ctr" indent="0" marL="0">
+                        <a:buNone/>
+                      </a:pPr>
+                      <a:r>
+                        <a:rPr lang="en-US" sz="1100" i="1" dirty="0">
+                          <a:solidFill>
+                            <a:srgbClr val="9DBDB0"/>
+                          </a:solidFill>
+                          <a:latin typeface="Space Grotesk" pitchFamily="34" charset="0"/>
+                          <a:ea typeface="Space Grotesk" pitchFamily="34" charset="-122"/>
+                          <a:cs typeface="Space Grotesk" pitchFamily="34" charset="-120"/>
+                        </a:rPr>
+                        <a:t>pending</a:t>
+                      </a:r>
+                      <a:endParaRPr lang="en-US" sz="1100" dirty="0">
+                        <a:latin typeface="Space Grotesk" charset="0"/>
+                        <a:ea typeface="Space Grotesk" charset="0"/>
+                        <a:cs typeface="Space Grotesk" charset="0"/>
+                      </a:endParaRPr>
+                    </a:p>
+                  </a:txBody>
+                  <a:tcPr marL="91440" marR="91440" marT="45720" marB="45720" anchor="ctr">
+                    <a:lnL w="12700" cap="flat" cmpd="sng" algn="ctr">
+                      <a:solidFill>
+                        <a:srgbClr val="1C5248"/>
+                      </a:solidFill>
+                      <a:prstDash val="solid"/>
+                      <a:round/>
+                      <a:headEnd type="none" w="med" len="med"/>
+                      <a:tailEnd type="none" w="med" len="med"/>
+                    </a:lnL>
+                    <a:lnR w="12700" cap="flat" cmpd="sng" algn="ctr">
+                      <a:solidFill>
+                        <a:srgbClr val="1C5248"/>
+                      </a:solidFill>
+                      <a:prstDash val="solid"/>
+                      <a:round/>
+                      <a:headEnd type="none" w="med" len="med"/>
+                      <a:tailEnd type="none" w="med" len="med"/>
+                    </a:lnR>
+                    <a:lnT w="12700" cap="flat" cmpd="sng" algn="ctr">
+                      <a:solidFill>
+                        <a:srgbClr val="1C5248"/>
+                      </a:solidFill>
+                      <a:prstDash val="solid"/>
+                      <a:round/>
+                      <a:headEnd type="none" w="med" len="med"/>
+                      <a:tailEnd type="none" w="med" len="med"/>
+                    </a:lnT>
+                    <a:lnB w="12700" cap="flat" cmpd="sng" algn="ctr">
+                      <a:solidFill>
+                        <a:srgbClr val="1C5248"/>
+                      </a:solidFill>
+                      <a:prstDash val="solid"/>
+                      <a:round/>
+                      <a:headEnd type="none" w="med" len="med"/>
+                      <a:tailEnd type="none" w="med" len="med"/>
+                    </a:lnB>
+                    <a:solidFill>
+                      <a:srgbClr val="123F38"/>
+                    </a:solidFill>
+                  </a:tcPr>
+                </a:tc>
+              </a:tr>
+            </a:tbl>
+          </a:graphicData>
+        </a:graphic>
+      </p:graphicFrame>
+      <p:sp>
+        <p:nvSpPr>
+          <p:cNvPr id="8" name="Shape 4"/>
+          <p:cNvSpPr/>
+          <p:nvPr/>
+        </p:nvSpPr>
+        <p:spPr>
+          <a:xfrm>
+            <a:off x="7498080" y="4553712"/>
+            <a:ext cx="4023360" cy="1371600"/>
+          </a:xfrm>
+          <a:prstGeom prst="roundRect">
+            <a:avLst>
+              <a:gd name="adj" fmla="val 6667"/>
+            </a:avLst>
+          </a:prstGeom>
+          <a:solidFill>
+            <a:srgbClr val="145043"/>
+          </a:solidFill>
+          <a:ln/>
+          <a:effectLst>
+            <a:outerShdw sx="100000" sy="100000" kx="0" ky="0" algn="bl" rotWithShape="0" blurRad="101600" dist="38100" dir="5400000">
+              <a:srgbClr val="000000">
+                <a:alpha val="35000"/>
+              </a:srgbClr>
+            </a:outerShdw>
+          </a:effectLst>
+        </p:spPr>
+      </p:sp>
+      <p:sp>
+        <p:nvSpPr>
+          <p:cNvPr id="9" name="Text 5"/>
+          <p:cNvSpPr/>
+          <p:nvPr/>
+        </p:nvSpPr>
+        <p:spPr>
+          <a:xfrm>
+            <a:off x="7726680" y="4690872"/>
+            <a:ext cx="3566160" cy="457200"/>
+          </a:xfrm>
+          <a:prstGeom prst="rect">
+            <a:avLst/>
+          </a:prstGeom>
+          <a:noFill/>
+          <a:ln/>
+        </p:spPr>
+        <p:txBody>
+          <a:bodyPr wrap="square" lIns="0" tIns="0" rIns="0" bIns="0" rtlCol="0" anchor="t"/>
+          <a:lstStyle/>
+          <a:p>
+            <a:pPr indent="0" marL="0">
+              <a:buNone/>
+            </a:pPr>
+            <a:r>
+              <a:rPr lang="en-US" sz="1500" b="1" dirty="0">
+                <a:solidFill>
+                  <a:srgbClr val="FF826C"/>
+                </a:solidFill>
+                <a:latin typeface="Space Grotesk" pitchFamily="34" charset="0"/>
+                <a:ea typeface="Space Grotesk" pitchFamily="34" charset="-122"/>
+                <a:cs typeface="Space Grotesk" pitchFamily="34" charset="-120"/>
+              </a:rPr>
+              <a:t>The reversal: encoder gates resolution</a:t>
+            </a:r>
+            <a:endParaRPr lang="en-US" sz="1500" dirty="0"/>
+          </a:p>
+        </p:txBody>
+      </p:sp>
+      <p:sp>
+        <p:nvSpPr>
+          <p:cNvPr id="10" name="Text 6"/>
+          <p:cNvSpPr/>
+          <p:nvPr/>
+        </p:nvSpPr>
+        <p:spPr>
+          <a:xfrm>
+            <a:off x="7726680" y="5120640"/>
+            <a:ext cx="3566160" cy="685800"/>
+          </a:xfrm>
+          <a:prstGeom prst="rect">
+            <a:avLst/>
+          </a:prstGeom>
+          <a:noFill/>
+          <a:ln/>
+        </p:spPr>
+        <p:txBody>
+          <a:bodyPr wrap="square" lIns="0" tIns="0" rIns="0" bIns="0" rtlCol="0" anchor="t"/>
+          <a:lstStyle/>
+          <a:p>
+            <a:pPr indent="0" marL="0">
+              <a:lnSpc>
+                <a:spcPct val="110000"/>
+              </a:lnSpc>
+              <a:buNone/>
+            </a:pPr>
+            <a:r>
+              <a:rPr lang="en-US" sz="1200" dirty="0">
+                <a:solidFill>
+                  <a:srgbClr val="FFFFFF"/>
+                </a:solidFill>
+                <a:latin typeface="Space Grotesk" pitchFamily="34" charset="0"/>
+                <a:ea typeface="Space Grotesk" pitchFamily="34" charset="-122"/>
+                <a:cs typeface="Space Grotesk" pitchFamily="34" charset="-120"/>
+              </a:rPr>
+              <a:t>If finer patches drove accuracy, Clay (p8) would beat both Prithvis (p14/p16). It lands last (0.435). Tessera wins by being p1 AND a strong encoder. CROMA/TerraMind retrain on S1 v3 — pending.</a:t>
+            </a:r>
+            <a:endParaRPr lang="en-US" sz="1200" dirty="0"/>
+          </a:p>
+        </p:txBody>
+      </p:sp>
+    </p:spTree>
+  </p:cSld>
+  <p:clrMapOvr>
+    <a:masterClrMapping/>
+  </p:clrMapOvr>
+</p:sld>
+</file>
+
+<file path=ppt/slides/slide16.xml><?xml version="1.0" encoding="utf-8"?>
+<p:sld xmlns:a="http://schemas.openxmlformats.org/drawingml/2006/main" xmlns:r="http://schemas.openxmlformats.org/officeDocument/2006/relationships" xmlns:p="http://schemas.openxmlformats.org/presentationml/2006/main">
+  <p:cSld name="Slide 16">
+    <p:bg>
+      <p:bgPr>
+        <a:solidFill>
+          <a:srgbClr val="0E433C"/>
+        </a:solidFill>
+      </p:bgPr>
+    </p:bg>
+    <p:spTree>
+      <p:nvGrpSpPr>
+        <p:cNvPr id="1" name=""/>
+        <p:cNvGrpSpPr/>
+        <p:nvPr/>
+      </p:nvGrpSpPr>
+      <p:grpSpPr>
+        <a:xfrm>
+          <a:off x="0" y="0"/>
+          <a:ext cx="0" cy="0"/>
+          <a:chOff x="0" y="0"/>
+          <a:chExt cx="0" cy="0"/>
+        </a:xfrm>
+      </p:grpSpPr>
+      <p:sp>
+        <p:nvSpPr>
+          <p:cNvPr id="2" name="Text 0"/>
+          <p:cNvSpPr/>
+          <p:nvPr/>
+        </p:nvSpPr>
+        <p:spPr>
+          <a:xfrm>
+            <a:off x="8686800" y="320040"/>
+            <a:ext cx="3200400" cy="320040"/>
+          </a:xfrm>
+          <a:prstGeom prst="rect">
+            <a:avLst/>
+          </a:prstGeom>
+          <a:noFill/>
+          <a:ln/>
+        </p:spPr>
+        <p:txBody>
+          <a:bodyPr wrap="square" lIns="0" tIns="0" rIns="0" bIns="0" rtlCol="0" anchor="ctr"/>
+          <a:lstStyle/>
+          <a:p>
+            <a:pPr algn="r" indent="0" marL="0">
+              <a:buNone/>
+            </a:pPr>
+            <a:r>
+              <a:rPr lang="en-US" sz="1200" b="1" dirty="0">
+                <a:solidFill>
+                  <a:srgbClr val="CDFCE3"/>
+                </a:solidFill>
+                <a:latin typeface="Space Grotesk" pitchFamily="34" charset="0"/>
+                <a:ea typeface="Space Grotesk" pitchFamily="34" charset="-122"/>
+                <a:cs typeface="Space Grotesk" pitchFamily="34" charset="-120"/>
+              </a:rPr>
+              <a:t>◆ </a:t>
+            </a:r>
+            <a:pPr algn="r" indent="0" marL="0">
+              <a:buNone/>
+            </a:pPr>
+            <a:r>
+              <a:rPr lang="en-US" sz="1200" b="1" dirty="0">
+                <a:solidFill>
+                  <a:srgbClr val="FFFFFF"/>
+                </a:solidFill>
+                <a:latin typeface="Space Grotesk" pitchFamily="34" charset="0"/>
+                <a:ea typeface="Space Grotesk" pitchFamily="34" charset="-122"/>
+                <a:cs typeface="Space Grotesk" pitchFamily="34" charset="-120"/>
+              </a:rPr>
+              <a:t>Digital Earth Sweden</a:t>
+            </a:r>
+            <a:endParaRPr lang="en-US" sz="1200" dirty="0"/>
+          </a:p>
+        </p:txBody>
+      </p:sp>
+      <p:sp>
+        <p:nvSpPr>
+          <p:cNvPr id="3" name="Text 1"/>
+          <p:cNvSpPr/>
+          <p:nvPr/>
+        </p:nvSpPr>
+        <p:spPr>
+          <a:xfrm>
+            <a:off x="640080" y="384048"/>
+            <a:ext cx="10881360" cy="777240"/>
+          </a:xfrm>
+          <a:prstGeom prst="rect">
+            <a:avLst/>
+          </a:prstGeom>
+          <a:noFill/>
+          <a:ln/>
+        </p:spPr>
+        <p:txBody>
+          <a:bodyPr wrap="square" lIns="0" tIns="0" rIns="0" bIns="0" rtlCol="0" anchor="ctr"/>
+          <a:lstStyle/>
+          <a:p>
+            <a:pPr algn="ctr" indent="0" marL="0">
+              <a:buNone/>
+            </a:pPr>
+            <a:r>
+              <a:rPr lang="en-US" sz="3200" b="1" dirty="0">
+                <a:solidFill>
+                  <a:srgbClr val="FFFFFF"/>
+                </a:solidFill>
+                <a:latin typeface="Space Grotesk" pitchFamily="34" charset="0"/>
+                <a:ea typeface="Space Grotesk" pitchFamily="34" charset="-122"/>
+                <a:cs typeface="Space Grotesk" pitchFamily="34" charset="-120"/>
+              </a:rPr>
+              <a:t>Independent validation: LUCAS</a:t>
+            </a:r>
+            <a:endParaRPr lang="en-US" sz="3200" dirty="0"/>
+          </a:p>
+        </p:txBody>
+      </p:sp>
+      <p:sp>
+        <p:nvSpPr>
+          <p:cNvPr id="4" name="Text 2"/>
+          <p:cNvSpPr/>
+          <p:nvPr/>
+        </p:nvSpPr>
+        <p:spPr>
+          <a:xfrm>
+            <a:off x="822960" y="1170432"/>
+            <a:ext cx="10515600" cy="457200"/>
+          </a:xfrm>
+          <a:prstGeom prst="rect">
+            <a:avLst/>
+          </a:prstGeom>
+          <a:noFill/>
+          <a:ln/>
+        </p:spPr>
+        <p:txBody>
+          <a:bodyPr wrap="square" lIns="0" tIns="0" rIns="0" bIns="0" rtlCol="0" anchor="ctr"/>
+          <a:lstStyle/>
+          <a:p>
+            <a:pPr algn="ctr" indent="0" marL="0">
+              <a:buNone/>
+            </a:pPr>
+            <a:r>
+              <a:rPr lang="en-US" sz="1400" dirty="0">
+                <a:solidFill>
+                  <a:srgbClr val="9DBDB0"/>
+                </a:solidFill>
+                <a:latin typeface="Space Grotesk" pitchFamily="34" charset="0"/>
+                <a:ea typeface="Space Grotesk" pitchFamily="34" charset="-122"/>
+                <a:cs typeface="Space Grotesk" pitchFamily="34" charset="-120"/>
+              </a:rPr>
+              <a:t>10,108 year-matched field points, never trained on</a:t>
+            </a:r>
+            <a:endParaRPr lang="en-US" sz="1400" dirty="0"/>
+          </a:p>
+        </p:txBody>
+      </p:sp>
+      <p:sp>
+        <p:nvSpPr>
+          <p:cNvPr id="5" name="Text 3"/>
+          <p:cNvSpPr/>
+          <p:nvPr/>
+        </p:nvSpPr>
+        <p:spPr>
+          <a:xfrm>
+            <a:off x="731520" y="1691640"/>
+            <a:ext cx="5120640" cy="320040"/>
+          </a:xfrm>
+          <a:prstGeom prst="rect">
+            <a:avLst/>
+          </a:prstGeom>
+          <a:noFill/>
+          <a:ln/>
+        </p:spPr>
+        <p:txBody>
+          <a:bodyPr wrap="square" lIns="0" tIns="0" rIns="0" bIns="0" rtlCol="0" anchor="ctr"/>
+          <a:lstStyle/>
+          <a:p>
+            <a:pPr indent="0" marL="0">
+              <a:buNone/>
+            </a:pPr>
+            <a:r>
+              <a:rPr lang="en-US" sz="1400" b="1" dirty="0">
+                <a:solidFill>
+                  <a:srgbClr val="CDFCE3"/>
+                </a:solidFill>
+                <a:latin typeface="Space Grotesk" pitchFamily="34" charset="0"/>
+                <a:ea typeface="Space Grotesk" pitchFamily="34" charset="-122"/>
+                <a:cs typeface="Space Grotesk" pitchFamily="34" charset="-120"/>
+              </a:rPr>
+              <a:t>L2b — 28-class overall</a:t>
+            </a:r>
+            <a:endParaRPr lang="en-US" sz="1400" dirty="0"/>
+          </a:p>
+        </p:txBody>
+      </p:sp>
+      <p:graphicFrame>
+        <p:nvGraphicFramePr>
+          <p:cNvPr id="17" name="Table 0"/>
           <p:cNvGraphicFramePr>
             <a:graphicFrameLocks noGrp="1"/>
           </p:cNvGraphicFramePr>
@@ -12799,724 +15459,6 @@
 </p:sld>
 </file>
 
-<file path=ppt/slides/slide16.xml><?xml version="1.0" encoding="utf-8"?>
-<p:sld xmlns:a="http://schemas.openxmlformats.org/drawingml/2006/main" xmlns:r="http://schemas.openxmlformats.org/officeDocument/2006/relationships" xmlns:p="http://schemas.openxmlformats.org/presentationml/2006/main">
-  <p:cSld name="Slide 16">
-    <p:bg>
-      <p:bgPr>
-        <a:solidFill>
-          <a:srgbClr val="0E433C"/>
-        </a:solidFill>
-      </p:bgPr>
-    </p:bg>
-    <p:spTree>
-      <p:nvGrpSpPr>
-        <p:cNvPr id="1" name=""/>
-        <p:cNvGrpSpPr/>
-        <p:nvPr/>
-      </p:nvGrpSpPr>
-      <p:grpSpPr>
-        <a:xfrm>
-          <a:off x="0" y="0"/>
-          <a:ext cx="0" cy="0"/>
-          <a:chOff x="0" y="0"/>
-          <a:chExt cx="0" cy="0"/>
-        </a:xfrm>
-      </p:grpSpPr>
-      <p:sp>
-        <p:nvSpPr>
-          <p:cNvPr id="2" name="Text 0"/>
-          <p:cNvSpPr/>
-          <p:nvPr/>
-        </p:nvSpPr>
-        <p:spPr>
-          <a:xfrm>
-            <a:off x="8686800" y="320040"/>
-            <a:ext cx="3200400" cy="320040"/>
-          </a:xfrm>
-          <a:prstGeom prst="rect">
-            <a:avLst/>
-          </a:prstGeom>
-          <a:noFill/>
-          <a:ln/>
-        </p:spPr>
-        <p:txBody>
-          <a:bodyPr wrap="square" lIns="0" tIns="0" rIns="0" bIns="0" rtlCol="0" anchor="ctr"/>
-          <a:lstStyle/>
-          <a:p>
-            <a:pPr algn="r" indent="0" marL="0">
-              <a:buNone/>
-            </a:pPr>
-            <a:r>
-              <a:rPr lang="en-US" sz="1200" b="1" dirty="0">
-                <a:solidFill>
-                  <a:srgbClr val="CDFCE3"/>
-                </a:solidFill>
-                <a:latin typeface="Space Grotesk" pitchFamily="34" charset="0"/>
-                <a:ea typeface="Space Grotesk" pitchFamily="34" charset="-122"/>
-                <a:cs typeface="Space Grotesk" pitchFamily="34" charset="-120"/>
-              </a:rPr>
-              <a:t>◆ </a:t>
-            </a:r>
-            <a:pPr algn="r" indent="0" marL="0">
-              <a:buNone/>
-            </a:pPr>
-            <a:r>
-              <a:rPr lang="en-US" sz="1200" b="1" dirty="0">
-                <a:solidFill>
-                  <a:srgbClr val="FFFFFF"/>
-                </a:solidFill>
-                <a:latin typeface="Space Grotesk" pitchFamily="34" charset="0"/>
-                <a:ea typeface="Space Grotesk" pitchFamily="34" charset="-122"/>
-                <a:cs typeface="Space Grotesk" pitchFamily="34" charset="-120"/>
-              </a:rPr>
-              <a:t>Digital Earth Sweden</a:t>
-            </a:r>
-            <a:endParaRPr lang="en-US" sz="1200" dirty="0"/>
-          </a:p>
-        </p:txBody>
-      </p:sp>
-      <p:sp>
-        <p:nvSpPr>
-          <p:cNvPr id="3" name="Text 1"/>
-          <p:cNvSpPr/>
-          <p:nvPr/>
-        </p:nvSpPr>
-        <p:spPr>
-          <a:xfrm>
-            <a:off x="640080" y="384048"/>
-            <a:ext cx="10881360" cy="777240"/>
-          </a:xfrm>
-          <a:prstGeom prst="rect">
-            <a:avLst/>
-          </a:prstGeom>
-          <a:noFill/>
-          <a:ln/>
-        </p:spPr>
-        <p:txBody>
-          <a:bodyPr wrap="square" lIns="0" tIns="0" rIns="0" bIns="0" rtlCol="0" anchor="ctr"/>
-          <a:lstStyle/>
-          <a:p>
-            <a:pPr algn="ctr" indent="0" marL="0">
-              <a:buNone/>
-            </a:pPr>
-            <a:r>
-              <a:rPr lang="en-US" sz="3200" b="1" dirty="0">
-                <a:solidFill>
-                  <a:srgbClr val="FFFFFF"/>
-                </a:solidFill>
-                <a:latin typeface="Space Grotesk" pitchFamily="34" charset="0"/>
-                <a:ea typeface="Space Grotesk" pitchFamily="34" charset="-122"/>
-                <a:cs typeface="Space Grotesk" pitchFamily="34" charset="-120"/>
-              </a:rPr>
-              <a:t>Label cross-check: LUCAS × LPIS</a:t>
-            </a:r>
-            <a:endParaRPr lang="en-US" sz="3200" dirty="0"/>
-          </a:p>
-        </p:txBody>
-      </p:sp>
-      <p:sp>
-        <p:nvSpPr>
-          <p:cNvPr id="4" name="Text 2"/>
-          <p:cNvSpPr/>
-          <p:nvPr/>
-        </p:nvSpPr>
-        <p:spPr>
-          <a:xfrm>
-            <a:off x="822960" y="1170432"/>
-            <a:ext cx="10515600" cy="457200"/>
-          </a:xfrm>
-          <a:prstGeom prst="rect">
-            <a:avLst/>
-          </a:prstGeom>
-          <a:noFill/>
-          <a:ln/>
-        </p:spPr>
-        <p:txBody>
-          <a:bodyPr wrap="square" lIns="0" tIns="0" rIns="0" bIns="0" rtlCol="0" anchor="ctr"/>
-          <a:lstStyle/>
-          <a:p>
-            <a:pPr algn="ctr" indent="0" marL="0">
-              <a:buNone/>
-            </a:pPr>
-            <a:r>
-              <a:rPr lang="en-US" sz="1400" dirty="0">
-                <a:solidFill>
-                  <a:srgbClr val="9DBDB0"/>
-                </a:solidFill>
-                <a:latin typeface="Space Grotesk" pitchFamily="34" charset="0"/>
-                <a:ea typeface="Space Grotesk" pitchFamily="34" charset="-122"/>
-                <a:cs typeface="Space Grotesk" pitchFamily="34" charset="-120"/>
-              </a:rPr>
-              <a:t>Year-matched crop truth, no model in the loop</a:t>
-            </a:r>
-            <a:endParaRPr lang="en-US" sz="1400" dirty="0"/>
-          </a:p>
-        </p:txBody>
-      </p:sp>
-      <p:sp>
-        <p:nvSpPr>
-          <p:cNvPr id="5" name="Shape 3"/>
-          <p:cNvSpPr/>
-          <p:nvPr/>
-        </p:nvSpPr>
-        <p:spPr>
-          <a:xfrm>
-            <a:off x="731520" y="1691640"/>
-            <a:ext cx="3493008" cy="1463040"/>
-          </a:xfrm>
-          <a:prstGeom prst="roundRect">
-            <a:avLst>
-              <a:gd name="adj" fmla="val 5625"/>
-            </a:avLst>
-          </a:prstGeom>
-          <a:solidFill>
-            <a:srgbClr val="145043"/>
-          </a:solidFill>
-          <a:ln/>
-          <a:effectLst>
-            <a:outerShdw sx="100000" sy="100000" kx="0" ky="0" algn="bl" rotWithShape="0" blurRad="101600" dist="38100" dir="5400000">
-              <a:srgbClr val="000000">
-                <a:alpha val="35000"/>
-              </a:srgbClr>
-            </a:outerShdw>
-          </a:effectLst>
-        </p:spPr>
-      </p:sp>
-      <p:sp>
-        <p:nvSpPr>
-          <p:cNvPr id="6" name="Text 4"/>
-          <p:cNvSpPr/>
-          <p:nvPr/>
-        </p:nvSpPr>
-        <p:spPr>
-          <a:xfrm>
-            <a:off x="822960" y="1810512"/>
-            <a:ext cx="3310128" cy="548640"/>
-          </a:xfrm>
-          <a:prstGeom prst="rect">
-            <a:avLst/>
-          </a:prstGeom>
-          <a:noFill/>
-          <a:ln/>
-        </p:spPr>
-        <p:txBody>
-          <a:bodyPr wrap="square" lIns="0" tIns="0" rIns="0" bIns="0" rtlCol="0" anchor="ctr"/>
-          <a:lstStyle/>
-          <a:p>
-            <a:pPr algn="ctr" indent="0" marL="0">
-              <a:buNone/>
-            </a:pPr>
-            <a:r>
-              <a:rPr lang="en-US" sz="2800" b="1" dirty="0">
-                <a:solidFill>
-                  <a:srgbClr val="FFFFFF"/>
-                </a:solidFill>
-                <a:latin typeface="Space Grotesk" pitchFamily="34" charset="0"/>
-                <a:ea typeface="Space Grotesk" pitchFamily="34" charset="-122"/>
-                <a:cs typeface="Space Grotesk" pitchFamily="34" charset="-120"/>
-              </a:rPr>
-              <a:t>79.8%</a:t>
-            </a:r>
-            <a:endParaRPr lang="en-US" sz="2800" dirty="0"/>
-          </a:p>
-        </p:txBody>
-      </p:sp>
-      <p:sp>
-        <p:nvSpPr>
-          <p:cNvPr id="7" name="Text 5"/>
-          <p:cNvSpPr/>
-          <p:nvPr/>
-        </p:nvSpPr>
-        <p:spPr>
-          <a:xfrm>
-            <a:off x="841248" y="2395728"/>
-            <a:ext cx="3273552" cy="640080"/>
-          </a:xfrm>
-          <a:prstGeom prst="rect">
-            <a:avLst/>
-          </a:prstGeom>
-          <a:noFill/>
-          <a:ln/>
-        </p:spPr>
-        <p:txBody>
-          <a:bodyPr wrap="square" lIns="0" tIns="0" rIns="0" bIns="0" rtlCol="0" anchor="ctr"/>
-          <a:lstStyle/>
-          <a:p>
-            <a:pPr algn="ctr" indent="0" marL="0">
-              <a:lnSpc>
-                <a:spcPct val="100000"/>
-              </a:lnSpc>
-              <a:buNone/>
-            </a:pPr>
-            <a:r>
-              <a:rPr lang="en-US" sz="1250" dirty="0">
-                <a:solidFill>
-                  <a:srgbClr val="9DBDB0"/>
-                </a:solidFill>
-                <a:latin typeface="Space Grotesk" pitchFamily="34" charset="0"/>
-                <a:ea typeface="Space Grotesk" pitchFamily="34" charset="-122"/>
-                <a:cs typeface="Space Grotesk" pitchFamily="34" charset="-120"/>
-              </a:rPr>
-              <a:t>LUCAS crop points on a</a:t>
-            </a:r>
-            <a:endParaRPr lang="en-US" sz="1250" dirty="0"/>
-          </a:p>
-          <a:p>
-            <a:pPr algn="ctr" indent="0" marL="0">
-              <a:lnSpc>
-                <a:spcPct val="100000"/>
-              </a:lnSpc>
-              <a:buNone/>
-            </a:pPr>
-            <a:r>
-              <a:rPr lang="en-US" sz="1250" dirty="0">
-                <a:solidFill>
-                  <a:srgbClr val="9DBDB0"/>
-                </a:solidFill>
-                <a:latin typeface="Space Grotesk" pitchFamily="34" charset="0"/>
-                <a:ea typeface="Space Grotesk" pitchFamily="34" charset="-122"/>
-                <a:cs typeface="Space Grotesk" pitchFamily="34" charset="-120"/>
-              </a:rPr>
-              <a:t>year-matched LPIS parcel</a:t>
-            </a:r>
-            <a:endParaRPr lang="en-US" sz="1250" dirty="0"/>
-          </a:p>
-        </p:txBody>
-      </p:sp>
-      <p:sp>
-        <p:nvSpPr>
-          <p:cNvPr id="8" name="Shape 6"/>
-          <p:cNvSpPr/>
-          <p:nvPr/>
-        </p:nvSpPr>
-        <p:spPr>
-          <a:xfrm>
-            <a:off x="4361688" y="1691640"/>
-            <a:ext cx="3493008" cy="1463040"/>
-          </a:xfrm>
-          <a:prstGeom prst="roundRect">
-            <a:avLst>
-              <a:gd name="adj" fmla="val 5625"/>
-            </a:avLst>
-          </a:prstGeom>
-          <a:solidFill>
-            <a:srgbClr val="145043"/>
-          </a:solidFill>
-          <a:ln/>
-          <a:effectLst>
-            <a:outerShdw sx="100000" sy="100000" kx="0" ky="0" algn="bl" rotWithShape="0" blurRad="101600" dist="38100" dir="5400000">
-              <a:srgbClr val="000000">
-                <a:alpha val="35000"/>
-              </a:srgbClr>
-            </a:outerShdw>
-          </a:effectLst>
-        </p:spPr>
-      </p:sp>
-      <p:sp>
-        <p:nvSpPr>
-          <p:cNvPr id="9" name="Text 7"/>
-          <p:cNvSpPr/>
-          <p:nvPr/>
-        </p:nvSpPr>
-        <p:spPr>
-          <a:xfrm>
-            <a:off x="4453128" y="1810512"/>
-            <a:ext cx="3310128" cy="548640"/>
-          </a:xfrm>
-          <a:prstGeom prst="rect">
-            <a:avLst/>
-          </a:prstGeom>
-          <a:noFill/>
-          <a:ln/>
-        </p:spPr>
-        <p:txBody>
-          <a:bodyPr wrap="square" lIns="0" tIns="0" rIns="0" bIns="0" rtlCol="0" anchor="ctr"/>
-          <a:lstStyle/>
-          <a:p>
-            <a:pPr algn="ctr" indent="0" marL="0">
-              <a:buNone/>
-            </a:pPr>
-            <a:r>
-              <a:rPr lang="en-US" sz="2800" b="1" dirty="0">
-                <a:solidFill>
-                  <a:srgbClr val="CDFCE3"/>
-                </a:solidFill>
-                <a:latin typeface="Space Grotesk" pitchFamily="34" charset="0"/>
-                <a:ea typeface="Space Grotesk" pitchFamily="34" charset="-122"/>
-                <a:cs typeface="Space Grotesk" pitchFamily="34" charset="-120"/>
-              </a:rPr>
-              <a:t>0.81</a:t>
-            </a:r>
-            <a:endParaRPr lang="en-US" sz="2800" dirty="0"/>
-          </a:p>
-        </p:txBody>
-      </p:sp>
-      <p:sp>
-        <p:nvSpPr>
-          <p:cNvPr id="10" name="Text 8"/>
-          <p:cNvSpPr/>
-          <p:nvPr/>
-        </p:nvSpPr>
-        <p:spPr>
-          <a:xfrm>
-            <a:off x="4471416" y="2395728"/>
-            <a:ext cx="3273552" cy="640080"/>
-          </a:xfrm>
-          <a:prstGeom prst="rect">
-            <a:avLst/>
-          </a:prstGeom>
-          <a:noFill/>
-          <a:ln/>
-        </p:spPr>
-        <p:txBody>
-          <a:bodyPr wrap="square" lIns="0" tIns="0" rIns="0" bIns="0" rtlCol="0" anchor="ctr"/>
-          <a:lstStyle/>
-          <a:p>
-            <a:pPr algn="ctr" indent="0" marL="0">
-              <a:lnSpc>
-                <a:spcPct val="100000"/>
-              </a:lnSpc>
-              <a:buNone/>
-            </a:pPr>
-            <a:r>
-              <a:rPr lang="en-US" sz="1250" dirty="0">
-                <a:solidFill>
-                  <a:srgbClr val="9DBDB0"/>
-                </a:solidFill>
-                <a:latin typeface="Space Grotesk" pitchFamily="34" charset="0"/>
-                <a:ea typeface="Space Grotesk" pitchFamily="34" charset="-122"/>
-                <a:cs typeface="Space Grotesk" pitchFamily="34" charset="-120"/>
-              </a:rPr>
-              <a:t>agreement excluding</a:t>
-            </a:r>
-            <a:endParaRPr lang="en-US" sz="1250" dirty="0"/>
-          </a:p>
-          <a:p>
-            <a:pPr algn="ctr" indent="0" marL="0">
-              <a:lnSpc>
-                <a:spcPct val="100000"/>
-              </a:lnSpc>
-              <a:buNone/>
-            </a:pPr>
-            <a:r>
-              <a:rPr lang="en-US" sz="1250" dirty="0">
-                <a:solidFill>
-                  <a:srgbClr val="9DBDB0"/>
-                </a:solidFill>
-                <a:latin typeface="Space Grotesk" pitchFamily="34" charset="0"/>
-                <a:ea typeface="Space Grotesk" pitchFamily="34" charset="-122"/>
-                <a:cs typeface="Space Grotesk" pitchFamily="34" charset="-120"/>
-              </a:rPr>
-              <a:t>pasture</a:t>
-            </a:r>
-            <a:endParaRPr lang="en-US" sz="1250" dirty="0"/>
-          </a:p>
-        </p:txBody>
-      </p:sp>
-      <p:sp>
-        <p:nvSpPr>
-          <p:cNvPr id="11" name="Shape 9"/>
-          <p:cNvSpPr/>
-          <p:nvPr/>
-        </p:nvSpPr>
-        <p:spPr>
-          <a:xfrm>
-            <a:off x="7991856" y="1691640"/>
-            <a:ext cx="3493008" cy="1463040"/>
-          </a:xfrm>
-          <a:prstGeom prst="roundRect">
-            <a:avLst>
-              <a:gd name="adj" fmla="val 5625"/>
-            </a:avLst>
-          </a:prstGeom>
-          <a:solidFill>
-            <a:srgbClr val="145043"/>
-          </a:solidFill>
-          <a:ln/>
-          <a:effectLst>
-            <a:outerShdw sx="100000" sy="100000" kx="0" ky="0" algn="bl" rotWithShape="0" blurRad="101600" dist="38100" dir="5400000">
-              <a:srgbClr val="000000">
-                <a:alpha val="35000"/>
-              </a:srgbClr>
-            </a:outerShdw>
-          </a:effectLst>
-        </p:spPr>
-      </p:sp>
-      <p:sp>
-        <p:nvSpPr>
-          <p:cNvPr id="12" name="Text 10"/>
-          <p:cNvSpPr/>
-          <p:nvPr/>
-        </p:nvSpPr>
-        <p:spPr>
-          <a:xfrm>
-            <a:off x="8083296" y="1810512"/>
-            <a:ext cx="3310128" cy="548640"/>
-          </a:xfrm>
-          <a:prstGeom prst="rect">
-            <a:avLst/>
-          </a:prstGeom>
-          <a:noFill/>
-          <a:ln/>
-        </p:spPr>
-        <p:txBody>
-          <a:bodyPr wrap="square" lIns="0" tIns="0" rIns="0" bIns="0" rtlCol="0" anchor="ctr"/>
-          <a:lstStyle/>
-          <a:p>
-            <a:pPr algn="ctr" indent="0" marL="0">
-              <a:buNone/>
-            </a:pPr>
-            <a:r>
-              <a:rPr lang="en-US" sz="2800" b="1" dirty="0">
-                <a:solidFill>
-                  <a:srgbClr val="FF826C"/>
-                </a:solidFill>
-                <a:latin typeface="Space Grotesk" pitchFamily="34" charset="0"/>
-                <a:ea typeface="Space Grotesk" pitchFamily="34" charset="-122"/>
-                <a:cs typeface="Space Grotesk" pitchFamily="34" charset="-120"/>
-              </a:rPr>
-              <a:t>0.25</a:t>
-            </a:r>
-            <a:endParaRPr lang="en-US" sz="2800" dirty="0"/>
-          </a:p>
-        </p:txBody>
-      </p:sp>
-      <p:sp>
-        <p:nvSpPr>
-          <p:cNvPr id="13" name="Text 11"/>
-          <p:cNvSpPr/>
-          <p:nvPr/>
-        </p:nvSpPr>
-        <p:spPr>
-          <a:xfrm>
-            <a:off x="8101584" y="2395728"/>
-            <a:ext cx="3273552" cy="640080"/>
-          </a:xfrm>
-          <a:prstGeom prst="rect">
-            <a:avLst/>
-          </a:prstGeom>
-          <a:noFill/>
-          <a:ln/>
-        </p:spPr>
-        <p:txBody>
-          <a:bodyPr wrap="square" lIns="0" tIns="0" rIns="0" bIns="0" rtlCol="0" anchor="ctr"/>
-          <a:lstStyle/>
-          <a:p>
-            <a:pPr algn="ctr" indent="0" marL="0">
-              <a:lnSpc>
-                <a:spcPct val="100000"/>
-              </a:lnSpc>
-              <a:buNone/>
-            </a:pPr>
-            <a:r>
-              <a:rPr lang="en-US" sz="1250" dirty="0">
-                <a:solidFill>
-                  <a:srgbClr val="9DBDB0"/>
-                </a:solidFill>
-                <a:latin typeface="Space Grotesk" pitchFamily="34" charset="0"/>
-                <a:ea typeface="Space Grotesk" pitchFamily="34" charset="-122"/>
-                <a:cs typeface="Space Grotesk" pitchFamily="34" charset="-120"/>
-              </a:rPr>
-              <a:t>pasture agreement, but</a:t>
-            </a:r>
-            <a:endParaRPr lang="en-US" sz="1250" dirty="0"/>
-          </a:p>
-          <a:p>
-            <a:pPr algn="ctr" indent="0" marL="0">
-              <a:lnSpc>
-                <a:spcPct val="100000"/>
-              </a:lnSpc>
-              <a:buNone/>
-            </a:pPr>
-            <a:r>
-              <a:rPr lang="en-US" sz="1250" dirty="0">
-                <a:solidFill>
-                  <a:srgbClr val="9DBDB0"/>
-                </a:solidFill>
-                <a:latin typeface="Space Grotesk" pitchFamily="34" charset="0"/>
-                <a:ea typeface="Space Grotesk" pitchFamily="34" charset="-122"/>
-                <a:cs typeface="Space Grotesk" pitchFamily="34" charset="-120"/>
-              </a:rPr>
-              <a:t>87% still LPIS grass</a:t>
-            </a:r>
-            <a:endParaRPr lang="en-US" sz="1250" dirty="0"/>
-          </a:p>
-        </p:txBody>
-      </p:sp>
-      <p:sp>
-        <p:nvSpPr>
-          <p:cNvPr id="14" name="Text 12"/>
-          <p:cNvSpPr/>
-          <p:nvPr/>
-        </p:nvSpPr>
-        <p:spPr>
-          <a:xfrm>
-            <a:off x="731520" y="3429000"/>
-            <a:ext cx="5486400" cy="365760"/>
-          </a:xfrm>
-          <a:prstGeom prst="rect">
-            <a:avLst/>
-          </a:prstGeom>
-          <a:noFill/>
-          <a:ln/>
-        </p:spPr>
-        <p:txBody>
-          <a:bodyPr wrap="square" lIns="0" tIns="0" rIns="0" bIns="0" rtlCol="0" anchor="ctr"/>
-          <a:lstStyle/>
-          <a:p>
-            <a:pPr indent="0" marL="0">
-              <a:buNone/>
-            </a:pPr>
-            <a:r>
-              <a:rPr lang="en-US" sz="1400" b="1" dirty="0">
-                <a:solidFill>
-                  <a:srgbClr val="CDFCE3"/>
-                </a:solidFill>
-                <a:latin typeface="Space Grotesk" pitchFamily="34" charset="0"/>
-                <a:ea typeface="Space Grotesk" pitchFamily="34" charset="-122"/>
-                <a:cs typeface="Space Grotesk" pitchFamily="34" charset="-120"/>
-              </a:rPr>
-              <a:t>Crop agreement (cereals &amp; roots)</a:t>
-            </a:r>
-            <a:endParaRPr lang="en-US" sz="1400" dirty="0"/>
-          </a:p>
-        </p:txBody>
-      </p:sp>
-      <p:graphicFrame>
-        <p:nvGraphicFramePr>
-          <p:cNvPr id="15" name="Chart 0" descr=""/>
-          <p:cNvGraphicFramePr/>
-          <p:nvPr/>
-        </p:nvGraphicFramePr>
-        <p:xfrm>
-          <a:off x="502920" y="3794760"/>
-          <a:ext cx="5760720" cy="2331720"/>
-        </p:xfrm>
-        <a:graphic xmlns:a="http://schemas.openxmlformats.org/drawingml/2006/main">
-          <a:graphicData uri="http://schemas.openxmlformats.org/drawingml/2006/chart">
-            <c:chart xmlns:c="http://schemas.openxmlformats.org/drawingml/2006/chart" r:id="rId1"/>
-          </a:graphicData>
-        </a:graphic>
-      </p:graphicFrame>
-      <p:sp>
-        <p:nvSpPr>
-          <p:cNvPr id="16" name="Shape 13"/>
-          <p:cNvSpPr/>
-          <p:nvPr/>
-        </p:nvSpPr>
-        <p:spPr>
-          <a:xfrm>
-            <a:off x="6492240" y="3794760"/>
-            <a:ext cx="4983480" cy="2331720"/>
-          </a:xfrm>
-          <a:prstGeom prst="roundRect">
-            <a:avLst>
-              <a:gd name="adj" fmla="val 3922"/>
-            </a:avLst>
-          </a:prstGeom>
-          <a:solidFill>
-            <a:srgbClr val="145043"/>
-          </a:solidFill>
-          <a:ln/>
-          <a:effectLst>
-            <a:outerShdw sx="100000" sy="100000" kx="0" ky="0" algn="bl" rotWithShape="0" blurRad="101600" dist="38100" dir="5400000">
-              <a:srgbClr val="000000">
-                <a:alpha val="35000"/>
-              </a:srgbClr>
-            </a:outerShdw>
-          </a:effectLst>
-        </p:spPr>
-      </p:sp>
-      <p:sp>
-        <p:nvSpPr>
-          <p:cNvPr id="17" name="Text 14"/>
-          <p:cNvSpPr/>
-          <p:nvPr/>
-        </p:nvSpPr>
-        <p:spPr>
-          <a:xfrm>
-            <a:off x="6720840" y="3931920"/>
-            <a:ext cx="4526280" cy="457200"/>
-          </a:xfrm>
-          <a:prstGeom prst="rect">
-            <a:avLst/>
-          </a:prstGeom>
-          <a:noFill/>
-          <a:ln/>
-        </p:spPr>
-        <p:txBody>
-          <a:bodyPr wrap="square" lIns="0" tIns="0" rIns="0" bIns="0" rtlCol="0" anchor="t"/>
-          <a:lstStyle/>
-          <a:p>
-            <a:pPr indent="0" marL="0">
-              <a:buNone/>
-            </a:pPr>
-            <a:r>
-              <a:rPr lang="en-US" sz="1700" b="1" dirty="0">
-                <a:solidFill>
-                  <a:srgbClr val="CDFCE3"/>
-                </a:solidFill>
-                <a:latin typeface="Space Grotesk" pitchFamily="34" charset="0"/>
-                <a:ea typeface="Space Grotesk" pitchFamily="34" charset="-122"/>
-                <a:cs typeface="Space Grotesk" pitchFamily="34" charset="-120"/>
-              </a:rPr>
-              <a:t>Labels are well-founded</a:t>
-            </a:r>
-            <a:endParaRPr lang="en-US" sz="1700" dirty="0"/>
-          </a:p>
-        </p:txBody>
-      </p:sp>
-      <p:sp>
-        <p:nvSpPr>
-          <p:cNvPr id="18" name="Text 15"/>
-          <p:cNvSpPr/>
-          <p:nvPr/>
-        </p:nvSpPr>
-        <p:spPr>
-          <a:xfrm>
-            <a:off x="6720840" y="4361688"/>
-            <a:ext cx="4526280" cy="1645920"/>
-          </a:xfrm>
-          <a:prstGeom prst="rect">
-            <a:avLst/>
-          </a:prstGeom>
-          <a:noFill/>
-          <a:ln/>
-        </p:spPr>
-        <p:txBody>
-          <a:bodyPr wrap="square" lIns="0" tIns="0" rIns="0" bIns="0" rtlCol="0" anchor="t"/>
-          <a:lstStyle/>
-          <a:p>
-            <a:pPr indent="0" marL="0">
-              <a:lnSpc>
-                <a:spcPct val="110000"/>
-              </a:lnSpc>
-              <a:buNone/>
-            </a:pPr>
-            <a:r>
-              <a:rPr lang="en-US" sz="1400" dirty="0">
-                <a:solidFill>
-                  <a:srgbClr val="FFFFFF"/>
-                </a:solidFill>
-                <a:latin typeface="Space Grotesk" pitchFamily="34" charset="0"/>
-                <a:ea typeface="Space Grotesk" pitchFamily="34" charset="-122"/>
-                <a:cs typeface="Space Grotesk" pitchFamily="34" charset="-120"/>
-              </a:rPr>
-              <a:t>3,496 of 4,382 LUCAS crop points fall on a year-matched LPIS parcel. Cereals and roots agree 0.69–0.91. The pasture split is a ley-vs-pasture boundary the two surveys draw differently — not an error. Year-matching is essential: crops rotate annually.</a:t>
-            </a:r>
-            <a:endParaRPr lang="en-US" sz="1400" dirty="0"/>
-          </a:p>
-        </p:txBody>
-      </p:sp>
-    </p:spTree>
-  </p:cSld>
-  <p:clrMapOvr>
-    <a:masterClrMapping/>
-  </p:clrMapOvr>
-</p:sld>
-</file>
-
 <file path=ppt/slides/slide17.xml><?xml version="1.0" encoding="utf-8"?>
 <p:sld xmlns:a="http://schemas.openxmlformats.org/drawingml/2006/main" xmlns:r="http://schemas.openxmlformats.org/officeDocument/2006/relationships" xmlns:p="http://schemas.openxmlformats.org/presentationml/2006/main">
   <p:cSld name="Slide 17">
@@ -13627,7 +15569,7 @@
                 <a:ea typeface="Space Grotesk" pitchFamily="34" charset="-122"/>
                 <a:cs typeface="Space Grotesk" pitchFamily="34" charset="-120"/>
               </a:rPr>
-              <a:t>Discussion: four takeaways</a:t>
+              <a:t>Label cross-check: LUCAS × LPIS</a:t>
             </a:r>
             <a:endParaRPr lang="en-US" sz="3200" dirty="0"/>
           </a:p>
@@ -13635,18 +15577,57 @@
       </p:sp>
       <p:sp>
         <p:nvSpPr>
-          <p:cNvPr id="4" name="Shape 2"/>
-          <p:cNvSpPr/>
-          <p:nvPr/>
-        </p:nvSpPr>
-        <p:spPr>
-          <a:xfrm>
-            <a:off x="731520" y="1463040"/>
-            <a:ext cx="5212080" cy="1965960"/>
+          <p:cNvPr id="4" name="Text 2"/>
+          <p:cNvSpPr/>
+          <p:nvPr/>
+        </p:nvSpPr>
+        <p:spPr>
+          <a:xfrm>
+            <a:off x="822960" y="1170432"/>
+            <a:ext cx="10515600" cy="457200"/>
+          </a:xfrm>
+          <a:prstGeom prst="rect">
+            <a:avLst/>
+          </a:prstGeom>
+          <a:noFill/>
+          <a:ln/>
+        </p:spPr>
+        <p:txBody>
+          <a:bodyPr wrap="square" lIns="0" tIns="0" rIns="0" bIns="0" rtlCol="0" anchor="ctr"/>
+          <a:lstStyle/>
+          <a:p>
+            <a:pPr algn="ctr" indent="0" marL="0">
+              <a:buNone/>
+            </a:pPr>
+            <a:r>
+              <a:rPr lang="en-US" sz="1400" dirty="0">
+                <a:solidFill>
+                  <a:srgbClr val="9DBDB0"/>
+                </a:solidFill>
+                <a:latin typeface="Space Grotesk" pitchFamily="34" charset="0"/>
+                <a:ea typeface="Space Grotesk" pitchFamily="34" charset="-122"/>
+                <a:cs typeface="Space Grotesk" pitchFamily="34" charset="-120"/>
+              </a:rPr>
+              <a:t>Year-matched crop truth, no model in the loop</a:t>
+            </a:r>
+            <a:endParaRPr lang="en-US" sz="1400" dirty="0"/>
+          </a:p>
+        </p:txBody>
+      </p:sp>
+      <p:sp>
+        <p:nvSpPr>
+          <p:cNvPr id="5" name="Shape 3"/>
+          <p:cNvSpPr/>
+          <p:nvPr/>
+        </p:nvSpPr>
+        <p:spPr>
+          <a:xfrm>
+            <a:off x="731520" y="1691640"/>
+            <a:ext cx="3493008" cy="1463040"/>
           </a:xfrm>
           <a:prstGeom prst="roundRect">
             <a:avLst>
-              <a:gd name="adj" fmla="val 4651"/>
+              <a:gd name="adj" fmla="val 5625"/>
             </a:avLst>
           </a:prstGeom>
           <a:solidFill>
@@ -13664,14 +15645,14 @@
       </p:sp>
       <p:sp>
         <p:nvSpPr>
-          <p:cNvPr id="5" name="Text 3"/>
-          <p:cNvSpPr/>
-          <p:nvPr/>
-        </p:nvSpPr>
-        <p:spPr>
-          <a:xfrm>
-            <a:off x="960120" y="1600200"/>
-            <a:ext cx="4754880" cy="457200"/>
+          <p:cNvPr id="6" name="Text 4"/>
+          <p:cNvSpPr/>
+          <p:nvPr/>
+        </p:nvSpPr>
+        <p:spPr>
+          <a:xfrm>
+            <a:off x="822960" y="1810512"/>
+            <a:ext cx="3310128" cy="548640"/>
           </a:xfrm>
           <a:prstGeom prst="rect">
             <a:avLst/>
@@ -13680,37 +15661,37 @@
           <a:ln/>
         </p:spPr>
         <p:txBody>
-          <a:bodyPr wrap="square" lIns="0" tIns="0" rIns="0" bIns="0" rtlCol="0" anchor="t"/>
-          <a:lstStyle/>
-          <a:p>
-            <a:pPr indent="0" marL="0">
-              <a:buNone/>
-            </a:pPr>
-            <a:r>
-              <a:rPr lang="en-US" sz="1800" b="1" dirty="0">
-                <a:solidFill>
-                  <a:srgbClr val="CDFCE3"/>
-                </a:solidFill>
-                <a:latin typeface="Space Grotesk" pitchFamily="34" charset="0"/>
-                <a:ea typeface="Space Grotesk" pitchFamily="34" charset="-122"/>
-                <a:cs typeface="Space Grotesk" pitchFamily="34" charset="-120"/>
-              </a:rPr>
-              <a:t>The TARGET was the ceiling</a:t>
-            </a:r>
-            <a:endParaRPr lang="en-US" sz="1800" dirty="0"/>
-          </a:p>
-        </p:txBody>
-      </p:sp>
-      <p:sp>
-        <p:nvSpPr>
-          <p:cNvPr id="6" name="Text 4"/>
-          <p:cNvSpPr/>
-          <p:nvPr/>
-        </p:nvSpPr>
-        <p:spPr>
-          <a:xfrm>
-            <a:off x="960120" y="2029968"/>
-            <a:ext cx="4754880" cy="1280160"/>
+          <a:bodyPr wrap="square" lIns="0" tIns="0" rIns="0" bIns="0" rtlCol="0" anchor="ctr"/>
+          <a:lstStyle/>
+          <a:p>
+            <a:pPr algn="ctr" indent="0" marL="0">
+              <a:buNone/>
+            </a:pPr>
+            <a:r>
+              <a:rPr lang="en-US" sz="2800" b="1" dirty="0">
+                <a:solidFill>
+                  <a:srgbClr val="FFFFFF"/>
+                </a:solidFill>
+                <a:latin typeface="Space Grotesk" pitchFamily="34" charset="0"/>
+                <a:ea typeface="Space Grotesk" pitchFamily="34" charset="-122"/>
+                <a:cs typeface="Space Grotesk" pitchFamily="34" charset="-120"/>
+              </a:rPr>
+              <a:t>79.8%</a:t>
+            </a:r>
+            <a:endParaRPr lang="en-US" sz="2800" dirty="0"/>
+          </a:p>
+        </p:txBody>
+      </p:sp>
+      <p:sp>
+        <p:nvSpPr>
+          <p:cNvPr id="7" name="Text 5"/>
+          <p:cNvSpPr/>
+          <p:nvPr/>
+        </p:nvSpPr>
+        <p:spPr>
+          <a:xfrm>
+            <a:off x="841248" y="2395728"/>
+            <a:ext cx="3273552" cy="640080"/>
           </a:xfrm>
           <a:prstGeom prst="rect">
             <a:avLst/>
@@ -13719,44 +15700,64 @@
           <a:ln/>
         </p:spPr>
         <p:txBody>
-          <a:bodyPr wrap="square" lIns="0" tIns="0" rIns="0" bIns="0" rtlCol="0" anchor="t"/>
-          <a:lstStyle/>
-          <a:p>
-            <a:pPr indent="0" marL="0">
+          <a:bodyPr wrap="square" lIns="0" tIns="0" rIns="0" bIns="0" rtlCol="0" anchor="ctr"/>
+          <a:lstStyle/>
+          <a:p>
+            <a:pPr algn="ctr" indent="0" marL="0">
               <a:lnSpc>
-                <a:spcPct val="110000"/>
+                <a:spcPct val="100000"/>
               </a:lnSpc>
               <a:buNone/>
             </a:pPr>
             <a:r>
-              <a:rPr lang="en-US" sz="1500" dirty="0">
-                <a:solidFill>
-                  <a:srgbClr val="FFFFFF"/>
-                </a:solidFill>
-                <a:latin typeface="Space Grotesk" pitchFamily="34" charset="0"/>
-                <a:ea typeface="Space Grotesk" pitchFamily="34" charset="-122"/>
-                <a:cs typeface="Space Grotesk" pitchFamily="34" charset="-120"/>
-              </a:rPr>
-              <a:t>Not the representation. Hard NMD labels cap accuracy near 46%; NFI supervision on the same features reaches 63.7%.</a:t>
-            </a:r>
-            <a:endParaRPr lang="en-US" sz="1500" dirty="0"/>
-          </a:p>
-        </p:txBody>
-      </p:sp>
-      <p:sp>
-        <p:nvSpPr>
-          <p:cNvPr id="7" name="Shape 5"/>
-          <p:cNvSpPr/>
-          <p:nvPr/>
-        </p:nvSpPr>
-        <p:spPr>
-          <a:xfrm>
-            <a:off x="6263640" y="1463040"/>
-            <a:ext cx="5212080" cy="1965960"/>
+              <a:rPr lang="en-US" sz="1250" dirty="0">
+                <a:solidFill>
+                  <a:srgbClr val="9DBDB0"/>
+                </a:solidFill>
+                <a:latin typeface="Space Grotesk" pitchFamily="34" charset="0"/>
+                <a:ea typeface="Space Grotesk" pitchFamily="34" charset="-122"/>
+                <a:cs typeface="Space Grotesk" pitchFamily="34" charset="-120"/>
+              </a:rPr>
+              <a:t>LUCAS crop points on a</a:t>
+            </a:r>
+            <a:endParaRPr lang="en-US" sz="1250" dirty="0"/>
+          </a:p>
+          <a:p>
+            <a:pPr algn="ctr" indent="0" marL="0">
+              <a:lnSpc>
+                <a:spcPct val="100000"/>
+              </a:lnSpc>
+              <a:buNone/>
+            </a:pPr>
+            <a:r>
+              <a:rPr lang="en-US" sz="1250" dirty="0">
+                <a:solidFill>
+                  <a:srgbClr val="9DBDB0"/>
+                </a:solidFill>
+                <a:latin typeface="Space Grotesk" pitchFamily="34" charset="0"/>
+                <a:ea typeface="Space Grotesk" pitchFamily="34" charset="-122"/>
+                <a:cs typeface="Space Grotesk" pitchFamily="34" charset="-120"/>
+              </a:rPr>
+              <a:t>year-matched LPIS parcel</a:t>
+            </a:r>
+            <a:endParaRPr lang="en-US" sz="1250" dirty="0"/>
+          </a:p>
+        </p:txBody>
+      </p:sp>
+      <p:sp>
+        <p:nvSpPr>
+          <p:cNvPr id="8" name="Shape 6"/>
+          <p:cNvSpPr/>
+          <p:nvPr/>
+        </p:nvSpPr>
+        <p:spPr>
+          <a:xfrm>
+            <a:off x="4361688" y="1691640"/>
+            <a:ext cx="3493008" cy="1463040"/>
           </a:xfrm>
           <a:prstGeom prst="roundRect">
             <a:avLst>
-              <a:gd name="adj" fmla="val 4651"/>
+              <a:gd name="adj" fmla="val 5625"/>
             </a:avLst>
           </a:prstGeom>
           <a:solidFill>
@@ -13774,14 +15775,14 @@
       </p:sp>
       <p:sp>
         <p:nvSpPr>
-          <p:cNvPr id="8" name="Text 6"/>
-          <p:cNvSpPr/>
-          <p:nvPr/>
-        </p:nvSpPr>
-        <p:spPr>
-          <a:xfrm>
-            <a:off x="6492240" y="1600200"/>
-            <a:ext cx="4754880" cy="457200"/>
+          <p:cNvPr id="9" name="Text 7"/>
+          <p:cNvSpPr/>
+          <p:nvPr/>
+        </p:nvSpPr>
+        <p:spPr>
+          <a:xfrm>
+            <a:off x="4453128" y="1810512"/>
+            <a:ext cx="3310128" cy="548640"/>
           </a:xfrm>
           <a:prstGeom prst="rect">
             <a:avLst/>
@@ -13790,14 +15791,14 @@
           <a:ln/>
         </p:spPr>
         <p:txBody>
-          <a:bodyPr wrap="square" lIns="0" tIns="0" rIns="0" bIns="0" rtlCol="0" anchor="t"/>
-          <a:lstStyle/>
-          <a:p>
-            <a:pPr indent="0" marL="0">
-              <a:buNone/>
-            </a:pPr>
-            <a:r>
-              <a:rPr lang="en-US" sz="1800" b="1" dirty="0">
+          <a:bodyPr wrap="square" lIns="0" tIns="0" rIns="0" bIns="0" rtlCol="0" anchor="ctr"/>
+          <a:lstStyle/>
+          <a:p>
+            <a:pPr algn="ctr" indent="0" marL="0">
+              <a:buNone/>
+            </a:pPr>
+            <a:r>
+              <a:rPr lang="en-US" sz="2800" b="1" dirty="0">
                 <a:solidFill>
                   <a:srgbClr val="CDFCE3"/>
                 </a:solidFill>
@@ -13805,22 +15806,22 @@
                 <a:ea typeface="Space Grotesk" pitchFamily="34" charset="-122"/>
                 <a:cs typeface="Space Grotesk" pitchFamily="34" charset="-120"/>
               </a:rPr>
-              <a:t>Representation is cheap</a:t>
-            </a:r>
-            <a:endParaRPr lang="en-US" sz="1800" dirty="0"/>
-          </a:p>
-        </p:txBody>
-      </p:sp>
-      <p:sp>
-        <p:nvSpPr>
-          <p:cNvPr id="9" name="Text 7"/>
-          <p:cNvSpPr/>
-          <p:nvPr/>
-        </p:nvSpPr>
-        <p:spPr>
-          <a:xfrm>
-            <a:off x="6492240" y="2029968"/>
-            <a:ext cx="4754880" cy="1280160"/>
+              <a:t>0.81</a:t>
+            </a:r>
+            <a:endParaRPr lang="en-US" sz="2800" dirty="0"/>
+          </a:p>
+        </p:txBody>
+      </p:sp>
+      <p:sp>
+        <p:nvSpPr>
+          <p:cNvPr id="10" name="Text 8"/>
+          <p:cNvSpPr/>
+          <p:nvPr/>
+        </p:nvSpPr>
+        <p:spPr>
+          <a:xfrm>
+            <a:off x="4471416" y="2395728"/>
+            <a:ext cx="3273552" cy="640080"/>
           </a:xfrm>
           <a:prstGeom prst="rect">
             <a:avLst/>
@@ -13829,44 +15830,64 @@
           <a:ln/>
         </p:spPr>
         <p:txBody>
-          <a:bodyPr wrap="square" lIns="0" tIns="0" rIns="0" bIns="0" rtlCol="0" anchor="t"/>
-          <a:lstStyle/>
-          <a:p>
-            <a:pPr indent="0" marL="0">
+          <a:bodyPr wrap="square" lIns="0" tIns="0" rIns="0" bIns="0" rtlCol="0" anchor="ctr"/>
+          <a:lstStyle/>
+          <a:p>
+            <a:pPr algn="ctr" indent="0" marL="0">
               <a:lnSpc>
-                <a:spcPct val="110000"/>
+                <a:spcPct val="100000"/>
               </a:lnSpc>
               <a:buNone/>
             </a:pPr>
             <a:r>
-              <a:rPr lang="en-US" sz="1500" dirty="0">
-                <a:solidFill>
-                  <a:srgbClr val="FFFFFF"/>
-                </a:solidFill>
-                <a:latin typeface="Space Grotesk" pitchFamily="34" charset="0"/>
-                <a:ea typeface="Space Grotesk" pitchFamily="34" charset="-122"/>
-                <a:cs typeface="Space Grotesk" pitchFamily="34" charset="-120"/>
-              </a:rPr>
-              <a:t>Tessera's frozen embeddings tie the 600M Prithvi (p = 0.88). A large encoder buys no accuracy here.</a:t>
-            </a:r>
-            <a:endParaRPr lang="en-US" sz="1500" dirty="0"/>
-          </a:p>
-        </p:txBody>
-      </p:sp>
-      <p:sp>
-        <p:nvSpPr>
-          <p:cNvPr id="10" name="Shape 8"/>
-          <p:cNvSpPr/>
-          <p:nvPr/>
-        </p:nvSpPr>
-        <p:spPr>
-          <a:xfrm>
-            <a:off x="731520" y="3657600"/>
-            <a:ext cx="5212080" cy="1965960"/>
+              <a:rPr lang="en-US" sz="1250" dirty="0">
+                <a:solidFill>
+                  <a:srgbClr val="9DBDB0"/>
+                </a:solidFill>
+                <a:latin typeface="Space Grotesk" pitchFamily="34" charset="0"/>
+                <a:ea typeface="Space Grotesk" pitchFamily="34" charset="-122"/>
+                <a:cs typeface="Space Grotesk" pitchFamily="34" charset="-120"/>
+              </a:rPr>
+              <a:t>agreement excluding</a:t>
+            </a:r>
+            <a:endParaRPr lang="en-US" sz="1250" dirty="0"/>
+          </a:p>
+          <a:p>
+            <a:pPr algn="ctr" indent="0" marL="0">
+              <a:lnSpc>
+                <a:spcPct val="100000"/>
+              </a:lnSpc>
+              <a:buNone/>
+            </a:pPr>
+            <a:r>
+              <a:rPr lang="en-US" sz="1250" dirty="0">
+                <a:solidFill>
+                  <a:srgbClr val="9DBDB0"/>
+                </a:solidFill>
+                <a:latin typeface="Space Grotesk" pitchFamily="34" charset="0"/>
+                <a:ea typeface="Space Grotesk" pitchFamily="34" charset="-122"/>
+                <a:cs typeface="Space Grotesk" pitchFamily="34" charset="-120"/>
+              </a:rPr>
+              <a:t>pasture</a:t>
+            </a:r>
+            <a:endParaRPr lang="en-US" sz="1250" dirty="0"/>
+          </a:p>
+        </p:txBody>
+      </p:sp>
+      <p:sp>
+        <p:nvSpPr>
+          <p:cNvPr id="11" name="Shape 9"/>
+          <p:cNvSpPr/>
+          <p:nvPr/>
+        </p:nvSpPr>
+        <p:spPr>
+          <a:xfrm>
+            <a:off x="7991856" y="1691640"/>
+            <a:ext cx="3493008" cy="1463040"/>
           </a:xfrm>
           <a:prstGeom prst="roundRect">
             <a:avLst>
-              <a:gd name="adj" fmla="val 4651"/>
+              <a:gd name="adj" fmla="val 5625"/>
             </a:avLst>
           </a:prstGeom>
           <a:solidFill>
@@ -13884,14 +15905,14 @@
       </p:sp>
       <p:sp>
         <p:nvSpPr>
-          <p:cNvPr id="11" name="Text 9"/>
-          <p:cNvSpPr/>
-          <p:nvPr/>
-        </p:nvSpPr>
-        <p:spPr>
-          <a:xfrm>
-            <a:off x="960120" y="3794760"/>
-            <a:ext cx="4754880" cy="457200"/>
+          <p:cNvPr id="12" name="Text 10"/>
+          <p:cNvSpPr/>
+          <p:nvPr/>
+        </p:nvSpPr>
+        <p:spPr>
+          <a:xfrm>
+            <a:off x="8083296" y="1810512"/>
+            <a:ext cx="3310128" cy="548640"/>
           </a:xfrm>
           <a:prstGeom prst="rect">
             <a:avLst/>
@@ -13900,83 +15921,158 @@
           <a:ln/>
         </p:spPr>
         <p:txBody>
-          <a:bodyPr wrap="square" lIns="0" tIns="0" rIns="0" bIns="0" rtlCol="0" anchor="t"/>
+          <a:bodyPr wrap="square" lIns="0" tIns="0" rIns="0" bIns="0" rtlCol="0" anchor="ctr"/>
+          <a:lstStyle/>
+          <a:p>
+            <a:pPr algn="ctr" indent="0" marL="0">
+              <a:buNone/>
+            </a:pPr>
+            <a:r>
+              <a:rPr lang="en-US" sz="2800" b="1" dirty="0">
+                <a:solidFill>
+                  <a:srgbClr val="FF826C"/>
+                </a:solidFill>
+                <a:latin typeface="Space Grotesk" pitchFamily="34" charset="0"/>
+                <a:ea typeface="Space Grotesk" pitchFamily="34" charset="-122"/>
+                <a:cs typeface="Space Grotesk" pitchFamily="34" charset="-120"/>
+              </a:rPr>
+              <a:t>0.25</a:t>
+            </a:r>
+            <a:endParaRPr lang="en-US" sz="2800" dirty="0"/>
+          </a:p>
+        </p:txBody>
+      </p:sp>
+      <p:sp>
+        <p:nvSpPr>
+          <p:cNvPr id="13" name="Text 11"/>
+          <p:cNvSpPr/>
+          <p:nvPr/>
+        </p:nvSpPr>
+        <p:spPr>
+          <a:xfrm>
+            <a:off x="8101584" y="2395728"/>
+            <a:ext cx="3273552" cy="640080"/>
+          </a:xfrm>
+          <a:prstGeom prst="rect">
+            <a:avLst/>
+          </a:prstGeom>
+          <a:noFill/>
+          <a:ln/>
+        </p:spPr>
+        <p:txBody>
+          <a:bodyPr wrap="square" lIns="0" tIns="0" rIns="0" bIns="0" rtlCol="0" anchor="ctr"/>
+          <a:lstStyle/>
+          <a:p>
+            <a:pPr algn="ctr" indent="0" marL="0">
+              <a:lnSpc>
+                <a:spcPct val="100000"/>
+              </a:lnSpc>
+              <a:buNone/>
+            </a:pPr>
+            <a:r>
+              <a:rPr lang="en-US" sz="1250" dirty="0">
+                <a:solidFill>
+                  <a:srgbClr val="9DBDB0"/>
+                </a:solidFill>
+                <a:latin typeface="Space Grotesk" pitchFamily="34" charset="0"/>
+                <a:ea typeface="Space Grotesk" pitchFamily="34" charset="-122"/>
+                <a:cs typeface="Space Grotesk" pitchFamily="34" charset="-120"/>
+              </a:rPr>
+              <a:t>pasture agreement, but</a:t>
+            </a:r>
+            <a:endParaRPr lang="en-US" sz="1250" dirty="0"/>
+          </a:p>
+          <a:p>
+            <a:pPr algn="ctr" indent="0" marL="0">
+              <a:lnSpc>
+                <a:spcPct val="100000"/>
+              </a:lnSpc>
+              <a:buNone/>
+            </a:pPr>
+            <a:r>
+              <a:rPr lang="en-US" sz="1250" dirty="0">
+                <a:solidFill>
+                  <a:srgbClr val="9DBDB0"/>
+                </a:solidFill>
+                <a:latin typeface="Space Grotesk" pitchFamily="34" charset="0"/>
+                <a:ea typeface="Space Grotesk" pitchFamily="34" charset="-122"/>
+                <a:cs typeface="Space Grotesk" pitchFamily="34" charset="-120"/>
+              </a:rPr>
+              <a:t>87% still LPIS grass</a:t>
+            </a:r>
+            <a:endParaRPr lang="en-US" sz="1250" dirty="0"/>
+          </a:p>
+        </p:txBody>
+      </p:sp>
+      <p:sp>
+        <p:nvSpPr>
+          <p:cNvPr id="14" name="Text 12"/>
+          <p:cNvSpPr/>
+          <p:nvPr/>
+        </p:nvSpPr>
+        <p:spPr>
+          <a:xfrm>
+            <a:off x="731520" y="3429000"/>
+            <a:ext cx="5486400" cy="365760"/>
+          </a:xfrm>
+          <a:prstGeom prst="rect">
+            <a:avLst/>
+          </a:prstGeom>
+          <a:noFill/>
+          <a:ln/>
+        </p:spPr>
+        <p:txBody>
+          <a:bodyPr wrap="square" lIns="0" tIns="0" rIns="0" bIns="0" rtlCol="0" anchor="ctr"/>
           <a:lstStyle/>
           <a:p>
             <a:pPr indent="0" marL="0">
               <a:buNone/>
             </a:pPr>
             <a:r>
-              <a:rPr lang="en-US" sz="1800" b="1" dirty="0">
-                <a:solidFill>
-                  <a:srgbClr val="FF826C"/>
-                </a:solidFill>
-                <a:latin typeface="Space Grotesk" pitchFamily="34" charset="0"/>
-                <a:ea typeface="Space Grotesk" pitchFamily="34" charset="-122"/>
-                <a:cs typeface="Space Grotesk" pitchFamily="34" charset="-120"/>
-              </a:rPr>
-              <a:t>Ensembling doesn't pay</a:t>
-            </a:r>
-            <a:endParaRPr lang="en-US" sz="1800" dirty="0"/>
-          </a:p>
-        </p:txBody>
-      </p:sp>
-      <p:sp>
-        <p:nvSpPr>
-          <p:cNvPr id="12" name="Text 10"/>
-          <p:cNvSpPr/>
-          <p:nvPr/>
-        </p:nvSpPr>
-        <p:spPr>
-          <a:xfrm>
-            <a:off x="960120" y="4224528"/>
-            <a:ext cx="4754880" cy="1280160"/>
-          </a:xfrm>
-          <a:prstGeom prst="rect">
-            <a:avLst/>
-          </a:prstGeom>
-          <a:noFill/>
-          <a:ln/>
-        </p:spPr>
-        <p:txBody>
-          <a:bodyPr wrap="square" lIns="0" tIns="0" rIns="0" bIns="0" rtlCol="0" anchor="t"/>
-          <a:lstStyle/>
-          <a:p>
-            <a:pPr indent="0" marL="0">
-              <a:lnSpc>
-                <a:spcPct val="110000"/>
-              </a:lnSpc>
-              <a:buNone/>
-            </a:pPr>
-            <a:r>
-              <a:rPr lang="en-US" sz="1500" dirty="0">
-                <a:solidFill>
-                  <a:srgbClr val="FFFFFF"/>
-                </a:solidFill>
-                <a:latin typeface="Space Grotesk" pitchFamily="34" charset="0"/>
-                <a:ea typeface="Space Grotesk" pitchFamily="34" charset="-122"/>
-                <a:cs typeface="Space Grotesk" pitchFamily="34" charset="-120"/>
-              </a:rPr>
-              <a:t>Members are correlated: the stacked combiner is within noise (p = 0.37), and encoder diversity added &lt; 0.03.</a:t>
-            </a:r>
-            <a:endParaRPr lang="en-US" sz="1500" dirty="0"/>
-          </a:p>
-        </p:txBody>
-      </p:sp>
-      <p:sp>
-        <p:nvSpPr>
-          <p:cNvPr id="13" name="Shape 11"/>
-          <p:cNvSpPr/>
-          <p:nvPr/>
-        </p:nvSpPr>
-        <p:spPr>
-          <a:xfrm>
-            <a:off x="6263640" y="3657600"/>
-            <a:ext cx="5212080" cy="1965960"/>
+              <a:rPr lang="en-US" sz="1400" b="1" dirty="0">
+                <a:solidFill>
+                  <a:srgbClr val="CDFCE3"/>
+                </a:solidFill>
+                <a:latin typeface="Space Grotesk" pitchFamily="34" charset="0"/>
+                <a:ea typeface="Space Grotesk" pitchFamily="34" charset="-122"/>
+                <a:cs typeface="Space Grotesk" pitchFamily="34" charset="-120"/>
+              </a:rPr>
+              <a:t>Crop agreement (cereals &amp; roots)</a:t>
+            </a:r>
+            <a:endParaRPr lang="en-US" sz="1400" dirty="0"/>
+          </a:p>
+        </p:txBody>
+      </p:sp>
+      <p:graphicFrame>
+        <p:nvGraphicFramePr>
+          <p:cNvPr id="15" name="Chart 0" descr=""/>
+          <p:cNvGraphicFramePr/>
+          <p:nvPr/>
+        </p:nvGraphicFramePr>
+        <p:xfrm>
+          <a:off x="502920" y="3794760"/>
+          <a:ext cx="5760720" cy="2331720"/>
+        </p:xfrm>
+        <a:graphic xmlns:a="http://schemas.openxmlformats.org/drawingml/2006/main">
+          <a:graphicData uri="http://schemas.openxmlformats.org/drawingml/2006/chart">
+            <c:chart xmlns:c="http://schemas.openxmlformats.org/drawingml/2006/chart" r:id="rId1"/>
+          </a:graphicData>
+        </a:graphic>
+      </p:graphicFrame>
+      <p:sp>
+        <p:nvSpPr>
+          <p:cNvPr id="16" name="Shape 13"/>
+          <p:cNvSpPr/>
+          <p:nvPr/>
+        </p:nvSpPr>
+        <p:spPr>
+          <a:xfrm>
+            <a:off x="6492240" y="3794760"/>
+            <a:ext cx="4983480" cy="2331720"/>
           </a:xfrm>
           <a:prstGeom prst="roundRect">
             <a:avLst>
-              <a:gd name="adj" fmla="val 4651"/>
+              <a:gd name="adj" fmla="val 3922"/>
             </a:avLst>
           </a:prstGeom>
           <a:solidFill>
@@ -13994,14 +16090,14 @@
       </p:sp>
       <p:sp>
         <p:nvSpPr>
-          <p:cNvPr id="14" name="Text 12"/>
-          <p:cNvSpPr/>
-          <p:nvPr/>
-        </p:nvSpPr>
-        <p:spPr>
-          <a:xfrm>
-            <a:off x="6492240" y="3794760"/>
-            <a:ext cx="4754880" cy="457200"/>
+          <p:cNvPr id="17" name="Text 14"/>
+          <p:cNvSpPr/>
+          <p:nvPr/>
+        </p:nvSpPr>
+        <p:spPr>
+          <a:xfrm>
+            <a:off x="6720840" y="3931920"/>
+            <a:ext cx="4526280" cy="457200"/>
           </a:xfrm>
           <a:prstGeom prst="rect">
             <a:avLst/>
@@ -14017,30 +16113,30 @@
               <a:buNone/>
             </a:pPr>
             <a:r>
-              <a:rPr lang="en-US" sz="1800" b="1" dirty="0">
-                <a:solidFill>
-                  <a:srgbClr val="FF826C"/>
-                </a:solidFill>
-                <a:latin typeface="Space Grotesk" pitchFamily="34" charset="0"/>
-                <a:ea typeface="Space Grotesk" pitchFamily="34" charset="-122"/>
-                <a:cs typeface="Space Grotesk" pitchFamily="34" charset="-120"/>
-              </a:rPr>
-              <a:t>Hard classes are shared</a:t>
-            </a:r>
-            <a:endParaRPr lang="en-US" sz="1800" dirty="0"/>
-          </a:p>
-        </p:txBody>
-      </p:sp>
-      <p:sp>
-        <p:nvSpPr>
-          <p:cNvPr id="15" name="Text 13"/>
-          <p:cNvSpPr/>
-          <p:nvPr/>
-        </p:nvSpPr>
-        <p:spPr>
-          <a:xfrm>
-            <a:off x="6492240" y="4224528"/>
-            <a:ext cx="4754880" cy="1280160"/>
+              <a:rPr lang="en-US" sz="1700" b="1" dirty="0">
+                <a:solidFill>
+                  <a:srgbClr val="CDFCE3"/>
+                </a:solidFill>
+                <a:latin typeface="Space Grotesk" pitchFamily="34" charset="0"/>
+                <a:ea typeface="Space Grotesk" pitchFamily="34" charset="-122"/>
+                <a:cs typeface="Space Grotesk" pitchFamily="34" charset="-120"/>
+              </a:rPr>
+              <a:t>Labels are well-founded</a:t>
+            </a:r>
+            <a:endParaRPr lang="en-US" sz="1700" dirty="0"/>
+          </a:p>
+        </p:txBody>
+      </p:sp>
+      <p:sp>
+        <p:nvSpPr>
+          <p:cNvPr id="18" name="Text 15"/>
+          <p:cNvSpPr/>
+          <p:nvPr/>
+        </p:nvSpPr>
+        <p:spPr>
+          <a:xfrm>
+            <a:off x="6720840" y="4361688"/>
+            <a:ext cx="4526280" cy="1645920"/>
           </a:xfrm>
           <a:prstGeom prst="rect">
             <a:avLst/>
@@ -14059,7 +16155,7 @@
               <a:buNone/>
             </a:pPr>
             <a:r>
-              <a:rPr lang="en-US" sz="1500" dirty="0">
+              <a:rPr lang="en-US" sz="1400" dirty="0">
                 <a:solidFill>
                   <a:srgbClr val="FFFFFF"/>
                 </a:solidFill>
@@ -14067,9 +16163,9 @@
                 <a:ea typeface="Space Grotesk" pitchFamily="34" charset="-122"/>
                 <a:cs typeface="Space Grotesk" pitchFamily="34" charset="-120"/>
               </a:rPr>
-              <a:t>Spruce and open/shrub are weak across every backbone and every truth source — a data limit, not a model flaw.</a:t>
-            </a:r>
-            <a:endParaRPr lang="en-US" sz="1500" dirty="0"/>
+              <a:t>3,496 of 4,382 LUCAS crop points fall on a year-matched LPIS parcel. Cereals and roots agree 0.69–0.91. The pasture split is a ley-vs-pasture boundary the two surveys draw differently — not an error. Year-matching is essential: crops rotate annually.</a:t>
+            </a:r>
+            <a:endParaRPr lang="en-US" sz="1400" dirty="0"/>
           </a:p>
         </p:txBody>
       </p:sp>
@@ -14191,7 +16287,7 @@
                 <a:ea typeface="Space Grotesk" pitchFamily="34" charset="-122"/>
                 <a:cs typeface="Space Grotesk" pitchFamily="34" charset="-120"/>
               </a:rPr>
-              <a:t>Limitations</a:t>
+              <a:t>Discussion: four takeaways</a:t>
             </a:r>
             <a:endParaRPr lang="en-US" sz="3200" dirty="0"/>
           </a:p>
@@ -14199,160 +16295,18 @@
       </p:sp>
       <p:sp>
         <p:nvSpPr>
-          <p:cNvPr id="4" name="Text 2"/>
-          <p:cNvSpPr/>
-          <p:nvPr/>
-        </p:nvSpPr>
-        <p:spPr>
-          <a:xfrm>
-            <a:off x="731520" y="1417320"/>
-            <a:ext cx="6492240" cy="4114800"/>
-          </a:xfrm>
-          <a:prstGeom prst="rect">
-            <a:avLst/>
-          </a:prstGeom>
-          <a:noFill/>
-          <a:ln/>
-        </p:spPr>
-        <p:txBody>
-          <a:bodyPr wrap="square" lIns="0" tIns="0" rIns="0" bIns="0" rtlCol="0" anchor="t"/>
-          <a:lstStyle/>
-          <a:p>
-            <a:pPr marL="177800" indent="-177800">
-              <a:lnSpc>
-                <a:spcPct val="115000"/>
-              </a:lnSpc>
-              <a:spcAft>
-                <a:spcPts val="800"/>
-              </a:spcAft>
-              <a:buSzPct val="100000"/>
-              <a:buChar char="•"/>
-            </a:pPr>
-            <a:r>
-              <a:rPr lang="en-US" sz="1500" dirty="0">
-                <a:solidFill>
-                  <a:srgbClr val="FFFFFF"/>
-                </a:solidFill>
-                <a:latin typeface="Space Grotesk" pitchFamily="34" charset="0"/>
-                <a:ea typeface="Space Grotesk" pitchFamily="34" charset="-122"/>
-                <a:cs typeface="Space Grotesk" pitchFamily="34" charset="-120"/>
-              </a:rPr>
-              <a:t>Thin held-out set: 209 plots limits statistical power — several head-to-head gaps sit within noise.</a:t>
-            </a:r>
-            <a:endParaRPr lang="en-US" sz="1500" dirty="0"/>
-          </a:p>
-          <a:p>
-            <a:pPr marL="177800" indent="-177800">
-              <a:lnSpc>
-                <a:spcPct val="115000"/>
-              </a:lnSpc>
-              <a:spcAft>
-                <a:spcPts val="800"/>
-              </a:spcAft>
-              <a:buSzPct val="100000"/>
-              <a:buChar char="•"/>
-            </a:pPr>
-            <a:r>
-              <a:rPr lang="en-US" sz="1500" dirty="0">
-                <a:solidFill>
-                  <a:srgbClr val="FFFFFF"/>
-                </a:solidFill>
-                <a:latin typeface="Space Grotesk" pitchFamily="34" charset="0"/>
-                <a:ea typeface="Space Grotesk" pitchFamily="34" charset="-122"/>
-                <a:cs typeface="Space Grotesk" pitchFamily="34" charset="-120"/>
-              </a:rPr>
-              <a:t>Spruce accuracy (~0.53–0.55) is the persistent weak axis across both backbones and both truth sources.</a:t>
-            </a:r>
-            <a:endParaRPr lang="en-US" sz="1500" dirty="0"/>
-          </a:p>
-          <a:p>
-            <a:pPr marL="177800" indent="-177800">
-              <a:lnSpc>
-                <a:spcPct val="115000"/>
-              </a:lnSpc>
-              <a:spcAft>
-                <a:spcPts val="800"/>
-              </a:spcAft>
-              <a:buSzPct val="100000"/>
-              <a:buChar char="•"/>
-            </a:pPr>
-            <a:r>
-              <a:rPr lang="en-US" sz="1500" dirty="0">
-                <a:solidFill>
-                  <a:srgbClr val="FFFFFF"/>
-                </a:solidFill>
-                <a:latin typeface="Space Grotesk" pitchFamily="34" charset="0"/>
-                <a:ea typeface="Space Grotesk" pitchFamily="34" charset="-122"/>
-                <a:cs typeface="Space Grotesk" pitchFamily="34" charset="-120"/>
-              </a:rPr>
-              <a:t>Crop classes are year-sensitive: labels and spectra must be matched to the same year, since crops rotate.</a:t>
-            </a:r>
-            <a:endParaRPr lang="en-US" sz="1500" dirty="0"/>
-          </a:p>
-          <a:p>
-            <a:pPr marL="177800" indent="-177800">
-              <a:lnSpc>
-                <a:spcPct val="115000"/>
-              </a:lnSpc>
-              <a:spcAft>
-                <a:spcPts val="800"/>
-              </a:spcAft>
-              <a:buSzPct val="100000"/>
-              <a:buChar char="•"/>
-            </a:pPr>
-            <a:r>
-              <a:rPr lang="en-US" sz="1500" dirty="0">
-                <a:solidFill>
-                  <a:srgbClr val="FFFFFF"/>
-                </a:solidFill>
-                <a:latin typeface="Space Grotesk" pitchFamily="34" charset="0"/>
-                <a:ea typeface="Space Grotesk" pitchFamily="34" charset="-122"/>
-                <a:cs typeface="Space Grotesk" pitchFamily="34" charset="-120"/>
-              </a:rPr>
-              <a:t>Ley-vs-pasture grass classes are not cleanly separable across truth sources — a boundary, not an error.</a:t>
-            </a:r>
-            <a:endParaRPr lang="en-US" sz="1500" dirty="0"/>
-          </a:p>
-          <a:p>
-            <a:pPr marL="177800" indent="-177800">
-              <a:lnSpc>
-                <a:spcPct val="115000"/>
-              </a:lnSpc>
-              <a:spcAft>
-                <a:spcPts val="800"/>
-              </a:spcAft>
-              <a:buSzPct val="100000"/>
-              <a:buChar char="•"/>
-            </a:pPr>
-            <a:r>
-              <a:rPr lang="en-US" sz="1500" dirty="0">
-                <a:solidFill>
-                  <a:srgbClr val="FFFFFF"/>
-                </a:solidFill>
-                <a:latin typeface="Space Grotesk" pitchFamily="34" charset="0"/>
-                <a:ea typeface="Space Grotesk" pitchFamily="34" charset="-122"/>
-                <a:cs typeface="Space Grotesk" pitchFamily="34" charset="-120"/>
-              </a:rPr>
-              <a:t>LUCAS coverage: only ~29% of crop points fall on a year-matched LPIS parcel, bounding that cross-check.</a:t>
-            </a:r>
-            <a:endParaRPr lang="en-US" sz="1500" dirty="0"/>
-          </a:p>
-        </p:txBody>
-      </p:sp>
-      <p:sp>
-        <p:nvSpPr>
-          <p:cNvPr id="5" name="Shape 3"/>
-          <p:cNvSpPr/>
-          <p:nvPr/>
-        </p:nvSpPr>
-        <p:spPr>
-          <a:xfrm>
-            <a:off x="7498080" y="1417320"/>
-            <a:ext cx="3977640" cy="4434840"/>
+          <p:cNvPr id="4" name="Shape 2"/>
+          <p:cNvSpPr/>
+          <p:nvPr/>
+        </p:nvSpPr>
+        <p:spPr>
+          <a:xfrm>
+            <a:off x="731520" y="1463040"/>
+            <a:ext cx="5212080" cy="1965960"/>
           </a:xfrm>
           <a:prstGeom prst="roundRect">
             <a:avLst>
-              <a:gd name="adj" fmla="val 2299"/>
+              <a:gd name="adj" fmla="val 4651"/>
             </a:avLst>
           </a:prstGeom>
           <a:solidFill>
@@ -14370,53 +16324,53 @@
       </p:sp>
       <p:sp>
         <p:nvSpPr>
+          <p:cNvPr id="5" name="Text 3"/>
+          <p:cNvSpPr/>
+          <p:nvPr/>
+        </p:nvSpPr>
+        <p:spPr>
+          <a:xfrm>
+            <a:off x="960120" y="1600200"/>
+            <a:ext cx="4754880" cy="457200"/>
+          </a:xfrm>
+          <a:prstGeom prst="rect">
+            <a:avLst/>
+          </a:prstGeom>
+          <a:noFill/>
+          <a:ln/>
+        </p:spPr>
+        <p:txBody>
+          <a:bodyPr wrap="square" lIns="0" tIns="0" rIns="0" bIns="0" rtlCol="0" anchor="t"/>
+          <a:lstStyle/>
+          <a:p>
+            <a:pPr indent="0" marL="0">
+              <a:buNone/>
+            </a:pPr>
+            <a:r>
+              <a:rPr lang="en-US" sz="1800" b="1" dirty="0">
+                <a:solidFill>
+                  <a:srgbClr val="CDFCE3"/>
+                </a:solidFill>
+                <a:latin typeface="Space Grotesk" pitchFamily="34" charset="0"/>
+                <a:ea typeface="Space Grotesk" pitchFamily="34" charset="-122"/>
+                <a:cs typeface="Space Grotesk" pitchFamily="34" charset="-120"/>
+              </a:rPr>
+              <a:t>The TARGET was the ceiling</a:t>
+            </a:r>
+            <a:endParaRPr lang="en-US" sz="1800" dirty="0"/>
+          </a:p>
+        </p:txBody>
+      </p:sp>
+      <p:sp>
+        <p:nvSpPr>
           <p:cNvPr id="6" name="Text 4"/>
           <p:cNvSpPr/>
           <p:nvPr/>
         </p:nvSpPr>
         <p:spPr>
           <a:xfrm>
-            <a:off x="7726680" y="1554480"/>
-            <a:ext cx="3520440" cy="457200"/>
-          </a:xfrm>
-          <a:prstGeom prst="rect">
-            <a:avLst/>
-          </a:prstGeom>
-          <a:noFill/>
-          <a:ln/>
-        </p:spPr>
-        <p:txBody>
-          <a:bodyPr wrap="square" lIns="0" tIns="0" rIns="0" bIns="0" rtlCol="0" anchor="t"/>
-          <a:lstStyle/>
-          <a:p>
-            <a:pPr indent="0" marL="0">
-              <a:buNone/>
-            </a:pPr>
-            <a:r>
-              <a:rPr lang="en-US" sz="1800" b="1" dirty="0">
-                <a:solidFill>
-                  <a:srgbClr val="CDFCE3"/>
-                </a:solidFill>
-                <a:latin typeface="Space Grotesk" pitchFamily="34" charset="0"/>
-                <a:ea typeface="Space Grotesk" pitchFamily="34" charset="-122"/>
-                <a:cs typeface="Space Grotesk" pitchFamily="34" charset="-120"/>
-              </a:rPr>
-              <a:t>What would move the needle</a:t>
-            </a:r>
-            <a:endParaRPr lang="en-US" sz="1800" dirty="0"/>
-          </a:p>
-        </p:txBody>
-      </p:sp>
-      <p:sp>
-        <p:nvSpPr>
-          <p:cNvPr id="7" name="Text 5"/>
-          <p:cNvSpPr/>
-          <p:nvPr/>
-        </p:nvSpPr>
-        <p:spPr>
-          <a:xfrm>
-            <a:off x="7726680" y="1984248"/>
-            <a:ext cx="3520440" cy="3749040"/>
+            <a:off x="960120" y="2029968"/>
+            <a:ext cx="4754880" cy="1280160"/>
           </a:xfrm>
           <a:prstGeom prst="rect">
             <a:avLst/>
@@ -14435,7 +16389,7 @@
               <a:buNone/>
             </a:pPr>
             <a:r>
-              <a:rPr lang="en-US" sz="1350" dirty="0">
+              <a:rPr lang="en-US" sz="1500" dirty="0">
                 <a:solidFill>
                   <a:srgbClr val="FFFFFF"/>
                 </a:solidFill>
@@ -14443,10 +16397,100 @@
                 <a:ea typeface="Space Grotesk" pitchFamily="34" charset="-122"/>
                 <a:cs typeface="Space Grotesk" pitchFamily="34" charset="-120"/>
               </a:rPr>
-              <a:t>More field plots — especially spruce-dominated stands — would tighten every confidence interval and is the single highest-leverage next step.</a:t>
-            </a:r>
-            <a:endParaRPr lang="en-US" sz="1350" dirty="0"/>
-          </a:p>
+              <a:t>Not the representation. Hard NMD labels cap accuracy near 46%; NFI supervision on the same features reaches 63.7%.</a:t>
+            </a:r>
+            <a:endParaRPr lang="en-US" sz="1500" dirty="0"/>
+          </a:p>
+        </p:txBody>
+      </p:sp>
+      <p:sp>
+        <p:nvSpPr>
+          <p:cNvPr id="7" name="Shape 5"/>
+          <p:cNvSpPr/>
+          <p:nvPr/>
+        </p:nvSpPr>
+        <p:spPr>
+          <a:xfrm>
+            <a:off x="6263640" y="1463040"/>
+            <a:ext cx="5212080" cy="1965960"/>
+          </a:xfrm>
+          <a:prstGeom prst="roundRect">
+            <a:avLst>
+              <a:gd name="adj" fmla="val 4651"/>
+            </a:avLst>
+          </a:prstGeom>
+          <a:solidFill>
+            <a:srgbClr val="145043"/>
+          </a:solidFill>
+          <a:ln/>
+          <a:effectLst>
+            <a:outerShdw sx="100000" sy="100000" kx="0" ky="0" algn="bl" rotWithShape="0" blurRad="101600" dist="38100" dir="5400000">
+              <a:srgbClr val="000000">
+                <a:alpha val="35000"/>
+              </a:srgbClr>
+            </a:outerShdw>
+          </a:effectLst>
+        </p:spPr>
+      </p:sp>
+      <p:sp>
+        <p:nvSpPr>
+          <p:cNvPr id="8" name="Text 6"/>
+          <p:cNvSpPr/>
+          <p:nvPr/>
+        </p:nvSpPr>
+        <p:spPr>
+          <a:xfrm>
+            <a:off x="6492240" y="1600200"/>
+            <a:ext cx="4754880" cy="457200"/>
+          </a:xfrm>
+          <a:prstGeom prst="rect">
+            <a:avLst/>
+          </a:prstGeom>
+          <a:noFill/>
+          <a:ln/>
+        </p:spPr>
+        <p:txBody>
+          <a:bodyPr wrap="square" lIns="0" tIns="0" rIns="0" bIns="0" rtlCol="0" anchor="t"/>
+          <a:lstStyle/>
+          <a:p>
+            <a:pPr indent="0" marL="0">
+              <a:buNone/>
+            </a:pPr>
+            <a:r>
+              <a:rPr lang="en-US" sz="1800" b="1" dirty="0">
+                <a:solidFill>
+                  <a:srgbClr val="CDFCE3"/>
+                </a:solidFill>
+                <a:latin typeface="Space Grotesk" pitchFamily="34" charset="0"/>
+                <a:ea typeface="Space Grotesk" pitchFamily="34" charset="-122"/>
+                <a:cs typeface="Space Grotesk" pitchFamily="34" charset="-120"/>
+              </a:rPr>
+              <a:t>Representation is cheap</a:t>
+            </a:r>
+            <a:endParaRPr lang="en-US" sz="1800" dirty="0"/>
+          </a:p>
+        </p:txBody>
+      </p:sp>
+      <p:sp>
+        <p:nvSpPr>
+          <p:cNvPr id="9" name="Text 7"/>
+          <p:cNvSpPr/>
+          <p:nvPr/>
+        </p:nvSpPr>
+        <p:spPr>
+          <a:xfrm>
+            <a:off x="6492240" y="2029968"/>
+            <a:ext cx="4754880" cy="1280160"/>
+          </a:xfrm>
+          <a:prstGeom prst="rect">
+            <a:avLst/>
+          </a:prstGeom>
+          <a:noFill/>
+          <a:ln/>
+        </p:spPr>
+        <p:txBody>
+          <a:bodyPr wrap="square" lIns="0" tIns="0" rIns="0" bIns="0" rtlCol="0" anchor="t"/>
+          <a:lstStyle/>
           <a:p>
             <a:pPr indent="0" marL="0">
               <a:lnSpc>
@@ -14454,8 +16498,109 @@
               </a:lnSpc>
               <a:buNone/>
             </a:pPr>
-            <a:endParaRPr lang="en-US" sz="1350" dirty="0"/>
-          </a:p>
+            <a:r>
+              <a:rPr lang="en-US" sz="1500" dirty="0">
+                <a:solidFill>
+                  <a:srgbClr val="FFFFFF"/>
+                </a:solidFill>
+                <a:latin typeface="Space Grotesk" pitchFamily="34" charset="0"/>
+                <a:ea typeface="Space Grotesk" pitchFamily="34" charset="-122"/>
+                <a:cs typeface="Space Grotesk" pitchFamily="34" charset="-120"/>
+              </a:rPr>
+              <a:t>Tessera's frozen embeddings tie the 600M Prithvi (p = 0.88). A large encoder buys no accuracy here.</a:t>
+            </a:r>
+            <a:endParaRPr lang="en-US" sz="1500" dirty="0"/>
+          </a:p>
+        </p:txBody>
+      </p:sp>
+      <p:sp>
+        <p:nvSpPr>
+          <p:cNvPr id="10" name="Shape 8"/>
+          <p:cNvSpPr/>
+          <p:nvPr/>
+        </p:nvSpPr>
+        <p:spPr>
+          <a:xfrm>
+            <a:off x="731520" y="3657600"/>
+            <a:ext cx="5212080" cy="1965960"/>
+          </a:xfrm>
+          <a:prstGeom prst="roundRect">
+            <a:avLst>
+              <a:gd name="adj" fmla="val 4651"/>
+            </a:avLst>
+          </a:prstGeom>
+          <a:solidFill>
+            <a:srgbClr val="145043"/>
+          </a:solidFill>
+          <a:ln/>
+          <a:effectLst>
+            <a:outerShdw sx="100000" sy="100000" kx="0" ky="0" algn="bl" rotWithShape="0" blurRad="101600" dist="38100" dir="5400000">
+              <a:srgbClr val="000000">
+                <a:alpha val="35000"/>
+              </a:srgbClr>
+            </a:outerShdw>
+          </a:effectLst>
+        </p:spPr>
+      </p:sp>
+      <p:sp>
+        <p:nvSpPr>
+          <p:cNvPr id="11" name="Text 9"/>
+          <p:cNvSpPr/>
+          <p:nvPr/>
+        </p:nvSpPr>
+        <p:spPr>
+          <a:xfrm>
+            <a:off x="960120" y="3794760"/>
+            <a:ext cx="4754880" cy="457200"/>
+          </a:xfrm>
+          <a:prstGeom prst="rect">
+            <a:avLst/>
+          </a:prstGeom>
+          <a:noFill/>
+          <a:ln/>
+        </p:spPr>
+        <p:txBody>
+          <a:bodyPr wrap="square" lIns="0" tIns="0" rIns="0" bIns="0" rtlCol="0" anchor="t"/>
+          <a:lstStyle/>
+          <a:p>
+            <a:pPr indent="0" marL="0">
+              <a:buNone/>
+            </a:pPr>
+            <a:r>
+              <a:rPr lang="en-US" sz="1800" b="1" dirty="0">
+                <a:solidFill>
+                  <a:srgbClr val="FF826C"/>
+                </a:solidFill>
+                <a:latin typeface="Space Grotesk" pitchFamily="34" charset="0"/>
+                <a:ea typeface="Space Grotesk" pitchFamily="34" charset="-122"/>
+                <a:cs typeface="Space Grotesk" pitchFamily="34" charset="-120"/>
+              </a:rPr>
+              <a:t>Ensembling doesn't pay</a:t>
+            </a:r>
+            <a:endParaRPr lang="en-US" sz="1800" dirty="0"/>
+          </a:p>
+        </p:txBody>
+      </p:sp>
+      <p:sp>
+        <p:nvSpPr>
+          <p:cNvPr id="12" name="Text 10"/>
+          <p:cNvSpPr/>
+          <p:nvPr/>
+        </p:nvSpPr>
+        <p:spPr>
+          <a:xfrm>
+            <a:off x="960120" y="4224528"/>
+            <a:ext cx="4754880" cy="1280160"/>
+          </a:xfrm>
+          <a:prstGeom prst="rect">
+            <a:avLst/>
+          </a:prstGeom>
+          <a:noFill/>
+          <a:ln/>
+        </p:spPr>
+        <p:txBody>
+          <a:bodyPr wrap="square" lIns="0" tIns="0" rIns="0" bIns="0" rtlCol="0" anchor="t"/>
+          <a:lstStyle/>
           <a:p>
             <a:pPr indent="0" marL="0">
               <a:lnSpc>
@@ -14464,7 +16609,7 @@
               <a:buNone/>
             </a:pPr>
             <a:r>
-              <a:rPr lang="en-US" sz="1350" dirty="0">
+              <a:rPr lang="en-US" sz="1500" dirty="0">
                 <a:solidFill>
                   <a:srgbClr val="FFFFFF"/>
                 </a:solidFill>
@@ -14472,10 +16617,100 @@
                 <a:ea typeface="Space Grotesk" pitchFamily="34" charset="-122"/>
                 <a:cs typeface="Space Grotesk" pitchFamily="34" charset="-120"/>
               </a:rPr>
-              <a:t>Strict year-matching of spectra to crop labels is already enforced and must stay enforced.</a:t>
-            </a:r>
-            <a:endParaRPr lang="en-US" sz="1350" dirty="0"/>
-          </a:p>
+              <a:t>Members are correlated: the stacked combiner is within noise (p = 0.37), and encoder diversity added &lt; 0.03.</a:t>
+            </a:r>
+            <a:endParaRPr lang="en-US" sz="1500" dirty="0"/>
+          </a:p>
+        </p:txBody>
+      </p:sp>
+      <p:sp>
+        <p:nvSpPr>
+          <p:cNvPr id="13" name="Shape 11"/>
+          <p:cNvSpPr/>
+          <p:nvPr/>
+        </p:nvSpPr>
+        <p:spPr>
+          <a:xfrm>
+            <a:off x="6263640" y="3657600"/>
+            <a:ext cx="5212080" cy="1965960"/>
+          </a:xfrm>
+          <a:prstGeom prst="roundRect">
+            <a:avLst>
+              <a:gd name="adj" fmla="val 4651"/>
+            </a:avLst>
+          </a:prstGeom>
+          <a:solidFill>
+            <a:srgbClr val="145043"/>
+          </a:solidFill>
+          <a:ln/>
+          <a:effectLst>
+            <a:outerShdw sx="100000" sy="100000" kx="0" ky="0" algn="bl" rotWithShape="0" blurRad="101600" dist="38100" dir="5400000">
+              <a:srgbClr val="000000">
+                <a:alpha val="35000"/>
+              </a:srgbClr>
+            </a:outerShdw>
+          </a:effectLst>
+        </p:spPr>
+      </p:sp>
+      <p:sp>
+        <p:nvSpPr>
+          <p:cNvPr id="14" name="Text 12"/>
+          <p:cNvSpPr/>
+          <p:nvPr/>
+        </p:nvSpPr>
+        <p:spPr>
+          <a:xfrm>
+            <a:off x="6492240" y="3794760"/>
+            <a:ext cx="4754880" cy="457200"/>
+          </a:xfrm>
+          <a:prstGeom prst="rect">
+            <a:avLst/>
+          </a:prstGeom>
+          <a:noFill/>
+          <a:ln/>
+        </p:spPr>
+        <p:txBody>
+          <a:bodyPr wrap="square" lIns="0" tIns="0" rIns="0" bIns="0" rtlCol="0" anchor="t"/>
+          <a:lstStyle/>
+          <a:p>
+            <a:pPr indent="0" marL="0">
+              <a:buNone/>
+            </a:pPr>
+            <a:r>
+              <a:rPr lang="en-US" sz="1800" b="1" dirty="0">
+                <a:solidFill>
+                  <a:srgbClr val="FF826C"/>
+                </a:solidFill>
+                <a:latin typeface="Space Grotesk" pitchFamily="34" charset="0"/>
+                <a:ea typeface="Space Grotesk" pitchFamily="34" charset="-122"/>
+                <a:cs typeface="Space Grotesk" pitchFamily="34" charset="-120"/>
+              </a:rPr>
+              <a:t>Hard classes are shared</a:t>
+            </a:r>
+            <a:endParaRPr lang="en-US" sz="1800" dirty="0"/>
+          </a:p>
+        </p:txBody>
+      </p:sp>
+      <p:sp>
+        <p:nvSpPr>
+          <p:cNvPr id="15" name="Text 13"/>
+          <p:cNvSpPr/>
+          <p:nvPr/>
+        </p:nvSpPr>
+        <p:spPr>
+          <a:xfrm>
+            <a:off x="6492240" y="4224528"/>
+            <a:ext cx="4754880" cy="1280160"/>
+          </a:xfrm>
+          <a:prstGeom prst="rect">
+            <a:avLst/>
+          </a:prstGeom>
+          <a:noFill/>
+          <a:ln/>
+        </p:spPr>
+        <p:txBody>
+          <a:bodyPr wrap="square" lIns="0" tIns="0" rIns="0" bIns="0" rtlCol="0" anchor="t"/>
+          <a:lstStyle/>
           <a:p>
             <a:pPr indent="0" marL="0">
               <a:lnSpc>
@@ -14483,17 +16718,8 @@
               </a:lnSpc>
               <a:buNone/>
             </a:pPr>
-            <a:endParaRPr lang="en-US" sz="1350" dirty="0"/>
-          </a:p>
-          <a:p>
-            <a:pPr indent="0" marL="0">
-              <a:lnSpc>
-                <a:spcPct val="110000"/>
-              </a:lnSpc>
-              <a:buNone/>
-            </a:pPr>
-            <a:r>
-              <a:rPr lang="en-US" sz="1350" dirty="0">
+            <a:r>
+              <a:rPr lang="en-US" sz="1500" dirty="0">
                 <a:solidFill>
                   <a:srgbClr val="FFFFFF"/>
                 </a:solidFill>
@@ -14501,9 +16727,9 @@
                 <a:ea typeface="Space Grotesk" pitchFamily="34" charset="-122"/>
                 <a:cs typeface="Space Grotesk" pitchFamily="34" charset="-120"/>
               </a:rPr>
-              <a:t>The grass ambiguity is a survey-definition issue, best resolved upstream in the truth sources rather than in the model.</a:t>
-            </a:r>
-            <a:endParaRPr lang="en-US" sz="1350" dirty="0"/>
+              <a:t>Spruce and open/shrub are weak across every backbone and every truth source — a data limit, not a model flaw.</a:t>
+            </a:r>
+            <a:endParaRPr lang="en-US" sz="1500" dirty="0"/>
           </a:p>
         </p:txBody>
       </p:sp>
@@ -14625,7 +16851,7 @@
                 <a:ea typeface="Space Grotesk" pitchFamily="34" charset="-122"/>
                 <a:cs typeface="Space Grotesk" pitchFamily="34" charset="-120"/>
               </a:rPr>
-              <a:t>Conclusions</a:t>
+              <a:t>Limitations</a:t>
             </a:r>
             <a:endParaRPr lang="en-US" sz="3200" dirty="0"/>
           </a:p>
@@ -14633,18 +16859,160 @@
       </p:sp>
       <p:sp>
         <p:nvSpPr>
-          <p:cNvPr id="4" name="Shape 2"/>
-          <p:cNvSpPr/>
-          <p:nvPr/>
-        </p:nvSpPr>
-        <p:spPr>
-          <a:xfrm>
-            <a:off x="731520" y="1371600"/>
-            <a:ext cx="5212080" cy="1691640"/>
+          <p:cNvPr id="4" name="Text 2"/>
+          <p:cNvSpPr/>
+          <p:nvPr/>
+        </p:nvSpPr>
+        <p:spPr>
+          <a:xfrm>
+            <a:off x="731520" y="1417320"/>
+            <a:ext cx="6492240" cy="4114800"/>
+          </a:xfrm>
+          <a:prstGeom prst="rect">
+            <a:avLst/>
+          </a:prstGeom>
+          <a:noFill/>
+          <a:ln/>
+        </p:spPr>
+        <p:txBody>
+          <a:bodyPr wrap="square" lIns="0" tIns="0" rIns="0" bIns="0" rtlCol="0" anchor="t"/>
+          <a:lstStyle/>
+          <a:p>
+            <a:pPr marL="177800" indent="-177800">
+              <a:lnSpc>
+                <a:spcPct val="115000"/>
+              </a:lnSpc>
+              <a:spcAft>
+                <a:spcPts val="800"/>
+              </a:spcAft>
+              <a:buSzPct val="100000"/>
+              <a:buChar char="•"/>
+            </a:pPr>
+            <a:r>
+              <a:rPr lang="en-US" sz="1500" dirty="0">
+                <a:solidFill>
+                  <a:srgbClr val="FFFFFF"/>
+                </a:solidFill>
+                <a:latin typeface="Space Grotesk" pitchFamily="34" charset="0"/>
+                <a:ea typeface="Space Grotesk" pitchFamily="34" charset="-122"/>
+                <a:cs typeface="Space Grotesk" pitchFamily="34" charset="-120"/>
+              </a:rPr>
+              <a:t>Thin held-out set: 209 plots limits statistical power — several head-to-head gaps sit within noise.</a:t>
+            </a:r>
+            <a:endParaRPr lang="en-US" sz="1500" dirty="0"/>
+          </a:p>
+          <a:p>
+            <a:pPr marL="177800" indent="-177800">
+              <a:lnSpc>
+                <a:spcPct val="115000"/>
+              </a:lnSpc>
+              <a:spcAft>
+                <a:spcPts val="800"/>
+              </a:spcAft>
+              <a:buSzPct val="100000"/>
+              <a:buChar char="•"/>
+            </a:pPr>
+            <a:r>
+              <a:rPr lang="en-US" sz="1500" dirty="0">
+                <a:solidFill>
+                  <a:srgbClr val="FFFFFF"/>
+                </a:solidFill>
+                <a:latin typeface="Space Grotesk" pitchFamily="34" charset="0"/>
+                <a:ea typeface="Space Grotesk" pitchFamily="34" charset="-122"/>
+                <a:cs typeface="Space Grotesk" pitchFamily="34" charset="-120"/>
+              </a:rPr>
+              <a:t>Spruce accuracy (~0.53–0.55) is the persistent weak axis across both backbones and both truth sources.</a:t>
+            </a:r>
+            <a:endParaRPr lang="en-US" sz="1500" dirty="0"/>
+          </a:p>
+          <a:p>
+            <a:pPr marL="177800" indent="-177800">
+              <a:lnSpc>
+                <a:spcPct val="115000"/>
+              </a:lnSpc>
+              <a:spcAft>
+                <a:spcPts val="800"/>
+              </a:spcAft>
+              <a:buSzPct val="100000"/>
+              <a:buChar char="•"/>
+            </a:pPr>
+            <a:r>
+              <a:rPr lang="en-US" sz="1500" dirty="0">
+                <a:solidFill>
+                  <a:srgbClr val="FFFFFF"/>
+                </a:solidFill>
+                <a:latin typeface="Space Grotesk" pitchFamily="34" charset="0"/>
+                <a:ea typeface="Space Grotesk" pitchFamily="34" charset="-122"/>
+                <a:cs typeface="Space Grotesk" pitchFamily="34" charset="-120"/>
+              </a:rPr>
+              <a:t>Crop classes are year-sensitive: labels and spectra must be matched to the same year, since crops rotate.</a:t>
+            </a:r>
+            <a:endParaRPr lang="en-US" sz="1500" dirty="0"/>
+          </a:p>
+          <a:p>
+            <a:pPr marL="177800" indent="-177800">
+              <a:lnSpc>
+                <a:spcPct val="115000"/>
+              </a:lnSpc>
+              <a:spcAft>
+                <a:spcPts val="800"/>
+              </a:spcAft>
+              <a:buSzPct val="100000"/>
+              <a:buChar char="•"/>
+            </a:pPr>
+            <a:r>
+              <a:rPr lang="en-US" sz="1500" dirty="0">
+                <a:solidFill>
+                  <a:srgbClr val="FFFFFF"/>
+                </a:solidFill>
+                <a:latin typeface="Space Grotesk" pitchFamily="34" charset="0"/>
+                <a:ea typeface="Space Grotesk" pitchFamily="34" charset="-122"/>
+                <a:cs typeface="Space Grotesk" pitchFamily="34" charset="-120"/>
+              </a:rPr>
+              <a:t>Ley-vs-pasture grass classes are not cleanly separable across truth sources — a boundary, not an error.</a:t>
+            </a:r>
+            <a:endParaRPr lang="en-US" sz="1500" dirty="0"/>
+          </a:p>
+          <a:p>
+            <a:pPr marL="177800" indent="-177800">
+              <a:lnSpc>
+                <a:spcPct val="115000"/>
+              </a:lnSpc>
+              <a:spcAft>
+                <a:spcPts val="800"/>
+              </a:spcAft>
+              <a:buSzPct val="100000"/>
+              <a:buChar char="•"/>
+            </a:pPr>
+            <a:r>
+              <a:rPr lang="en-US" sz="1500" dirty="0">
+                <a:solidFill>
+                  <a:srgbClr val="FFFFFF"/>
+                </a:solidFill>
+                <a:latin typeface="Space Grotesk" pitchFamily="34" charset="0"/>
+                <a:ea typeface="Space Grotesk" pitchFamily="34" charset="-122"/>
+                <a:cs typeface="Space Grotesk" pitchFamily="34" charset="-120"/>
+              </a:rPr>
+              <a:t>LUCAS coverage: only ~29% of crop points fall on a year-matched LPIS parcel, bounding that cross-check.</a:t>
+            </a:r>
+            <a:endParaRPr lang="en-US" sz="1500" dirty="0"/>
+          </a:p>
+        </p:txBody>
+      </p:sp>
+      <p:sp>
+        <p:nvSpPr>
+          <p:cNvPr id="5" name="Shape 3"/>
+          <p:cNvSpPr/>
+          <p:nvPr/>
+        </p:nvSpPr>
+        <p:spPr>
+          <a:xfrm>
+            <a:off x="7498080" y="1417320"/>
+            <a:ext cx="3977640" cy="4434840"/>
           </a:xfrm>
           <a:prstGeom prst="roundRect">
             <a:avLst>
-              <a:gd name="adj" fmla="val 5405"/>
+              <a:gd name="adj" fmla="val 2299"/>
             </a:avLst>
           </a:prstGeom>
           <a:solidFill>
@@ -14662,14 +17030,14 @@
       </p:sp>
       <p:sp>
         <p:nvSpPr>
-          <p:cNvPr id="5" name="Text 3"/>
-          <p:cNvSpPr/>
-          <p:nvPr/>
-        </p:nvSpPr>
-        <p:spPr>
-          <a:xfrm>
-            <a:off x="960120" y="1508760"/>
-            <a:ext cx="4754880" cy="457200"/>
+          <p:cNvPr id="6" name="Text 4"/>
+          <p:cNvSpPr/>
+          <p:nvPr/>
+        </p:nvSpPr>
+        <p:spPr>
+          <a:xfrm>
+            <a:off x="7726680" y="1554480"/>
+            <a:ext cx="3520440" cy="457200"/>
           </a:xfrm>
           <a:prstGeom prst="rect">
             <a:avLst/>
@@ -14693,7 +17061,7 @@
                 <a:ea typeface="Space Grotesk" pitchFamily="34" charset="-122"/>
                 <a:cs typeface="Space Grotesk" pitchFamily="34" charset="-120"/>
               </a:rPr>
-              <a:t>Field calibration wins</a:t>
+              <a:t>What would move the needle</a:t>
             </a:r>
             <a:endParaRPr lang="en-US" sz="1800" dirty="0"/>
           </a:p>
@@ -14701,14 +17069,14 @@
       </p:sp>
       <p:sp>
         <p:nvSpPr>
-          <p:cNvPr id="6" name="Text 4"/>
-          <p:cNvSpPr/>
-          <p:nvPr/>
-        </p:nvSpPr>
-        <p:spPr>
-          <a:xfrm>
-            <a:off x="960120" y="1938528"/>
-            <a:ext cx="4754880" cy="1005840"/>
+          <p:cNvPr id="7" name="Text 5"/>
+          <p:cNvSpPr/>
+          <p:nvPr/>
+        </p:nvSpPr>
+        <p:spPr>
+          <a:xfrm>
+            <a:off x="7726680" y="1984248"/>
+            <a:ext cx="3520440" cy="3749040"/>
           </a:xfrm>
           <a:prstGeom prst="rect">
             <a:avLst/>
@@ -14727,7 +17095,7 @@
               <a:buNone/>
             </a:pPr>
             <a:r>
-              <a:rPr lang="en-US" sz="1450" dirty="0">
+              <a:rPr lang="en-US" sz="1350" dirty="0">
                 <a:solidFill>
                   <a:srgbClr val="FFFFFF"/>
                 </a:solidFill>
@@ -14735,100 +17103,10 @@
                 <a:ea typeface="Space Grotesk" pitchFamily="34" charset="-122"/>
                 <a:cs typeface="Space Grotesk" pitchFamily="34" charset="-120"/>
               </a:rPr>
-              <a:t>On independent field truth the field-calibrated model beats NMD2023 — 43.1% → 50.2%, and 57.9% on forest type.</a:t>
-            </a:r>
-            <a:endParaRPr lang="en-US" sz="1450" dirty="0"/>
-          </a:p>
-        </p:txBody>
-      </p:sp>
-      <p:sp>
-        <p:nvSpPr>
-          <p:cNvPr id="7" name="Shape 5"/>
-          <p:cNvSpPr/>
-          <p:nvPr/>
-        </p:nvSpPr>
-        <p:spPr>
-          <a:xfrm>
-            <a:off x="6263640" y="1371600"/>
-            <a:ext cx="5212080" cy="1691640"/>
-          </a:xfrm>
-          <a:prstGeom prst="roundRect">
-            <a:avLst>
-              <a:gd name="adj" fmla="val 5405"/>
-            </a:avLst>
-          </a:prstGeom>
-          <a:solidFill>
-            <a:srgbClr val="145043"/>
-          </a:solidFill>
-          <a:ln/>
-          <a:effectLst>
-            <a:outerShdw sx="100000" sy="100000" kx="0" ky="0" algn="bl" rotWithShape="0" blurRad="101600" dist="38100" dir="5400000">
-              <a:srgbClr val="000000">
-                <a:alpha val="35000"/>
-              </a:srgbClr>
-            </a:outerShdw>
-          </a:effectLst>
-        </p:spPr>
-      </p:sp>
-      <p:sp>
-        <p:nvSpPr>
-          <p:cNvPr id="8" name="Text 6"/>
-          <p:cNvSpPr/>
-          <p:nvPr/>
-        </p:nvSpPr>
-        <p:spPr>
-          <a:xfrm>
-            <a:off x="6492240" y="1508760"/>
-            <a:ext cx="4754880" cy="457200"/>
-          </a:xfrm>
-          <a:prstGeom prst="rect">
-            <a:avLst/>
-          </a:prstGeom>
-          <a:noFill/>
-          <a:ln/>
-        </p:spPr>
-        <p:txBody>
-          <a:bodyPr wrap="square" lIns="0" tIns="0" rIns="0" bIns="0" rtlCol="0" anchor="t"/>
-          <a:lstStyle/>
-          <a:p>
-            <a:pPr indent="0" marL="0">
-              <a:buNone/>
-            </a:pPr>
-            <a:r>
-              <a:rPr lang="en-US" sz="1800" b="1" dirty="0">
-                <a:solidFill>
-                  <a:srgbClr val="CDFCE3"/>
-                </a:solidFill>
-                <a:latin typeface="Space Grotesk" pitchFamily="34" charset="0"/>
-                <a:ea typeface="Space Grotesk" pitchFamily="34" charset="-122"/>
-                <a:cs typeface="Space Grotesk" pitchFamily="34" charset="-120"/>
-              </a:rPr>
-              <a:t>Deploy the pair</a:t>
-            </a:r>
-            <a:endParaRPr lang="en-US" sz="1800" dirty="0"/>
-          </a:p>
-        </p:txBody>
-      </p:sp>
-      <p:sp>
-        <p:nvSpPr>
-          <p:cNvPr id="9" name="Text 7"/>
-          <p:cNvSpPr/>
-          <p:nvPr/>
-        </p:nvSpPr>
-        <p:spPr>
-          <a:xfrm>
-            <a:off x="6492240" y="1938528"/>
-            <a:ext cx="4754880" cy="1005840"/>
-          </a:xfrm>
-          <a:prstGeom prst="rect">
-            <a:avLst/>
-          </a:prstGeom>
-          <a:noFill/>
-          <a:ln/>
-        </p:spPr>
-        <p:txBody>
-          <a:bodyPr wrap="square" lIns="0" tIns="0" rIns="0" bIns="0" rtlCol="0" anchor="t"/>
-          <a:lstStyle/>
+              <a:t>More field plots — especially spruce-dominated stands — would tighten every confidence interval and is the single highest-leverage next step.</a:t>
+            </a:r>
+            <a:endParaRPr lang="en-US" sz="1350" dirty="0"/>
+          </a:p>
           <a:p>
             <a:pPr indent="0" marL="0">
               <a:lnSpc>
@@ -14836,109 +17114,8 @@
               </a:lnSpc>
               <a:buNone/>
             </a:pPr>
-            <a:r>
-              <a:rPr lang="en-US" sz="1450" dirty="0">
-                <a:solidFill>
-                  <a:srgbClr val="FFFFFF"/>
-                </a:solidFill>
-                <a:latin typeface="Space Grotesk" pitchFamily="34" charset="0"/>
-                <a:ea typeface="Space Grotesk" pitchFamily="34" charset="-122"/>
-                <a:cs typeface="Space Grotesk" pitchFamily="34" charset="-120"/>
-              </a:rPr>
-              <a:t>Ship the distilled 28-class base plus the forest-type fraction layer: hard mask decides forest, fractions decide species.</a:t>
-            </a:r>
-            <a:endParaRPr lang="en-US" sz="1450" dirty="0"/>
-          </a:p>
-        </p:txBody>
-      </p:sp>
-      <p:sp>
-        <p:nvSpPr>
-          <p:cNvPr id="10" name="Shape 8"/>
-          <p:cNvSpPr/>
-          <p:nvPr/>
-        </p:nvSpPr>
-        <p:spPr>
-          <a:xfrm>
-            <a:off x="731520" y="3246120"/>
-            <a:ext cx="5212080" cy="1691640"/>
-          </a:xfrm>
-          <a:prstGeom prst="roundRect">
-            <a:avLst>
-              <a:gd name="adj" fmla="val 5405"/>
-            </a:avLst>
-          </a:prstGeom>
-          <a:solidFill>
-            <a:srgbClr val="145043"/>
-          </a:solidFill>
-          <a:ln/>
-          <a:effectLst>
-            <a:outerShdw sx="100000" sy="100000" kx="0" ky="0" algn="bl" rotWithShape="0" blurRad="101600" dist="38100" dir="5400000">
-              <a:srgbClr val="000000">
-                <a:alpha val="35000"/>
-              </a:srgbClr>
-            </a:outerShdw>
-          </a:effectLst>
-        </p:spPr>
-      </p:sp>
-      <p:sp>
-        <p:nvSpPr>
-          <p:cNvPr id="11" name="Text 9"/>
-          <p:cNvSpPr/>
-          <p:nvPr/>
-        </p:nvSpPr>
-        <p:spPr>
-          <a:xfrm>
-            <a:off x="960120" y="3383280"/>
-            <a:ext cx="4754880" cy="457200"/>
-          </a:xfrm>
-          <a:prstGeom prst="rect">
-            <a:avLst/>
-          </a:prstGeom>
-          <a:noFill/>
-          <a:ln/>
-        </p:spPr>
-        <p:txBody>
-          <a:bodyPr wrap="square" lIns="0" tIns="0" rIns="0" bIns="0" rtlCol="0" anchor="t"/>
-          <a:lstStyle/>
-          <a:p>
-            <a:pPr indent="0" marL="0">
-              <a:buNone/>
-            </a:pPr>
-            <a:r>
-              <a:rPr lang="en-US" sz="1800" b="1" dirty="0">
-                <a:solidFill>
-                  <a:srgbClr val="FF826C"/>
-                </a:solidFill>
-                <a:latin typeface="Space Grotesk" pitchFamily="34" charset="0"/>
-                <a:ea typeface="Space Grotesk" pitchFamily="34" charset="-122"/>
-                <a:cs typeface="Space Grotesk" pitchFamily="34" charset="-120"/>
-              </a:rPr>
-              <a:t>Tessera for cost</a:t>
-            </a:r>
-            <a:endParaRPr lang="en-US" sz="1800" dirty="0"/>
-          </a:p>
-        </p:txBody>
-      </p:sp>
-      <p:sp>
-        <p:nvSpPr>
-          <p:cNvPr id="12" name="Text 10"/>
-          <p:cNvSpPr/>
-          <p:nvPr/>
-        </p:nvSpPr>
-        <p:spPr>
-          <a:xfrm>
-            <a:off x="960120" y="3813048"/>
-            <a:ext cx="4754880" cy="1005840"/>
-          </a:xfrm>
-          <a:prstGeom prst="rect">
-            <a:avLst/>
-          </a:prstGeom>
-          <a:noFill/>
-          <a:ln/>
-        </p:spPr>
-        <p:txBody>
-          <a:bodyPr wrap="square" lIns="0" tIns="0" rIns="0" bIns="0" rtlCol="0" anchor="t"/>
-          <a:lstStyle/>
+            <a:endParaRPr lang="en-US" sz="1350" dirty="0"/>
+          </a:p>
           <a:p>
             <a:pPr indent="0" marL="0">
               <a:lnSpc>
@@ -14947,7 +17124,7 @@
               <a:buNone/>
             </a:pPr>
             <a:r>
-              <a:rPr lang="en-US" sz="1450" dirty="0">
+              <a:rPr lang="en-US" sz="1350" dirty="0">
                 <a:solidFill>
                   <a:srgbClr val="FFFFFF"/>
                 </a:solidFill>
@@ -14955,100 +17132,10 @@
                 <a:ea typeface="Space Grotesk" pitchFamily="34" charset="-122"/>
                 <a:cs typeface="Space Grotesk" pitchFamily="34" charset="-120"/>
               </a:rPr>
-              <a:t>Use Tessera's precomputed embeddings for deployment — it ties the 600M model at a fraction of the compute.</a:t>
-            </a:r>
-            <a:endParaRPr lang="en-US" sz="1450" dirty="0"/>
-          </a:p>
-        </p:txBody>
-      </p:sp>
-      <p:sp>
-        <p:nvSpPr>
-          <p:cNvPr id="13" name="Shape 11"/>
-          <p:cNvSpPr/>
-          <p:nvPr/>
-        </p:nvSpPr>
-        <p:spPr>
-          <a:xfrm>
-            <a:off x="6263640" y="3246120"/>
-            <a:ext cx="5212080" cy="1691640"/>
-          </a:xfrm>
-          <a:prstGeom prst="roundRect">
-            <a:avLst>
-              <a:gd name="adj" fmla="val 5405"/>
-            </a:avLst>
-          </a:prstGeom>
-          <a:solidFill>
-            <a:srgbClr val="145043"/>
-          </a:solidFill>
-          <a:ln/>
-          <a:effectLst>
-            <a:outerShdw sx="100000" sy="100000" kx="0" ky="0" algn="bl" rotWithShape="0" blurRad="101600" dist="38100" dir="5400000">
-              <a:srgbClr val="000000">
-                <a:alpha val="35000"/>
-              </a:srgbClr>
-            </a:outerShdw>
-          </a:effectLst>
-        </p:spPr>
-      </p:sp>
-      <p:sp>
-        <p:nvSpPr>
-          <p:cNvPr id="14" name="Text 12"/>
-          <p:cNvSpPr/>
-          <p:nvPr/>
-        </p:nvSpPr>
-        <p:spPr>
-          <a:xfrm>
-            <a:off x="6492240" y="3383280"/>
-            <a:ext cx="4754880" cy="457200"/>
-          </a:xfrm>
-          <a:prstGeom prst="rect">
-            <a:avLst/>
-          </a:prstGeom>
-          <a:noFill/>
-          <a:ln/>
-        </p:spPr>
-        <p:txBody>
-          <a:bodyPr wrap="square" lIns="0" tIns="0" rIns="0" bIns="0" rtlCol="0" anchor="t"/>
-          <a:lstStyle/>
-          <a:p>
-            <a:pPr indent="0" marL="0">
-              <a:buNone/>
-            </a:pPr>
-            <a:r>
-              <a:rPr lang="en-US" sz="1800" b="1" dirty="0">
-                <a:solidFill>
-                  <a:srgbClr val="FF826C"/>
-                </a:solidFill>
-                <a:latin typeface="Space Grotesk" pitchFamily="34" charset="0"/>
-                <a:ea typeface="Space Grotesk" pitchFamily="34" charset="-122"/>
-                <a:cs typeface="Space Grotesk" pitchFamily="34" charset="-120"/>
-              </a:rPr>
-              <a:t>Skip the ensemble</a:t>
-            </a:r>
-            <a:endParaRPr lang="en-US" sz="1800" dirty="0"/>
-          </a:p>
-        </p:txBody>
-      </p:sp>
-      <p:sp>
-        <p:nvSpPr>
-          <p:cNvPr id="15" name="Text 13"/>
-          <p:cNvSpPr/>
-          <p:nvPr/>
-        </p:nvSpPr>
-        <p:spPr>
-          <a:xfrm>
-            <a:off x="6492240" y="3813048"/>
-            <a:ext cx="4754880" cy="1005840"/>
-          </a:xfrm>
-          <a:prstGeom prst="rect">
-            <a:avLst/>
-          </a:prstGeom>
-          <a:noFill/>
-          <a:ln/>
-        </p:spPr>
-        <p:txBody>
-          <a:bodyPr wrap="square" lIns="0" tIns="0" rIns="0" bIns="0" rtlCol="0" anchor="t"/>
-          <a:lstStyle/>
+              <a:t>Strict year-matching of spectra to crop labels is already enforced and must stay enforced.</a:t>
+            </a:r>
+            <a:endParaRPr lang="en-US" sz="1350" dirty="0"/>
+          </a:p>
           <a:p>
             <a:pPr indent="0" marL="0">
               <a:lnSpc>
@@ -15056,41 +17143,8 @@
               </a:lnSpc>
               <a:buNone/>
             </a:pPr>
-            <a:r>
-              <a:rPr lang="en-US" sz="1450" dirty="0">
-                <a:solidFill>
-                  <a:srgbClr val="FFFFFF"/>
-                </a:solidFill>
-                <a:latin typeface="Space Grotesk" pitchFamily="34" charset="0"/>
-                <a:ea typeface="Space Grotesk" pitchFamily="34" charset="-122"/>
-                <a:cs typeface="Space Grotesk" pitchFamily="34" charset="-120"/>
-              </a:rPr>
-              <a:t>Combining models is not worth it: the gain is within noise and adds serving complexity for nothing.</a:t>
-            </a:r>
-            <a:endParaRPr lang="en-US" sz="1450" dirty="0"/>
-          </a:p>
-        </p:txBody>
-      </p:sp>
-      <p:sp>
-        <p:nvSpPr>
-          <p:cNvPr id="16" name="Text 14"/>
-          <p:cNvSpPr/>
-          <p:nvPr/>
-        </p:nvSpPr>
-        <p:spPr>
-          <a:xfrm>
-            <a:off x="731520" y="5257800"/>
-            <a:ext cx="10744200" cy="548640"/>
-          </a:xfrm>
-          <a:prstGeom prst="rect">
-            <a:avLst/>
-          </a:prstGeom>
-          <a:noFill/>
-          <a:ln/>
-        </p:spPr>
-        <p:txBody>
-          <a:bodyPr wrap="square" lIns="0" tIns="0" rIns="0" bIns="0" rtlCol="0" anchor="ctr"/>
-          <a:lstStyle/>
+            <a:endParaRPr lang="en-US" sz="1350" dirty="0"/>
+          </a:p>
           <a:p>
             <a:pPr indent="0" marL="0">
               <a:lnSpc>
@@ -15099,17 +17153,17 @@
               <a:buNone/>
             </a:pPr>
             <a:r>
-              <a:rPr lang="en-US" sz="1200" i="1" dirty="0">
-                <a:solidFill>
-                  <a:srgbClr val="9DBDB0"/>
-                </a:solidFill>
-                <a:latin typeface="Space Grotesk" pitchFamily="34" charset="0"/>
-                <a:ea typeface="Space Grotesk" pitchFamily="34" charset="-122"/>
-                <a:cs typeface="Space Grotesk" pitchFamily="34" charset="-120"/>
-              </a:rPr>
-              <a:t>Provenance: docs/data/{distill,tradslag_fraction,hybrid_nfi_head}_finding.md — all held-out figures use 209 plots, grouped-tile split, calibration on the train side only.</a:t>
-            </a:r>
-            <a:endParaRPr lang="en-US" sz="1200" dirty="0"/>
+              <a:rPr lang="en-US" sz="1350" dirty="0">
+                <a:solidFill>
+                  <a:srgbClr val="FFFFFF"/>
+                </a:solidFill>
+                <a:latin typeface="Space Grotesk" pitchFamily="34" charset="0"/>
+                <a:ea typeface="Space Grotesk" pitchFamily="34" charset="-122"/>
+                <a:cs typeface="Space Grotesk" pitchFamily="34" charset="-120"/>
+              </a:rPr>
+              <a:t>The grass ambiguity is a survey-definition issue, best resolved upstream in the truth sources rather than in the model.</a:t>
+            </a:r>
+            <a:endParaRPr lang="en-US" sz="1350" dirty="0"/>
           </a:p>
         </p:txBody>
       </p:sp>
@@ -15504,6 +17558,612 @@
               <a:t>NMD tells you what another model believed. National Forest Inventory (NFI) plots and LUCAS points are surveyed on the ground. Only independent field truth can tell whether a map is right — and whether a model has out-learned its teacher.</a:t>
             </a:r>
             <a:endParaRPr lang="en-US" sz="1400" dirty="0"/>
+          </a:p>
+        </p:txBody>
+      </p:sp>
+    </p:spTree>
+  </p:cSld>
+  <p:clrMapOvr>
+    <a:masterClrMapping/>
+  </p:clrMapOvr>
+</p:sld>
+</file>
+
+<file path=ppt/slides/slide20.xml><?xml version="1.0" encoding="utf-8"?>
+<p:sld xmlns:a="http://schemas.openxmlformats.org/drawingml/2006/main" xmlns:r="http://schemas.openxmlformats.org/officeDocument/2006/relationships" xmlns:p="http://schemas.openxmlformats.org/presentationml/2006/main">
+  <p:cSld name="Slide 20">
+    <p:bg>
+      <p:bgPr>
+        <a:solidFill>
+          <a:srgbClr val="0E433C"/>
+        </a:solidFill>
+      </p:bgPr>
+    </p:bg>
+    <p:spTree>
+      <p:nvGrpSpPr>
+        <p:cNvPr id="1" name=""/>
+        <p:cNvGrpSpPr/>
+        <p:nvPr/>
+      </p:nvGrpSpPr>
+      <p:grpSpPr>
+        <a:xfrm>
+          <a:off x="0" y="0"/>
+          <a:ext cx="0" cy="0"/>
+          <a:chOff x="0" y="0"/>
+          <a:chExt cx="0" cy="0"/>
+        </a:xfrm>
+      </p:grpSpPr>
+      <p:sp>
+        <p:nvSpPr>
+          <p:cNvPr id="2" name="Text 0"/>
+          <p:cNvSpPr/>
+          <p:nvPr/>
+        </p:nvSpPr>
+        <p:spPr>
+          <a:xfrm>
+            <a:off x="8686800" y="320040"/>
+            <a:ext cx="3200400" cy="320040"/>
+          </a:xfrm>
+          <a:prstGeom prst="rect">
+            <a:avLst/>
+          </a:prstGeom>
+          <a:noFill/>
+          <a:ln/>
+        </p:spPr>
+        <p:txBody>
+          <a:bodyPr wrap="square" lIns="0" tIns="0" rIns="0" bIns="0" rtlCol="0" anchor="ctr"/>
+          <a:lstStyle/>
+          <a:p>
+            <a:pPr algn="r" indent="0" marL="0">
+              <a:buNone/>
+            </a:pPr>
+            <a:r>
+              <a:rPr lang="en-US" sz="1200" b="1" dirty="0">
+                <a:solidFill>
+                  <a:srgbClr val="CDFCE3"/>
+                </a:solidFill>
+                <a:latin typeface="Space Grotesk" pitchFamily="34" charset="0"/>
+                <a:ea typeface="Space Grotesk" pitchFamily="34" charset="-122"/>
+                <a:cs typeface="Space Grotesk" pitchFamily="34" charset="-120"/>
+              </a:rPr>
+              <a:t>◆ </a:t>
+            </a:r>
+            <a:pPr algn="r" indent="0" marL="0">
+              <a:buNone/>
+            </a:pPr>
+            <a:r>
+              <a:rPr lang="en-US" sz="1200" b="1" dirty="0">
+                <a:solidFill>
+                  <a:srgbClr val="FFFFFF"/>
+                </a:solidFill>
+                <a:latin typeface="Space Grotesk" pitchFamily="34" charset="0"/>
+                <a:ea typeface="Space Grotesk" pitchFamily="34" charset="-122"/>
+                <a:cs typeface="Space Grotesk" pitchFamily="34" charset="-120"/>
+              </a:rPr>
+              <a:t>Digital Earth Sweden</a:t>
+            </a:r>
+            <a:endParaRPr lang="en-US" sz="1200" dirty="0"/>
+          </a:p>
+        </p:txBody>
+      </p:sp>
+      <p:sp>
+        <p:nvSpPr>
+          <p:cNvPr id="3" name="Text 1"/>
+          <p:cNvSpPr/>
+          <p:nvPr/>
+        </p:nvSpPr>
+        <p:spPr>
+          <a:xfrm>
+            <a:off x="640080" y="384048"/>
+            <a:ext cx="10881360" cy="777240"/>
+          </a:xfrm>
+          <a:prstGeom prst="rect">
+            <a:avLst/>
+          </a:prstGeom>
+          <a:noFill/>
+          <a:ln/>
+        </p:spPr>
+        <p:txBody>
+          <a:bodyPr wrap="square" lIns="0" tIns="0" rIns="0" bIns="0" rtlCol="0" anchor="ctr"/>
+          <a:lstStyle/>
+          <a:p>
+            <a:pPr algn="ctr" indent="0" marL="0">
+              <a:buNone/>
+            </a:pPr>
+            <a:r>
+              <a:rPr lang="en-US" sz="3200" b="1" dirty="0">
+                <a:solidFill>
+                  <a:srgbClr val="FFFFFF"/>
+                </a:solidFill>
+                <a:latin typeface="Space Grotesk" pitchFamily="34" charset="0"/>
+                <a:ea typeface="Space Grotesk" pitchFamily="34" charset="-122"/>
+                <a:cs typeface="Space Grotesk" pitchFamily="34" charset="-120"/>
+              </a:rPr>
+              <a:t>Conclusions</a:t>
+            </a:r>
+            <a:endParaRPr lang="en-US" sz="3200" dirty="0"/>
+          </a:p>
+        </p:txBody>
+      </p:sp>
+      <p:sp>
+        <p:nvSpPr>
+          <p:cNvPr id="4" name="Shape 2"/>
+          <p:cNvSpPr/>
+          <p:nvPr/>
+        </p:nvSpPr>
+        <p:spPr>
+          <a:xfrm>
+            <a:off x="731520" y="1371600"/>
+            <a:ext cx="5212080" cy="1691640"/>
+          </a:xfrm>
+          <a:prstGeom prst="roundRect">
+            <a:avLst>
+              <a:gd name="adj" fmla="val 5405"/>
+            </a:avLst>
+          </a:prstGeom>
+          <a:solidFill>
+            <a:srgbClr val="145043"/>
+          </a:solidFill>
+          <a:ln/>
+          <a:effectLst>
+            <a:outerShdw sx="100000" sy="100000" kx="0" ky="0" algn="bl" rotWithShape="0" blurRad="101600" dist="38100" dir="5400000">
+              <a:srgbClr val="000000">
+                <a:alpha val="35000"/>
+              </a:srgbClr>
+            </a:outerShdw>
+          </a:effectLst>
+        </p:spPr>
+      </p:sp>
+      <p:sp>
+        <p:nvSpPr>
+          <p:cNvPr id="5" name="Text 3"/>
+          <p:cNvSpPr/>
+          <p:nvPr/>
+        </p:nvSpPr>
+        <p:spPr>
+          <a:xfrm>
+            <a:off x="960120" y="1508760"/>
+            <a:ext cx="4754880" cy="457200"/>
+          </a:xfrm>
+          <a:prstGeom prst="rect">
+            <a:avLst/>
+          </a:prstGeom>
+          <a:noFill/>
+          <a:ln/>
+        </p:spPr>
+        <p:txBody>
+          <a:bodyPr wrap="square" lIns="0" tIns="0" rIns="0" bIns="0" rtlCol="0" anchor="t"/>
+          <a:lstStyle/>
+          <a:p>
+            <a:pPr indent="0" marL="0">
+              <a:buNone/>
+            </a:pPr>
+            <a:r>
+              <a:rPr lang="en-US" sz="1800" b="1" dirty="0">
+                <a:solidFill>
+                  <a:srgbClr val="CDFCE3"/>
+                </a:solidFill>
+                <a:latin typeface="Space Grotesk" pitchFamily="34" charset="0"/>
+                <a:ea typeface="Space Grotesk" pitchFamily="34" charset="-122"/>
+                <a:cs typeface="Space Grotesk" pitchFamily="34" charset="-120"/>
+              </a:rPr>
+              <a:t>Field calibration wins</a:t>
+            </a:r>
+            <a:endParaRPr lang="en-US" sz="1800" dirty="0"/>
+          </a:p>
+        </p:txBody>
+      </p:sp>
+      <p:sp>
+        <p:nvSpPr>
+          <p:cNvPr id="6" name="Text 4"/>
+          <p:cNvSpPr/>
+          <p:nvPr/>
+        </p:nvSpPr>
+        <p:spPr>
+          <a:xfrm>
+            <a:off x="960120" y="1938528"/>
+            <a:ext cx="4754880" cy="1005840"/>
+          </a:xfrm>
+          <a:prstGeom prst="rect">
+            <a:avLst/>
+          </a:prstGeom>
+          <a:noFill/>
+          <a:ln/>
+        </p:spPr>
+        <p:txBody>
+          <a:bodyPr wrap="square" lIns="0" tIns="0" rIns="0" bIns="0" rtlCol="0" anchor="t"/>
+          <a:lstStyle/>
+          <a:p>
+            <a:pPr indent="0" marL="0">
+              <a:lnSpc>
+                <a:spcPct val="110000"/>
+              </a:lnSpc>
+              <a:buNone/>
+            </a:pPr>
+            <a:r>
+              <a:rPr lang="en-US" sz="1450" dirty="0">
+                <a:solidFill>
+                  <a:srgbClr val="FFFFFF"/>
+                </a:solidFill>
+                <a:latin typeface="Space Grotesk" pitchFamily="34" charset="0"/>
+                <a:ea typeface="Space Grotesk" pitchFamily="34" charset="-122"/>
+                <a:cs typeface="Space Grotesk" pitchFamily="34" charset="-120"/>
+              </a:rPr>
+              <a:t>On independent field truth the field-calibrated model beats NMD2023 — 43.1% → 50.2%, and 57.9% on forest type.</a:t>
+            </a:r>
+            <a:endParaRPr lang="en-US" sz="1450" dirty="0"/>
+          </a:p>
+        </p:txBody>
+      </p:sp>
+      <p:sp>
+        <p:nvSpPr>
+          <p:cNvPr id="7" name="Shape 5"/>
+          <p:cNvSpPr/>
+          <p:nvPr/>
+        </p:nvSpPr>
+        <p:spPr>
+          <a:xfrm>
+            <a:off x="6263640" y="1371600"/>
+            <a:ext cx="5212080" cy="1691640"/>
+          </a:xfrm>
+          <a:prstGeom prst="roundRect">
+            <a:avLst>
+              <a:gd name="adj" fmla="val 5405"/>
+            </a:avLst>
+          </a:prstGeom>
+          <a:solidFill>
+            <a:srgbClr val="145043"/>
+          </a:solidFill>
+          <a:ln/>
+          <a:effectLst>
+            <a:outerShdw sx="100000" sy="100000" kx="0" ky="0" algn="bl" rotWithShape="0" blurRad="101600" dist="38100" dir="5400000">
+              <a:srgbClr val="000000">
+                <a:alpha val="35000"/>
+              </a:srgbClr>
+            </a:outerShdw>
+          </a:effectLst>
+        </p:spPr>
+      </p:sp>
+      <p:sp>
+        <p:nvSpPr>
+          <p:cNvPr id="8" name="Text 6"/>
+          <p:cNvSpPr/>
+          <p:nvPr/>
+        </p:nvSpPr>
+        <p:spPr>
+          <a:xfrm>
+            <a:off x="6492240" y="1508760"/>
+            <a:ext cx="4754880" cy="457200"/>
+          </a:xfrm>
+          <a:prstGeom prst="rect">
+            <a:avLst/>
+          </a:prstGeom>
+          <a:noFill/>
+          <a:ln/>
+        </p:spPr>
+        <p:txBody>
+          <a:bodyPr wrap="square" lIns="0" tIns="0" rIns="0" bIns="0" rtlCol="0" anchor="t"/>
+          <a:lstStyle/>
+          <a:p>
+            <a:pPr indent="0" marL="0">
+              <a:buNone/>
+            </a:pPr>
+            <a:r>
+              <a:rPr lang="en-US" sz="1800" b="1" dirty="0">
+                <a:solidFill>
+                  <a:srgbClr val="CDFCE3"/>
+                </a:solidFill>
+                <a:latin typeface="Space Grotesk" pitchFamily="34" charset="0"/>
+                <a:ea typeface="Space Grotesk" pitchFamily="34" charset="-122"/>
+                <a:cs typeface="Space Grotesk" pitchFamily="34" charset="-120"/>
+              </a:rPr>
+              <a:t>Deploy the pair</a:t>
+            </a:r>
+            <a:endParaRPr lang="en-US" sz="1800" dirty="0"/>
+          </a:p>
+        </p:txBody>
+      </p:sp>
+      <p:sp>
+        <p:nvSpPr>
+          <p:cNvPr id="9" name="Text 7"/>
+          <p:cNvSpPr/>
+          <p:nvPr/>
+        </p:nvSpPr>
+        <p:spPr>
+          <a:xfrm>
+            <a:off x="6492240" y="1938528"/>
+            <a:ext cx="4754880" cy="1005840"/>
+          </a:xfrm>
+          <a:prstGeom prst="rect">
+            <a:avLst/>
+          </a:prstGeom>
+          <a:noFill/>
+          <a:ln/>
+        </p:spPr>
+        <p:txBody>
+          <a:bodyPr wrap="square" lIns="0" tIns="0" rIns="0" bIns="0" rtlCol="0" anchor="t"/>
+          <a:lstStyle/>
+          <a:p>
+            <a:pPr indent="0" marL="0">
+              <a:lnSpc>
+                <a:spcPct val="110000"/>
+              </a:lnSpc>
+              <a:buNone/>
+            </a:pPr>
+            <a:r>
+              <a:rPr lang="en-US" sz="1450" dirty="0">
+                <a:solidFill>
+                  <a:srgbClr val="FFFFFF"/>
+                </a:solidFill>
+                <a:latin typeface="Space Grotesk" pitchFamily="34" charset="0"/>
+                <a:ea typeface="Space Grotesk" pitchFamily="34" charset="-122"/>
+                <a:cs typeface="Space Grotesk" pitchFamily="34" charset="-120"/>
+              </a:rPr>
+              <a:t>Ship the distilled 28-class base plus the forest-type fraction layer: hard mask decides forest, fractions decide species.</a:t>
+            </a:r>
+            <a:endParaRPr lang="en-US" sz="1450" dirty="0"/>
+          </a:p>
+        </p:txBody>
+      </p:sp>
+      <p:sp>
+        <p:nvSpPr>
+          <p:cNvPr id="10" name="Shape 8"/>
+          <p:cNvSpPr/>
+          <p:nvPr/>
+        </p:nvSpPr>
+        <p:spPr>
+          <a:xfrm>
+            <a:off x="731520" y="3246120"/>
+            <a:ext cx="5212080" cy="1691640"/>
+          </a:xfrm>
+          <a:prstGeom prst="roundRect">
+            <a:avLst>
+              <a:gd name="adj" fmla="val 5405"/>
+            </a:avLst>
+          </a:prstGeom>
+          <a:solidFill>
+            <a:srgbClr val="145043"/>
+          </a:solidFill>
+          <a:ln/>
+          <a:effectLst>
+            <a:outerShdw sx="100000" sy="100000" kx="0" ky="0" algn="bl" rotWithShape="0" blurRad="101600" dist="38100" dir="5400000">
+              <a:srgbClr val="000000">
+                <a:alpha val="35000"/>
+              </a:srgbClr>
+            </a:outerShdw>
+          </a:effectLst>
+        </p:spPr>
+      </p:sp>
+      <p:sp>
+        <p:nvSpPr>
+          <p:cNvPr id="11" name="Text 9"/>
+          <p:cNvSpPr/>
+          <p:nvPr/>
+        </p:nvSpPr>
+        <p:spPr>
+          <a:xfrm>
+            <a:off x="960120" y="3383280"/>
+            <a:ext cx="4754880" cy="457200"/>
+          </a:xfrm>
+          <a:prstGeom prst="rect">
+            <a:avLst/>
+          </a:prstGeom>
+          <a:noFill/>
+          <a:ln/>
+        </p:spPr>
+        <p:txBody>
+          <a:bodyPr wrap="square" lIns="0" tIns="0" rIns="0" bIns="0" rtlCol="0" anchor="t"/>
+          <a:lstStyle/>
+          <a:p>
+            <a:pPr indent="0" marL="0">
+              <a:buNone/>
+            </a:pPr>
+            <a:r>
+              <a:rPr lang="en-US" sz="1800" b="1" dirty="0">
+                <a:solidFill>
+                  <a:srgbClr val="FF826C"/>
+                </a:solidFill>
+                <a:latin typeface="Space Grotesk" pitchFamily="34" charset="0"/>
+                <a:ea typeface="Space Grotesk" pitchFamily="34" charset="-122"/>
+                <a:cs typeface="Space Grotesk" pitchFamily="34" charset="-120"/>
+              </a:rPr>
+              <a:t>Tessera for cost</a:t>
+            </a:r>
+            <a:endParaRPr lang="en-US" sz="1800" dirty="0"/>
+          </a:p>
+        </p:txBody>
+      </p:sp>
+      <p:sp>
+        <p:nvSpPr>
+          <p:cNvPr id="12" name="Text 10"/>
+          <p:cNvSpPr/>
+          <p:nvPr/>
+        </p:nvSpPr>
+        <p:spPr>
+          <a:xfrm>
+            <a:off x="960120" y="3813048"/>
+            <a:ext cx="4754880" cy="1005840"/>
+          </a:xfrm>
+          <a:prstGeom prst="rect">
+            <a:avLst/>
+          </a:prstGeom>
+          <a:noFill/>
+          <a:ln/>
+        </p:spPr>
+        <p:txBody>
+          <a:bodyPr wrap="square" lIns="0" tIns="0" rIns="0" bIns="0" rtlCol="0" anchor="t"/>
+          <a:lstStyle/>
+          <a:p>
+            <a:pPr indent="0" marL="0">
+              <a:lnSpc>
+                <a:spcPct val="110000"/>
+              </a:lnSpc>
+              <a:buNone/>
+            </a:pPr>
+            <a:r>
+              <a:rPr lang="en-US" sz="1450" dirty="0">
+                <a:solidFill>
+                  <a:srgbClr val="FFFFFF"/>
+                </a:solidFill>
+                <a:latin typeface="Space Grotesk" pitchFamily="34" charset="0"/>
+                <a:ea typeface="Space Grotesk" pitchFamily="34" charset="-122"/>
+                <a:cs typeface="Space Grotesk" pitchFamily="34" charset="-120"/>
+              </a:rPr>
+              <a:t>Use Tessera's precomputed embeddings for deployment — it ties the 600M model at a fraction of the compute.</a:t>
+            </a:r>
+            <a:endParaRPr lang="en-US" sz="1450" dirty="0"/>
+          </a:p>
+        </p:txBody>
+      </p:sp>
+      <p:sp>
+        <p:nvSpPr>
+          <p:cNvPr id="13" name="Shape 11"/>
+          <p:cNvSpPr/>
+          <p:nvPr/>
+        </p:nvSpPr>
+        <p:spPr>
+          <a:xfrm>
+            <a:off x="6263640" y="3246120"/>
+            <a:ext cx="5212080" cy="1691640"/>
+          </a:xfrm>
+          <a:prstGeom prst="roundRect">
+            <a:avLst>
+              <a:gd name="adj" fmla="val 5405"/>
+            </a:avLst>
+          </a:prstGeom>
+          <a:solidFill>
+            <a:srgbClr val="145043"/>
+          </a:solidFill>
+          <a:ln/>
+          <a:effectLst>
+            <a:outerShdw sx="100000" sy="100000" kx="0" ky="0" algn="bl" rotWithShape="0" blurRad="101600" dist="38100" dir="5400000">
+              <a:srgbClr val="000000">
+                <a:alpha val="35000"/>
+              </a:srgbClr>
+            </a:outerShdw>
+          </a:effectLst>
+        </p:spPr>
+      </p:sp>
+      <p:sp>
+        <p:nvSpPr>
+          <p:cNvPr id="14" name="Text 12"/>
+          <p:cNvSpPr/>
+          <p:nvPr/>
+        </p:nvSpPr>
+        <p:spPr>
+          <a:xfrm>
+            <a:off x="6492240" y="3383280"/>
+            <a:ext cx="4754880" cy="457200"/>
+          </a:xfrm>
+          <a:prstGeom prst="rect">
+            <a:avLst/>
+          </a:prstGeom>
+          <a:noFill/>
+          <a:ln/>
+        </p:spPr>
+        <p:txBody>
+          <a:bodyPr wrap="square" lIns="0" tIns="0" rIns="0" bIns="0" rtlCol="0" anchor="t"/>
+          <a:lstStyle/>
+          <a:p>
+            <a:pPr indent="0" marL="0">
+              <a:buNone/>
+            </a:pPr>
+            <a:r>
+              <a:rPr lang="en-US" sz="1800" b="1" dirty="0">
+                <a:solidFill>
+                  <a:srgbClr val="FF826C"/>
+                </a:solidFill>
+                <a:latin typeface="Space Grotesk" pitchFamily="34" charset="0"/>
+                <a:ea typeface="Space Grotesk" pitchFamily="34" charset="-122"/>
+                <a:cs typeface="Space Grotesk" pitchFamily="34" charset="-120"/>
+              </a:rPr>
+              <a:t>Skip the ensemble</a:t>
+            </a:r>
+            <a:endParaRPr lang="en-US" sz="1800" dirty="0"/>
+          </a:p>
+        </p:txBody>
+      </p:sp>
+      <p:sp>
+        <p:nvSpPr>
+          <p:cNvPr id="15" name="Text 13"/>
+          <p:cNvSpPr/>
+          <p:nvPr/>
+        </p:nvSpPr>
+        <p:spPr>
+          <a:xfrm>
+            <a:off x="6492240" y="3813048"/>
+            <a:ext cx="4754880" cy="1005840"/>
+          </a:xfrm>
+          <a:prstGeom prst="rect">
+            <a:avLst/>
+          </a:prstGeom>
+          <a:noFill/>
+          <a:ln/>
+        </p:spPr>
+        <p:txBody>
+          <a:bodyPr wrap="square" lIns="0" tIns="0" rIns="0" bIns="0" rtlCol="0" anchor="t"/>
+          <a:lstStyle/>
+          <a:p>
+            <a:pPr indent="0" marL="0">
+              <a:lnSpc>
+                <a:spcPct val="110000"/>
+              </a:lnSpc>
+              <a:buNone/>
+            </a:pPr>
+            <a:r>
+              <a:rPr lang="en-US" sz="1450" dirty="0">
+                <a:solidFill>
+                  <a:srgbClr val="FFFFFF"/>
+                </a:solidFill>
+                <a:latin typeface="Space Grotesk" pitchFamily="34" charset="0"/>
+                <a:ea typeface="Space Grotesk" pitchFamily="34" charset="-122"/>
+                <a:cs typeface="Space Grotesk" pitchFamily="34" charset="-120"/>
+              </a:rPr>
+              <a:t>Combining models is not worth it: the gain is within noise and adds serving complexity for nothing.</a:t>
+            </a:r>
+            <a:endParaRPr lang="en-US" sz="1450" dirty="0"/>
+          </a:p>
+        </p:txBody>
+      </p:sp>
+      <p:sp>
+        <p:nvSpPr>
+          <p:cNvPr id="16" name="Text 14"/>
+          <p:cNvSpPr/>
+          <p:nvPr/>
+        </p:nvSpPr>
+        <p:spPr>
+          <a:xfrm>
+            <a:off x="731520" y="5257800"/>
+            <a:ext cx="10744200" cy="548640"/>
+          </a:xfrm>
+          <a:prstGeom prst="rect">
+            <a:avLst/>
+          </a:prstGeom>
+          <a:noFill/>
+          <a:ln/>
+        </p:spPr>
+        <p:txBody>
+          <a:bodyPr wrap="square" lIns="0" tIns="0" rIns="0" bIns="0" rtlCol="0" anchor="ctr"/>
+          <a:lstStyle/>
+          <a:p>
+            <a:pPr indent="0" marL="0">
+              <a:lnSpc>
+                <a:spcPct val="110000"/>
+              </a:lnSpc>
+              <a:buNone/>
+            </a:pPr>
+            <a:r>
+              <a:rPr lang="en-US" sz="1200" i="1" dirty="0">
+                <a:solidFill>
+                  <a:srgbClr val="9DBDB0"/>
+                </a:solidFill>
+                <a:latin typeface="Space Grotesk" pitchFamily="34" charset="0"/>
+                <a:ea typeface="Space Grotesk" pitchFamily="34" charset="-122"/>
+                <a:cs typeface="Space Grotesk" pitchFamily="34" charset="-120"/>
+              </a:rPr>
+              <a:t>Provenance: docs/data/{distill,tradslag_fraction,hybrid_nfi_head}_finding.md — all held-out figures use 209 plots, grouped-tile split, calibration on the train side only.</a:t>
+            </a:r>
+            <a:endParaRPr lang="en-US" sz="1200" dirty="0"/>
           </a:p>
         </p:txBody>
       </p:sp>
